--- a/Enterprise_AI_Architecture_AWS.pptx
+++ b/Enterprise_AI_Architecture_AWS.pptx
@@ -5,12 +5,13 @@
     <p:sldMasterId id="2147483648" r:id="rId1"/>
   </p:sldMasterIdLst>
   <p:notesMasterIdLst>
-    <p:notesMasterId r:id="rId5"/>
+    <p:notesMasterId r:id="rId6"/>
   </p:notesMasterIdLst>
   <p:sldIdLst>
-    <p:sldId id="258" r:id="rId2"/>
-    <p:sldId id="257" r:id="rId3"/>
-    <p:sldId id="256" r:id="rId4"/>
+    <p:sldId id="259" r:id="rId2"/>
+    <p:sldId id="258" r:id="rId3"/>
+    <p:sldId id="257" r:id="rId4"/>
+    <p:sldId id="256" r:id="rId5"/>
   </p:sldIdLst>
   <p:sldSz cx="12192000" cy="6858000"/>
   <p:notesSz cx="6858000" cy="12192000"/>
@@ -285,7 +286,7 @@
           <a:p>
             <a:r>
               <a:rPr lang="en-US" dirty="0"/>
-              <a:t>Educator Buddy: AWS-based RAG. UI (Amplify/CloudFront) -&gt; orchestration (API Gateway/Cognito -&gt; Lambda input assembler -&gt; Bedrock Agent -&gt; OpenSearch Serverless retrieval -&gt; Bedrock + Guardrails generation) -&gt; outputs. Ingestion pipeline (S3 -&gt; Textract/BDA -&gt; chunk -&gt; Titan embeddings -&gt; OpenSearch) runs in the background. Retrieval store is OpenSearch Serverless only (no managed Bedrock KB). Glue + DynamoDB/Aurora hold ontology and mappings.</a:t>
+              <a:t>Educator Buddy AWS RAG architecture. UI: React app on Amplify/CloudFront, upload &amp; chat. Auth/API Gateway + Cognito live in cross-cutting services row, not duplicated in UI. RAG orchestration: Retrieval (queries vector DB) and Mapping table (manual, DynamoDB) run in parallel, feeding the Input assembler which builds the request JSON, which feeds the Bedrock Agent. Agent calls a separate LLM layer (Claude, Titan, Llama on Bedrock + Guardrails). Output: draft artefacts, citations and sources, and follow-up chat which loops back into the agent for refinement. Ingestion pipeline: trainer-provided docs/PDFs/URLs land in S3, extracted via Textract, chunked via Lambda, embedded via Titan, stored in a Vector DB (OpenSearch) that Retrieval queries directly. Icons are simple placeholders (network access to fetch official AWS icons was unavailable in this environment) — swap in the official AWS Architecture Icons pack for a final version.</a:t>
             </a:r>
           </a:p>
         </p:txBody>
@@ -316,7 +317,7 @@
     </p:spTree>
     <p:extLst>
       <p:ext uri="{BB962C8B-B14F-4D97-AF65-F5344CB8AC3E}">
-        <p14:creationId xmlns:p14="http://schemas.microsoft.com/office/powerpoint/2010/main" val="230291323"/>
+        <p14:creationId xmlns:p14="http://schemas.microsoft.com/office/powerpoint/2010/main" val="2073079932"/>
       </p:ext>
     </p:extLst>
   </p:cSld>
@@ -370,7 +371,10 @@
           <a:bodyPr/>
           <a:lstStyle/>
           <a:p>
-            <a:endParaRPr lang="en-US" dirty="0"/>
+            <a:r>
+              <a:rPr lang="en-US" dirty="0"/>
+              <a:t>Educator Buddy: AWS-based RAG. UI (Amplify/CloudFront) -&gt; orchestration (API Gateway/Cognito -&gt; Lambda input assembler -&gt; Bedrock Agent -&gt; OpenSearch Serverless retrieval -&gt; Bedrock + Guardrails generation) -&gt; outputs. Ingestion pipeline (S3 -&gt; Textract/BDA -&gt; chunk -&gt; Titan embeddings -&gt; OpenSearch) runs in the background. Retrieval store is OpenSearch Serverless only (no managed Bedrock KB). Glue + DynamoDB/Aurora hold ontology and mappings.</a:t>
+            </a:r>
           </a:p>
         </p:txBody>
       </p:sp>
@@ -400,7 +404,7 @@
     </p:spTree>
     <p:extLst>
       <p:ext uri="{BB962C8B-B14F-4D97-AF65-F5344CB8AC3E}">
-        <p14:creationId xmlns:p14="http://schemas.microsoft.com/office/powerpoint/2010/main" val="3920008309"/>
+        <p14:creationId xmlns:p14="http://schemas.microsoft.com/office/powerpoint/2010/main" val="230291323"/>
       </p:ext>
     </p:extLst>
   </p:cSld>
@@ -476,6 +480,90 @@
             <a:fld id="{F7021451-1387-4CA6-816F-3879F97B5CBC}" type="slidenum">
               <a:rPr lang="en-US"/>
               <a:t>3</a:t>
+            </a:fld>
+            <a:endParaRPr lang="en-US"/>
+          </a:p>
+        </p:txBody>
+      </p:sp>
+    </p:spTree>
+    <p:extLst>
+      <p:ext uri="{BB962C8B-B14F-4D97-AF65-F5344CB8AC3E}">
+        <p14:creationId xmlns:p14="http://schemas.microsoft.com/office/powerpoint/2010/main" val="3920008309"/>
+      </p:ext>
+    </p:extLst>
+  </p:cSld>
+  <p:clrMapOvr>
+    <a:masterClrMapping/>
+  </p:clrMapOvr>
+</p:notes>
+</file>
+
+<file path=ppt/notesSlides/notesSlide4.xml><?xml version="1.0" encoding="utf-8"?>
+<p:notes xmlns:a="http://schemas.openxmlformats.org/drawingml/2006/main" xmlns:r="http://schemas.openxmlformats.org/officeDocument/2006/relationships" xmlns:p="http://schemas.openxmlformats.org/presentationml/2006/main">
+  <p:cSld>
+    <p:spTree>
+      <p:nvGrpSpPr>
+        <p:cNvPr id="1" name=""/>
+        <p:cNvGrpSpPr/>
+        <p:nvPr/>
+      </p:nvGrpSpPr>
+      <p:grpSpPr>
+        <a:xfrm>
+          <a:off x="0" y="0"/>
+          <a:ext cx="0" cy="0"/>
+          <a:chOff x="0" y="0"/>
+          <a:chExt cx="0" cy="0"/>
+        </a:xfrm>
+      </p:grpSpPr>
+      <p:sp>
+        <p:nvSpPr>
+          <p:cNvPr id="2" name="Slide Image Placeholder 1"/>
+          <p:cNvSpPr>
+            <a:spLocks noGrp="1" noRot="1" noChangeAspect="1"/>
+          </p:cNvSpPr>
+          <p:nvPr>
+            <p:ph type="sldImg"/>
+          </p:nvPr>
+        </p:nvSpPr>
+        <p:spPr/>
+      </p:sp>
+      <p:sp>
+        <p:nvSpPr>
+          <p:cNvPr id="3" name="Notes Placeholder 2"/>
+          <p:cNvSpPr>
+            <a:spLocks noGrp="1"/>
+          </p:cNvSpPr>
+          <p:nvPr>
+            <p:ph type="body" idx="1"/>
+          </p:nvPr>
+        </p:nvSpPr>
+        <p:spPr/>
+        <p:txBody>
+          <a:bodyPr/>
+          <a:lstStyle/>
+          <a:p>
+            <a:endParaRPr lang="en-US" dirty="0"/>
+          </a:p>
+        </p:txBody>
+      </p:sp>
+      <p:sp>
+        <p:nvSpPr>
+          <p:cNvPr id="4" name="Slide Number Placeholder 3"/>
+          <p:cNvSpPr>
+            <a:spLocks noGrp="1"/>
+          </p:cNvSpPr>
+          <p:nvPr>
+            <p:ph type="sldNum" sz="quarter" idx="10"/>
+          </p:nvPr>
+        </p:nvSpPr>
+        <p:spPr/>
+        <p:txBody>
+          <a:bodyPr/>
+          <a:lstStyle/>
+          <a:p>
+            <a:fld id="{F7021451-1387-4CA6-816F-3879F97B5CBC}" type="slidenum">
+              <a:rPr lang="en-US"/>
+              <a:t>4</a:t>
             </a:fld>
             <a:endParaRPr lang="en-US"/>
           </a:p>
@@ -831,7 +919,7 @@
         </p:nvSpPr>
         <p:spPr>
           <a:xfrm>
-            <a:off x="457200" y="219456"/>
+            <a:off x="457200" y="201168"/>
             <a:ext cx="11247120" cy="457200"/>
           </a:xfrm>
           <a:prstGeom prst="rect">
@@ -870,7 +958,7 @@
         </p:nvSpPr>
         <p:spPr>
           <a:xfrm>
-            <a:off x="457200" y="658368"/>
+            <a:off x="457200" y="640080"/>
             <a:ext cx="11247120" cy="274320"/>
           </a:xfrm>
           <a:prstGeom prst="rect">
@@ -909,20 +997,20 @@
         </p:nvSpPr>
         <p:spPr>
           <a:xfrm>
-            <a:off x="457200" y="932688"/>
-            <a:ext cx="3017520" cy="3108960"/>
+            <a:off x="457200" y="2003162"/>
+            <a:ext cx="3017520" cy="1920240"/>
           </a:xfrm>
           <a:prstGeom prst="roundRect">
             <a:avLst>
-              <a:gd name="adj" fmla="val 2424"/>
+              <a:gd name="adj" fmla="val 3333"/>
             </a:avLst>
           </a:prstGeom>
           <a:solidFill>
-            <a:srgbClr val="F5F9FE"/>
+            <a:srgbClr val="FAFAF8"/>
           </a:solidFill>
           <a:ln w="12700">
             <a:solidFill>
-              <a:srgbClr val="D6E5F5"/>
+              <a:srgbClr val="DEDCD3"/>
             </a:solidFill>
             <a:prstDash val="solid"/>
           </a:ln>
@@ -936,20 +1024,20 @@
         </p:nvSpPr>
         <p:spPr>
           <a:xfrm>
-            <a:off x="8229600" y="932688"/>
-            <a:ext cx="3474720" cy="3108960"/>
+            <a:off x="3749040" y="2003162"/>
+            <a:ext cx="4206240" cy="3438144"/>
           </a:xfrm>
           <a:prstGeom prst="roundRect">
             <a:avLst>
-              <a:gd name="adj" fmla="val 2353"/>
+              <a:gd name="adj" fmla="val 1862"/>
             </a:avLst>
           </a:prstGeom>
           <a:solidFill>
-            <a:srgbClr val="F0FAF6"/>
+            <a:srgbClr val="FAFAF8"/>
           </a:solidFill>
           <a:ln w="12700">
             <a:solidFill>
-              <a:srgbClr val="D3EDE4"/>
+              <a:srgbClr val="DEDCD3"/>
             </a:solidFill>
             <a:prstDash val="solid"/>
           </a:ln>
@@ -963,20 +1051,20 @@
         </p:nvSpPr>
         <p:spPr>
           <a:xfrm>
-            <a:off x="3749040" y="932688"/>
-            <a:ext cx="4206240" cy="3438144"/>
+            <a:off x="8229600" y="2003162"/>
+            <a:ext cx="3474720" cy="2514600"/>
           </a:xfrm>
           <a:prstGeom prst="roundRect">
             <a:avLst>
-              <a:gd name="adj" fmla="val 2128"/>
+              <a:gd name="adj" fmla="val 2545"/>
             </a:avLst>
           </a:prstGeom>
           <a:solidFill>
-            <a:srgbClr val="F6F5FD"/>
+            <a:srgbClr val="FAFAF8"/>
           </a:solidFill>
           <a:ln w="12700">
             <a:solidFill>
-              <a:srgbClr val="DAD7F3"/>
+              <a:srgbClr val="DEDCD3"/>
             </a:solidFill>
             <a:prstDash val="solid"/>
           </a:ln>
@@ -990,8 +1078,8 @@
         </p:nvSpPr>
         <p:spPr>
           <a:xfrm>
-            <a:off x="621792" y="987552"/>
-            <a:ext cx="2688336" cy="274320"/>
+            <a:off x="621792" y="2058026"/>
+            <a:ext cx="2688336" cy="256032"/>
           </a:xfrm>
           <a:prstGeom prst="rect">
             <a:avLst/>
@@ -1007,17 +1095,17 @@
               <a:buNone/>
             </a:pPr>
             <a:r>
-              <a:rPr lang="en-US" sz="1300" b="1" dirty="0">
-                <a:solidFill>
-                  <a:srgbClr val="0C447C"/>
-                </a:solidFill>
-                <a:latin typeface="Calibri" pitchFamily="34" charset="0"/>
-                <a:ea typeface="Calibri" pitchFamily="34" charset="-122"/>
-                <a:cs typeface="Calibri" pitchFamily="34" charset="-120"/>
-              </a:rPr>
-              <a:t>User interface</a:t>
-            </a:r>
-            <a:endParaRPr lang="en-US" sz="1300" dirty="0"/>
+              <a:rPr lang="en-US" sz="1250" b="1" dirty="0">
+                <a:solidFill>
+                  <a:srgbClr val="2F4858"/>
+                </a:solidFill>
+                <a:latin typeface="Calibri" pitchFamily="34" charset="0"/>
+                <a:ea typeface="Calibri" pitchFamily="34" charset="-122"/>
+                <a:cs typeface="Calibri" pitchFamily="34" charset="-120"/>
+              </a:rPr>
+              <a:t>USER INTERFACE (REACT)</a:t>
+            </a:r>
+            <a:endParaRPr lang="en-US" sz="1250" dirty="0"/>
           </a:p>
         </p:txBody>
       </p:sp>
@@ -1029,8 +1117,8 @@
         </p:nvSpPr>
         <p:spPr>
           <a:xfrm>
-            <a:off x="3913632" y="987552"/>
-            <a:ext cx="3877056" cy="274320"/>
+            <a:off x="3913632" y="2058026"/>
+            <a:ext cx="3877056" cy="256032"/>
           </a:xfrm>
           <a:prstGeom prst="rect">
             <a:avLst/>
@@ -1046,17 +1134,17 @@
               <a:buNone/>
             </a:pPr>
             <a:r>
-              <a:rPr lang="en-US" sz="1300" b="1" dirty="0">
-                <a:solidFill>
-                  <a:srgbClr val="3C3489"/>
-                </a:solidFill>
-                <a:latin typeface="Calibri" pitchFamily="34" charset="0"/>
-                <a:ea typeface="Calibri" pitchFamily="34" charset="-122"/>
-                <a:cs typeface="Calibri" pitchFamily="34" charset="-120"/>
-              </a:rPr>
-              <a:t>RAG orchestration</a:t>
-            </a:r>
-            <a:endParaRPr lang="en-US" sz="1300" dirty="0"/>
+              <a:rPr lang="en-US" sz="1250" b="1" dirty="0">
+                <a:solidFill>
+                  <a:srgbClr val="2F4858"/>
+                </a:solidFill>
+                <a:latin typeface="Calibri" pitchFamily="34" charset="0"/>
+                <a:ea typeface="Calibri" pitchFamily="34" charset="-122"/>
+                <a:cs typeface="Calibri" pitchFamily="34" charset="-120"/>
+              </a:rPr>
+              <a:t>RAG ORCHESTRATION FLOW</a:t>
+            </a:r>
+            <a:endParaRPr lang="en-US" sz="1250" dirty="0"/>
           </a:p>
         </p:txBody>
       </p:sp>
@@ -1068,8 +1156,8 @@
         </p:nvSpPr>
         <p:spPr>
           <a:xfrm>
-            <a:off x="8394192" y="987552"/>
-            <a:ext cx="3145536" cy="274320"/>
+            <a:off x="8394192" y="2058026"/>
+            <a:ext cx="3145536" cy="256032"/>
           </a:xfrm>
           <a:prstGeom prst="rect">
             <a:avLst/>
@@ -1085,17 +1173,17 @@
               <a:buNone/>
             </a:pPr>
             <a:r>
-              <a:rPr lang="en-US" sz="1300" b="1" dirty="0">
-                <a:solidFill>
-                  <a:srgbClr val="085041"/>
-                </a:solidFill>
-                <a:latin typeface="Calibri" pitchFamily="34" charset="0"/>
-                <a:ea typeface="Calibri" pitchFamily="34" charset="-122"/>
-                <a:cs typeface="Calibri" pitchFamily="34" charset="-120"/>
-              </a:rPr>
-              <a:t>Outputs</a:t>
-            </a:r>
-            <a:endParaRPr lang="en-US" sz="1300" dirty="0"/>
+              <a:rPr lang="en-US" sz="1250" b="1" dirty="0">
+                <a:solidFill>
+                  <a:srgbClr val="2F4858"/>
+                </a:solidFill>
+                <a:latin typeface="Calibri" pitchFamily="34" charset="0"/>
+                <a:ea typeface="Calibri" pitchFamily="34" charset="-122"/>
+                <a:cs typeface="Calibri" pitchFamily="34" charset="-120"/>
+              </a:rPr>
+              <a:t>OUTPUT</a:t>
+            </a:r>
+            <a:endParaRPr lang="en-US" sz="1250" dirty="0"/>
           </a:p>
         </p:txBody>
       </p:sp>
@@ -1107,63 +1195,80 @@
         </p:nvSpPr>
         <p:spPr>
           <a:xfrm>
-            <a:off x="594360" y="1353312"/>
+            <a:off x="594360" y="2405498"/>
             <a:ext cx="2743200" cy="502920"/>
           </a:xfrm>
           <a:prstGeom prst="roundRect">
             <a:avLst>
-              <a:gd name="adj" fmla="val 10909"/>
+              <a:gd name="adj" fmla="val 9091"/>
             </a:avLst>
           </a:prstGeom>
           <a:solidFill>
-            <a:srgbClr val="E6F1FB"/>
+            <a:srgbClr val="FFFFFF"/>
           </a:solidFill>
-          <a:ln w="12700">
+          <a:ln w="9525">
             <a:solidFill>
-              <a:srgbClr val="378ADD"/>
+              <a:srgbClr val="E3E1D8"/>
             </a:solidFill>
             <a:prstDash val="solid"/>
           </a:ln>
-          <a:effectLst>
-            <a:outerShdw blurRad="63500" dist="25400" dir="5400000" algn="bl" rotWithShape="0">
-              <a:srgbClr val="000000">
-                <a:alpha val="10000"/>
-              </a:srgbClr>
-            </a:outerShdw>
-          </a:effectLst>
-        </p:spPr>
-      </p:sp>
-      <p:sp>
-        <p:nvSpPr>
-          <p:cNvPr id="11" name="Text 9"/>
-          <p:cNvSpPr/>
-          <p:nvPr/>
-        </p:nvSpPr>
-        <p:spPr>
-          <a:xfrm>
-            <a:off x="667512" y="1353312"/>
-            <a:ext cx="2596896" cy="502920"/>
-          </a:xfrm>
-          <a:prstGeom prst="rect">
-            <a:avLst/>
-          </a:prstGeom>
-          <a:noFill/>
-          <a:ln/>
-        </p:spPr>
-        <p:txBody>
-          <a:bodyPr wrap="square" lIns="25400" tIns="25400" rIns="25400" bIns="25400" rtlCol="0" anchor="ctr"/>
-          <a:lstStyle/>
-          <a:p>
-            <a:pPr marL="0" indent="0" algn="ctr">
+        </p:spPr>
+      </p:sp>
+      <p:pic>
+        <p:nvPicPr>
+          <p:cNvPr id="11" name="Image 0" descr="/home/claude/icons/end_users.png"/>
+          <p:cNvPicPr>
+            <a:picLocks noChangeAspect="1"/>
+          </p:cNvPicPr>
+          <p:nvPr/>
+        </p:nvPicPr>
+        <p:blipFill>
+          <a:blip r:embed="rId3"/>
+          <a:stretch>
+            <a:fillRect/>
+          </a:stretch>
+        </p:blipFill>
+        <p:spPr>
+          <a:xfrm>
+            <a:off x="722376" y="2501510"/>
+            <a:ext cx="310896" cy="310896"/>
+          </a:xfrm>
+          <a:prstGeom prst="rect">
+            <a:avLst/>
+          </a:prstGeom>
+        </p:spPr>
+      </p:pic>
+      <p:sp>
+        <p:nvSpPr>
+          <p:cNvPr id="12" name="Text 9"/>
+          <p:cNvSpPr/>
+          <p:nvPr/>
+        </p:nvSpPr>
+        <p:spPr>
+          <a:xfrm>
+            <a:off x="1161288" y="2405498"/>
+            <a:ext cx="2066544" cy="502920"/>
+          </a:xfrm>
+          <a:prstGeom prst="rect">
+            <a:avLst/>
+          </a:prstGeom>
+          <a:noFill/>
+          <a:ln/>
+        </p:spPr>
+        <p:txBody>
+          <a:bodyPr wrap="square" lIns="12700" tIns="12700" rIns="12700" bIns="12700" rtlCol="0" anchor="ctr"/>
+          <a:lstStyle/>
+          <a:p>
+            <a:pPr marL="0" indent="0" algn="l">
               <a:lnSpc>
-                <a:spcPct val="95000"/>
+                <a:spcPct val="97000"/>
               </a:lnSpc>
               <a:buNone/>
             </a:pPr>
             <a:r>
-              <a:rPr lang="en-US" sz="1300" b="1" dirty="0">
-                <a:solidFill>
-                  <a:srgbClr val="0C447C"/>
+              <a:rPr lang="en-US" sz="1250" b="1" dirty="0">
+                <a:solidFill>
+                  <a:srgbClr val="1B1B18"/>
                 </a:solidFill>
                 <a:latin typeface="Calibri" pitchFamily="34" charset="0"/>
                 <a:ea typeface="Calibri" pitchFamily="34" charset="-122"/>
@@ -1171,479 +1276,564 @@
               </a:rPr>
               <a:t>End users</a:t>
             </a:r>
-            <a:endParaRPr lang="en-US" sz="1300" dirty="0"/>
-          </a:p>
-          <a:p>
-            <a:pPr marL="0" indent="0" algn="ctr">
+            <a:endParaRPr lang="en-US" sz="1250" dirty="0"/>
+          </a:p>
+          <a:p>
+            <a:pPr marL="0" indent="0" algn="l">
               <a:lnSpc>
-                <a:spcPct val="95000"/>
+                <a:spcPct val="97000"/>
               </a:lnSpc>
               <a:buNone/>
             </a:pPr>
             <a:r>
-              <a:rPr lang="en-US" sz="950" dirty="0">
-                <a:solidFill>
-                  <a:srgbClr val="185FA5"/>
-                </a:solidFill>
-                <a:latin typeface="Calibri" pitchFamily="34" charset="0"/>
-                <a:ea typeface="Calibri" pitchFamily="34" charset="-122"/>
-                <a:cs typeface="Calibri" pitchFamily="34" charset="-120"/>
-              </a:rPr>
-              <a:t>trainers, learners</a:t>
-            </a:r>
-            <a:endParaRPr lang="en-US" sz="1300" dirty="0"/>
-          </a:p>
-        </p:txBody>
-      </p:sp>
-      <p:sp>
-        <p:nvSpPr>
-          <p:cNvPr id="12" name="Shape 10"/>
-          <p:cNvSpPr/>
-          <p:nvPr/>
-        </p:nvSpPr>
-        <p:spPr>
-          <a:xfrm>
-            <a:off x="594360" y="1984248"/>
+              <a:rPr lang="en-US" sz="900" dirty="0">
+                <a:solidFill>
+                  <a:srgbClr val="6B6A64"/>
+                </a:solidFill>
+                <a:latin typeface="Calibri" pitchFamily="34" charset="0"/>
+                <a:ea typeface="Calibri" pitchFamily="34" charset="-122"/>
+                <a:cs typeface="Calibri" pitchFamily="34" charset="-120"/>
+              </a:rPr>
+              <a:t>Trainers, learners</a:t>
+            </a:r>
+            <a:endParaRPr lang="en-US" sz="1250" dirty="0"/>
+          </a:p>
+        </p:txBody>
+      </p:sp>
+      <p:sp>
+        <p:nvSpPr>
+          <p:cNvPr id="13" name="Shape 10"/>
+          <p:cNvSpPr/>
+          <p:nvPr/>
+        </p:nvSpPr>
+        <p:spPr>
+          <a:xfrm>
+            <a:off x="594360" y="3036434"/>
             <a:ext cx="2743200" cy="502920"/>
           </a:xfrm>
           <a:prstGeom prst="roundRect">
             <a:avLst>
-              <a:gd name="adj" fmla="val 10909"/>
+              <a:gd name="adj" fmla="val 9091"/>
             </a:avLst>
           </a:prstGeom>
           <a:solidFill>
-            <a:srgbClr val="E6F1FB"/>
+            <a:srgbClr val="FFFFFF"/>
           </a:solidFill>
-          <a:ln w="12700">
+          <a:ln w="9525">
             <a:solidFill>
-              <a:srgbClr val="378ADD"/>
+              <a:srgbClr val="E3E1D8"/>
             </a:solidFill>
             <a:prstDash val="solid"/>
           </a:ln>
-          <a:effectLst>
-            <a:outerShdw blurRad="63500" dist="25400" dir="5400000" algn="bl" rotWithShape="0">
-              <a:srgbClr val="000000">
-                <a:alpha val="10000"/>
-              </a:srgbClr>
-            </a:outerShdw>
-          </a:effectLst>
-        </p:spPr>
-      </p:sp>
-      <p:sp>
-        <p:nvSpPr>
-          <p:cNvPr id="13" name="Text 11"/>
-          <p:cNvSpPr/>
-          <p:nvPr/>
-        </p:nvSpPr>
-        <p:spPr>
-          <a:xfrm>
-            <a:off x="667512" y="1984248"/>
-            <a:ext cx="2596896" cy="502920"/>
-          </a:xfrm>
-          <a:prstGeom prst="rect">
-            <a:avLst/>
-          </a:prstGeom>
-          <a:noFill/>
-          <a:ln/>
-        </p:spPr>
-        <p:txBody>
-          <a:bodyPr wrap="square" lIns="25400" tIns="25400" rIns="25400" bIns="25400" rtlCol="0" anchor="ctr"/>
-          <a:lstStyle/>
-          <a:p>
-            <a:pPr marL="0" indent="0" algn="ctr">
+        </p:spPr>
+      </p:sp>
+      <p:pic>
+        <p:nvPicPr>
+          <p:cNvPr id="14" name="Image 1" descr="/home/claude/icons/react_logo.png"/>
+          <p:cNvPicPr>
+            <a:picLocks noChangeAspect="1"/>
+          </p:cNvPicPr>
+          <p:nvPr/>
+        </p:nvPicPr>
+        <p:blipFill>
+          <a:blip r:embed="rId4"/>
+          <a:stretch>
+            <a:fillRect/>
+          </a:stretch>
+        </p:blipFill>
+        <p:spPr>
+          <a:xfrm>
+            <a:off x="722376" y="3132446"/>
+            <a:ext cx="310896" cy="310896"/>
+          </a:xfrm>
+          <a:prstGeom prst="rect">
+            <a:avLst/>
+          </a:prstGeom>
+        </p:spPr>
+      </p:pic>
+      <p:sp>
+        <p:nvSpPr>
+          <p:cNvPr id="15" name="Text 11"/>
+          <p:cNvSpPr/>
+          <p:nvPr/>
+        </p:nvSpPr>
+        <p:spPr>
+          <a:xfrm>
+            <a:off x="1161288" y="3036434"/>
+            <a:ext cx="2066544" cy="502920"/>
+          </a:xfrm>
+          <a:prstGeom prst="rect">
+            <a:avLst/>
+          </a:prstGeom>
+          <a:noFill/>
+          <a:ln/>
+        </p:spPr>
+        <p:txBody>
+          <a:bodyPr wrap="square" lIns="12700" tIns="12700" rIns="12700" bIns="12700" rtlCol="0" anchor="ctr"/>
+          <a:lstStyle/>
+          <a:p>
+            <a:pPr marL="0" indent="0" algn="l">
               <a:lnSpc>
-                <a:spcPct val="95000"/>
+                <a:spcPct val="97000"/>
               </a:lnSpc>
               <a:buNone/>
             </a:pPr>
             <a:r>
-              <a:rPr lang="en-US" sz="1300" b="1" dirty="0">
-                <a:solidFill>
-                  <a:srgbClr val="0C447C"/>
-                </a:solidFill>
-                <a:latin typeface="Calibri" pitchFamily="34" charset="0"/>
-                <a:ea typeface="Calibri" pitchFamily="34" charset="-122"/>
-                <a:cs typeface="Calibri" pitchFamily="34" charset="-120"/>
-              </a:rPr>
-              <a:t>Web app</a:t>
-            </a:r>
-            <a:endParaRPr lang="en-US" sz="1300" dirty="0"/>
-          </a:p>
-          <a:p>
-            <a:pPr marL="0" indent="0" algn="ctr">
+              <a:rPr lang="en-US" sz="1250" b="1" dirty="0">
+                <a:solidFill>
+                  <a:srgbClr val="1B1B18"/>
+                </a:solidFill>
+                <a:latin typeface="Calibri" pitchFamily="34" charset="0"/>
+                <a:ea typeface="Calibri" pitchFamily="34" charset="-122"/>
+                <a:cs typeface="Calibri" pitchFamily="34" charset="-120"/>
+              </a:rPr>
+              <a:t>React web app</a:t>
+            </a:r>
+            <a:endParaRPr lang="en-US" sz="1250" dirty="0"/>
+          </a:p>
+          <a:p>
+            <a:pPr marL="0" indent="0" algn="l">
               <a:lnSpc>
-                <a:spcPct val="95000"/>
+                <a:spcPct val="97000"/>
               </a:lnSpc>
               <a:buNone/>
             </a:pPr>
             <a:r>
-              <a:rPr lang="en-US" sz="950" dirty="0">
-                <a:solidFill>
-                  <a:srgbClr val="185FA5"/>
-                </a:solidFill>
-                <a:latin typeface="Calibri" pitchFamily="34" charset="0"/>
-                <a:ea typeface="Calibri" pitchFamily="34" charset="-122"/>
-                <a:cs typeface="Calibri" pitchFamily="34" charset="-120"/>
-              </a:rPr>
-              <a:t>AWS Amplify + CloudFront</a:t>
-            </a:r>
-            <a:endParaRPr lang="en-US" sz="1300" dirty="0"/>
-          </a:p>
-        </p:txBody>
-      </p:sp>
-      <p:sp>
-        <p:nvSpPr>
-          <p:cNvPr id="14" name="Shape 12"/>
-          <p:cNvSpPr/>
-          <p:nvPr/>
-        </p:nvSpPr>
-        <p:spPr>
-          <a:xfrm>
-            <a:off x="594360" y="2615184"/>
+              <a:rPr lang="en-US" sz="900" dirty="0">
+                <a:solidFill>
+                  <a:srgbClr val="6B6A64"/>
+                </a:solidFill>
+                <a:latin typeface="Calibri" pitchFamily="34" charset="0"/>
+                <a:ea typeface="Calibri" pitchFamily="34" charset="-122"/>
+                <a:cs typeface="Calibri" pitchFamily="34" charset="-120"/>
+              </a:rPr>
+              <a:t>Amplify + CloudFront</a:t>
+            </a:r>
+            <a:endParaRPr lang="en-US" sz="1250" dirty="0"/>
+          </a:p>
+        </p:txBody>
+      </p:sp>
+      <p:sp>
+        <p:nvSpPr>
+          <p:cNvPr id="16" name="Shape 12"/>
+          <p:cNvSpPr/>
+          <p:nvPr/>
+        </p:nvSpPr>
+        <p:spPr>
+          <a:xfrm>
+            <a:off x="594360" y="3667370"/>
             <a:ext cx="2743200" cy="502920"/>
           </a:xfrm>
           <a:prstGeom prst="roundRect">
             <a:avLst>
-              <a:gd name="adj" fmla="val 10909"/>
+              <a:gd name="adj" fmla="val 9091"/>
             </a:avLst>
           </a:prstGeom>
           <a:solidFill>
-            <a:srgbClr val="E6F1FB"/>
+            <a:srgbClr val="FFFFFF"/>
           </a:solidFill>
-          <a:ln w="12700">
+          <a:ln w="9525">
             <a:solidFill>
-              <a:srgbClr val="378ADD"/>
+              <a:srgbClr val="E3E1D8"/>
             </a:solidFill>
             <a:prstDash val="solid"/>
           </a:ln>
-          <a:effectLst>
-            <a:outerShdw blurRad="63500" dist="25400" dir="5400000" algn="bl" rotWithShape="0">
-              <a:srgbClr val="000000">
-                <a:alpha val="10000"/>
-              </a:srgbClr>
-            </a:outerShdw>
-          </a:effectLst>
-        </p:spPr>
-      </p:sp>
-      <p:sp>
-        <p:nvSpPr>
-          <p:cNvPr id="15" name="Text 13"/>
-          <p:cNvSpPr/>
-          <p:nvPr/>
-        </p:nvSpPr>
-        <p:spPr>
-          <a:xfrm>
-            <a:off x="667512" y="2615184"/>
-            <a:ext cx="2596896" cy="502920"/>
-          </a:xfrm>
-          <a:prstGeom prst="rect">
-            <a:avLst/>
-          </a:prstGeom>
-          <a:noFill/>
-          <a:ln/>
-        </p:spPr>
-        <p:txBody>
-          <a:bodyPr wrap="square" lIns="25400" tIns="25400" rIns="25400" bIns="25400" rtlCol="0" anchor="ctr"/>
-          <a:lstStyle/>
-          <a:p>
-            <a:pPr marL="0" indent="0" algn="ctr">
+        </p:spPr>
+      </p:sp>
+      <p:pic>
+        <p:nvPicPr>
+          <p:cNvPr id="17" name="Image 2" descr="/home/claude/icons/upload_chat.png"/>
+          <p:cNvPicPr>
+            <a:picLocks noChangeAspect="1"/>
+          </p:cNvPicPr>
+          <p:nvPr/>
+        </p:nvPicPr>
+        <p:blipFill>
+          <a:blip r:embed="rId5"/>
+          <a:stretch>
+            <a:fillRect/>
+          </a:stretch>
+        </p:blipFill>
+        <p:spPr>
+          <a:xfrm>
+            <a:off x="722376" y="3763382"/>
+            <a:ext cx="310896" cy="310896"/>
+          </a:xfrm>
+          <a:prstGeom prst="rect">
+            <a:avLst/>
+          </a:prstGeom>
+        </p:spPr>
+      </p:pic>
+      <p:sp>
+        <p:nvSpPr>
+          <p:cNvPr id="18" name="Text 13"/>
+          <p:cNvSpPr/>
+          <p:nvPr/>
+        </p:nvSpPr>
+        <p:spPr>
+          <a:xfrm>
+            <a:off x="1161288" y="3667370"/>
+            <a:ext cx="2066544" cy="502920"/>
+          </a:xfrm>
+          <a:prstGeom prst="rect">
+            <a:avLst/>
+          </a:prstGeom>
+          <a:noFill/>
+          <a:ln/>
+        </p:spPr>
+        <p:txBody>
+          <a:bodyPr wrap="square" lIns="12700" tIns="12700" rIns="12700" bIns="12700" rtlCol="0" anchor="ctr"/>
+          <a:lstStyle/>
+          <a:p>
+            <a:pPr marL="0" indent="0" algn="l">
               <a:lnSpc>
-                <a:spcPct val="95000"/>
+                <a:spcPct val="97000"/>
               </a:lnSpc>
               <a:buNone/>
             </a:pPr>
             <a:r>
-              <a:rPr lang="en-US" sz="1300" b="1" dirty="0">
-                <a:solidFill>
-                  <a:srgbClr val="0C447C"/>
-                </a:solidFill>
-                <a:latin typeface="Calibri" pitchFamily="34" charset="0"/>
-                <a:ea typeface="Calibri" pitchFamily="34" charset="-122"/>
-                <a:cs typeface="Calibri" pitchFamily="34" charset="-120"/>
-              </a:rPr>
-              <a:t>Dropdowns</a:t>
-            </a:r>
-            <a:endParaRPr lang="en-US" sz="1300" dirty="0"/>
-          </a:p>
-          <a:p>
-            <a:pPr marL="0" indent="0" algn="ctr">
+              <a:rPr lang="en-US" sz="1250" b="1" dirty="0">
+                <a:solidFill>
+                  <a:srgbClr val="1B1B18"/>
+                </a:solidFill>
+                <a:latin typeface="Calibri" pitchFamily="34" charset="0"/>
+                <a:ea typeface="Calibri" pitchFamily="34" charset="-122"/>
+                <a:cs typeface="Calibri" pitchFamily="34" charset="-120"/>
+              </a:rPr>
+              <a:t>Upload &amp; chat</a:t>
+            </a:r>
+            <a:endParaRPr lang="en-US" sz="1250" dirty="0"/>
+          </a:p>
+          <a:p>
+            <a:pPr marL="0" indent="0" algn="l">
               <a:lnSpc>
-                <a:spcPct val="95000"/>
+                <a:spcPct val="97000"/>
               </a:lnSpc>
               <a:buNone/>
             </a:pPr>
             <a:r>
-              <a:rPr lang="en-US" sz="950" dirty="0">
-                <a:solidFill>
-                  <a:srgbClr val="185FA5"/>
-                </a:solidFill>
-                <a:latin typeface="Calibri" pitchFamily="34" charset="0"/>
-                <a:ea typeface="Calibri" pitchFamily="34" charset="-122"/>
-                <a:cs typeface="Calibri" pitchFamily="34" charset="-120"/>
-              </a:rPr>
-              <a:t>unit, element, PC, output type</a:t>
-            </a:r>
-            <a:endParaRPr lang="en-US" sz="1300" dirty="0"/>
-          </a:p>
-        </p:txBody>
-      </p:sp>
-      <p:sp>
-        <p:nvSpPr>
-          <p:cNvPr id="16" name="Shape 14"/>
-          <p:cNvSpPr/>
-          <p:nvPr/>
-        </p:nvSpPr>
-        <p:spPr>
-          <a:xfrm>
-            <a:off x="594360" y="3246120"/>
-            <a:ext cx="2743200" cy="502920"/>
+              <a:rPr lang="en-US" sz="900" dirty="0">
+                <a:solidFill>
+                  <a:srgbClr val="6B6A64"/>
+                </a:solidFill>
+                <a:latin typeface="Calibri" pitchFamily="34" charset="0"/>
+                <a:ea typeface="Calibri" pitchFamily="34" charset="-122"/>
+                <a:cs typeface="Calibri" pitchFamily="34" charset="-120"/>
+              </a:rPr>
+              <a:t>Documents + prompts</a:t>
+            </a:r>
+            <a:endParaRPr lang="en-US" sz="1250" dirty="0"/>
+          </a:p>
+        </p:txBody>
+      </p:sp>
+      <p:sp>
+        <p:nvSpPr>
+          <p:cNvPr id="19" name="Shape 14"/>
+          <p:cNvSpPr/>
+          <p:nvPr/>
+        </p:nvSpPr>
+        <p:spPr>
+          <a:xfrm>
+            <a:off x="3886200" y="2405498"/>
+            <a:ext cx="1920240" cy="484632"/>
           </a:xfrm>
           <a:prstGeom prst="roundRect">
             <a:avLst>
-              <a:gd name="adj" fmla="val 10909"/>
+              <a:gd name="adj" fmla="val 9434"/>
             </a:avLst>
           </a:prstGeom>
           <a:solidFill>
-            <a:srgbClr val="E6F1FB"/>
+            <a:srgbClr val="FFFFFF"/>
           </a:solidFill>
-          <a:ln w="12700">
+          <a:ln w="9525">
             <a:solidFill>
-              <a:srgbClr val="378ADD"/>
+              <a:srgbClr val="E3E1D8"/>
             </a:solidFill>
             <a:prstDash val="solid"/>
           </a:ln>
-          <a:effectLst>
-            <a:outerShdw blurRad="63500" dist="25400" dir="5400000" algn="bl" rotWithShape="0">
-              <a:srgbClr val="000000">
-                <a:alpha val="10000"/>
-              </a:srgbClr>
-            </a:outerShdw>
-          </a:effectLst>
-        </p:spPr>
-      </p:sp>
-      <p:sp>
-        <p:nvSpPr>
-          <p:cNvPr id="17" name="Text 15"/>
-          <p:cNvSpPr/>
-          <p:nvPr/>
-        </p:nvSpPr>
-        <p:spPr>
-          <a:xfrm>
-            <a:off x="667512" y="3246120"/>
-            <a:ext cx="2596896" cy="502920"/>
-          </a:xfrm>
-          <a:prstGeom prst="rect">
-            <a:avLst/>
-          </a:prstGeom>
-          <a:noFill/>
-          <a:ln/>
-        </p:spPr>
-        <p:txBody>
-          <a:bodyPr wrap="square" lIns="25400" tIns="25400" rIns="25400" bIns="25400" rtlCol="0" anchor="ctr"/>
-          <a:lstStyle/>
-          <a:p>
-            <a:pPr marL="0" indent="0" algn="ctr">
+        </p:spPr>
+      </p:sp>
+      <p:pic>
+        <p:nvPicPr>
+          <p:cNvPr id="20" name="Image 3" descr="/home/claude/icons/retrieval.png"/>
+          <p:cNvPicPr>
+            <a:picLocks noChangeAspect="1"/>
+          </p:cNvPicPr>
+          <p:nvPr/>
+        </p:nvPicPr>
+        <p:blipFill>
+          <a:blip r:embed="rId6"/>
+          <a:stretch>
+            <a:fillRect/>
+          </a:stretch>
+        </p:blipFill>
+        <p:spPr>
+          <a:xfrm>
+            <a:off x="4014216" y="2492366"/>
+            <a:ext cx="310896" cy="310896"/>
+          </a:xfrm>
+          <a:prstGeom prst="rect">
+            <a:avLst/>
+          </a:prstGeom>
+        </p:spPr>
+      </p:pic>
+      <p:sp>
+        <p:nvSpPr>
+          <p:cNvPr id="21" name="Text 15"/>
+          <p:cNvSpPr/>
+          <p:nvPr/>
+        </p:nvSpPr>
+        <p:spPr>
+          <a:xfrm>
+            <a:off x="4453128" y="2405498"/>
+            <a:ext cx="1243584" cy="484632"/>
+          </a:xfrm>
+          <a:prstGeom prst="rect">
+            <a:avLst/>
+          </a:prstGeom>
+          <a:noFill/>
+          <a:ln/>
+        </p:spPr>
+        <p:txBody>
+          <a:bodyPr wrap="square" lIns="12700" tIns="12700" rIns="12700" bIns="12700" rtlCol="0" anchor="ctr"/>
+          <a:lstStyle/>
+          <a:p>
+            <a:pPr marL="0" indent="0" algn="l">
               <a:lnSpc>
-                <a:spcPct val="95000"/>
+                <a:spcPct val="97000"/>
               </a:lnSpc>
               <a:buNone/>
             </a:pPr>
             <a:r>
-              <a:rPr lang="en-US" sz="1300" b="1" dirty="0">
-                <a:solidFill>
-                  <a:srgbClr val="0C447C"/>
-                </a:solidFill>
-                <a:latin typeface="Calibri" pitchFamily="34" charset="0"/>
-                <a:ea typeface="Calibri" pitchFamily="34" charset="-122"/>
-                <a:cs typeface="Calibri" pitchFamily="34" charset="-120"/>
-              </a:rPr>
-              <a:t>Upload &amp; chat</a:t>
-            </a:r>
-            <a:endParaRPr lang="en-US" sz="1300" dirty="0"/>
-          </a:p>
-          <a:p>
-            <a:pPr marL="0" indent="0" algn="ctr">
+              <a:rPr lang="en-US" sz="1250" b="1" dirty="0">
+                <a:solidFill>
+                  <a:srgbClr val="1B1B18"/>
+                </a:solidFill>
+                <a:latin typeface="Calibri" pitchFamily="34" charset="0"/>
+                <a:ea typeface="Calibri" pitchFamily="34" charset="-122"/>
+                <a:cs typeface="Calibri" pitchFamily="34" charset="-120"/>
+              </a:rPr>
+              <a:t>Retrieval</a:t>
+            </a:r>
+            <a:endParaRPr lang="en-US" sz="1250" dirty="0"/>
+          </a:p>
+          <a:p>
+            <a:pPr marL="0" indent="0" algn="l">
               <a:lnSpc>
-                <a:spcPct val="95000"/>
+                <a:spcPct val="97000"/>
               </a:lnSpc>
               <a:buNone/>
             </a:pPr>
             <a:r>
-              <a:rPr lang="en-US" sz="950" dirty="0">
-                <a:solidFill>
-                  <a:srgbClr val="185FA5"/>
-                </a:solidFill>
-                <a:latin typeface="Calibri" pitchFamily="34" charset="0"/>
-                <a:ea typeface="Calibri" pitchFamily="34" charset="-122"/>
-                <a:cs typeface="Calibri" pitchFamily="34" charset="-120"/>
-              </a:rPr>
-              <a:t>documents + prompts</a:t>
-            </a:r>
-            <a:endParaRPr lang="en-US" sz="1300" dirty="0"/>
-          </a:p>
-        </p:txBody>
-      </p:sp>
-      <p:sp>
-        <p:nvSpPr>
-          <p:cNvPr id="18" name="Shape 16"/>
-          <p:cNvSpPr/>
-          <p:nvPr/>
-        </p:nvSpPr>
-        <p:spPr>
-          <a:xfrm>
-            <a:off x="3886200" y="1353312"/>
-            <a:ext cx="3931920" cy="484632"/>
+              <a:rPr lang="en-US" sz="900" dirty="0">
+                <a:solidFill>
+                  <a:srgbClr val="6B6A64"/>
+                </a:solidFill>
+                <a:latin typeface="Calibri" pitchFamily="34" charset="0"/>
+                <a:ea typeface="Calibri" pitchFamily="34" charset="-122"/>
+                <a:cs typeface="Calibri" pitchFamily="34" charset="-120"/>
+              </a:rPr>
+              <a:t>Query vector DB</a:t>
+            </a:r>
+            <a:endParaRPr lang="en-US" sz="1250" dirty="0"/>
+          </a:p>
+        </p:txBody>
+      </p:sp>
+      <p:sp>
+        <p:nvSpPr>
+          <p:cNvPr id="22" name="Shape 16"/>
+          <p:cNvSpPr/>
+          <p:nvPr/>
+        </p:nvSpPr>
+        <p:spPr>
+          <a:xfrm>
+            <a:off x="5897880" y="2405498"/>
+            <a:ext cx="1920240" cy="484632"/>
           </a:xfrm>
           <a:prstGeom prst="roundRect">
             <a:avLst>
-              <a:gd name="adj" fmla="val 11321"/>
+              <a:gd name="adj" fmla="val 9434"/>
             </a:avLst>
           </a:prstGeom>
           <a:solidFill>
-            <a:srgbClr val="EEEDFE"/>
+            <a:srgbClr val="FFFFFF"/>
           </a:solidFill>
-          <a:ln w="12700">
+          <a:ln w="9525">
             <a:solidFill>
-              <a:srgbClr val="7F77DD"/>
+              <a:srgbClr val="E3E1D8"/>
             </a:solidFill>
             <a:prstDash val="solid"/>
           </a:ln>
-          <a:effectLst>
-            <a:outerShdw blurRad="63500" dist="25400" dir="5400000" algn="bl" rotWithShape="0">
-              <a:srgbClr val="000000">
-                <a:alpha val="10000"/>
-              </a:srgbClr>
-            </a:outerShdw>
-          </a:effectLst>
-        </p:spPr>
-      </p:sp>
-      <p:sp>
-        <p:nvSpPr>
-          <p:cNvPr id="19" name="Text 17"/>
-          <p:cNvSpPr/>
-          <p:nvPr/>
-        </p:nvSpPr>
-        <p:spPr>
-          <a:xfrm>
-            <a:off x="3959352" y="1353312"/>
-            <a:ext cx="3785616" cy="484632"/>
-          </a:xfrm>
-          <a:prstGeom prst="rect">
-            <a:avLst/>
-          </a:prstGeom>
-          <a:noFill/>
-          <a:ln/>
-        </p:spPr>
-        <p:txBody>
-          <a:bodyPr wrap="square" lIns="25400" tIns="25400" rIns="25400" bIns="25400" rtlCol="0" anchor="ctr"/>
-          <a:lstStyle/>
-          <a:p>
-            <a:pPr marL="0" indent="0" algn="ctr">
+        </p:spPr>
+      </p:sp>
+      <p:pic>
+        <p:nvPicPr>
+          <p:cNvPr id="23" name="Image 4" descr="/home/claude/icons/mapping_table.png"/>
+          <p:cNvPicPr>
+            <a:picLocks noChangeAspect="1"/>
+          </p:cNvPicPr>
+          <p:nvPr/>
+        </p:nvPicPr>
+        <p:blipFill>
+          <a:blip r:embed="rId7"/>
+          <a:stretch>
+            <a:fillRect/>
+          </a:stretch>
+        </p:blipFill>
+        <p:spPr>
+          <a:xfrm>
+            <a:off x="6025896" y="2492366"/>
+            <a:ext cx="310896" cy="310896"/>
+          </a:xfrm>
+          <a:prstGeom prst="rect">
+            <a:avLst/>
+          </a:prstGeom>
+        </p:spPr>
+      </p:pic>
+      <p:sp>
+        <p:nvSpPr>
+          <p:cNvPr id="24" name="Text 17"/>
+          <p:cNvSpPr/>
+          <p:nvPr/>
+        </p:nvSpPr>
+        <p:spPr>
+          <a:xfrm>
+            <a:off x="6464808" y="2405498"/>
+            <a:ext cx="1243584" cy="484632"/>
+          </a:xfrm>
+          <a:prstGeom prst="rect">
+            <a:avLst/>
+          </a:prstGeom>
+          <a:noFill/>
+          <a:ln/>
+        </p:spPr>
+        <p:txBody>
+          <a:bodyPr wrap="square" lIns="12700" tIns="12700" rIns="12700" bIns="12700" rtlCol="0" anchor="ctr"/>
+          <a:lstStyle/>
+          <a:p>
+            <a:pPr marL="0" indent="0" algn="l">
               <a:lnSpc>
-                <a:spcPct val="95000"/>
+                <a:spcPct val="97000"/>
               </a:lnSpc>
               <a:buNone/>
             </a:pPr>
             <a:r>
-              <a:rPr lang="en-US" sz="1300" b="1" dirty="0">
-                <a:solidFill>
-                  <a:srgbClr val="3C3489"/>
-                </a:solidFill>
-                <a:latin typeface="Calibri" pitchFamily="34" charset="0"/>
-                <a:ea typeface="Calibri" pitchFamily="34" charset="-122"/>
-                <a:cs typeface="Calibri" pitchFamily="34" charset="-120"/>
-              </a:rPr>
-              <a:t>API &amp; auth</a:t>
-            </a:r>
-            <a:endParaRPr lang="en-US" sz="1300" dirty="0"/>
-          </a:p>
-          <a:p>
-            <a:pPr marL="0" indent="0" algn="ctr">
+              <a:rPr lang="en-US" sz="1250" b="1" dirty="0">
+                <a:solidFill>
+                  <a:srgbClr val="1B1B18"/>
+                </a:solidFill>
+                <a:latin typeface="Calibri" pitchFamily="34" charset="0"/>
+                <a:ea typeface="Calibri" pitchFamily="34" charset="-122"/>
+                <a:cs typeface="Calibri" pitchFamily="34" charset="-120"/>
+              </a:rPr>
+              <a:t>Mapping table</a:t>
+            </a:r>
+            <a:endParaRPr lang="en-US" sz="1250" dirty="0"/>
+          </a:p>
+          <a:p>
+            <a:pPr marL="0" indent="0" algn="l">
               <a:lnSpc>
-                <a:spcPct val="95000"/>
+                <a:spcPct val="97000"/>
               </a:lnSpc>
               <a:buNone/>
             </a:pPr>
             <a:r>
-              <a:rPr lang="en-US" sz="950" dirty="0">
-                <a:solidFill>
-                  <a:srgbClr val="534AB7"/>
-                </a:solidFill>
-                <a:latin typeface="Calibri" pitchFamily="34" charset="0"/>
-                <a:ea typeface="Calibri" pitchFamily="34" charset="-122"/>
-                <a:cs typeface="Calibri" pitchFamily="34" charset="-120"/>
-              </a:rPr>
-              <a:t>Amazon API Gateway + Cognito</a:t>
-            </a:r>
-            <a:endParaRPr lang="en-US" sz="1300" dirty="0"/>
-          </a:p>
-        </p:txBody>
-      </p:sp>
-      <p:sp>
-        <p:nvSpPr>
-          <p:cNvPr id="20" name="Shape 18"/>
-          <p:cNvSpPr/>
-          <p:nvPr/>
-        </p:nvSpPr>
-        <p:spPr>
-          <a:xfrm>
-            <a:off x="3886200" y="1938528"/>
+              <a:rPr lang="en-US" sz="900" dirty="0">
+                <a:solidFill>
+                  <a:srgbClr val="6B6A64"/>
+                </a:solidFill>
+                <a:latin typeface="Calibri" pitchFamily="34" charset="0"/>
+                <a:ea typeface="Calibri" pitchFamily="34" charset="-122"/>
+                <a:cs typeface="Calibri" pitchFamily="34" charset="-120"/>
+              </a:rPr>
+              <a:t>Manual (DynamoDB)</a:t>
+            </a:r>
+            <a:endParaRPr lang="en-US" sz="1250" dirty="0"/>
+          </a:p>
+        </p:txBody>
+      </p:sp>
+      <p:sp>
+        <p:nvSpPr>
+          <p:cNvPr id="25" name="Shape 18"/>
+          <p:cNvSpPr/>
+          <p:nvPr/>
+        </p:nvSpPr>
+        <p:spPr>
+          <a:xfrm>
+            <a:off x="3886200" y="2999858"/>
             <a:ext cx="3931920" cy="484632"/>
           </a:xfrm>
           <a:prstGeom prst="roundRect">
             <a:avLst>
-              <a:gd name="adj" fmla="val 11321"/>
+              <a:gd name="adj" fmla="val 9434"/>
             </a:avLst>
           </a:prstGeom>
           <a:solidFill>
-            <a:srgbClr val="EEEDFE"/>
+            <a:srgbClr val="FFFFFF"/>
           </a:solidFill>
-          <a:ln w="12700">
+          <a:ln w="9525">
             <a:solidFill>
-              <a:srgbClr val="7F77DD"/>
+              <a:srgbClr val="E3E1D8"/>
             </a:solidFill>
             <a:prstDash val="solid"/>
           </a:ln>
-          <a:effectLst>
-            <a:outerShdw blurRad="63500" dist="25400" dir="5400000" algn="bl" rotWithShape="0">
-              <a:srgbClr val="000000">
-                <a:alpha val="10000"/>
-              </a:srgbClr>
-            </a:outerShdw>
-          </a:effectLst>
-        </p:spPr>
-      </p:sp>
-      <p:sp>
-        <p:nvSpPr>
-          <p:cNvPr id="21" name="Text 19"/>
-          <p:cNvSpPr/>
-          <p:nvPr/>
-        </p:nvSpPr>
-        <p:spPr>
-          <a:xfrm>
-            <a:off x="3959352" y="1938528"/>
-            <a:ext cx="3785616" cy="484632"/>
-          </a:xfrm>
-          <a:prstGeom prst="rect">
-            <a:avLst/>
-          </a:prstGeom>
-          <a:noFill/>
-          <a:ln/>
-        </p:spPr>
-        <p:txBody>
-          <a:bodyPr wrap="square" lIns="25400" tIns="25400" rIns="25400" bIns="25400" rtlCol="0" anchor="ctr"/>
-          <a:lstStyle/>
-          <a:p>
-            <a:pPr marL="0" indent="0" algn="ctr">
+        </p:spPr>
+      </p:sp>
+      <p:pic>
+        <p:nvPicPr>
+          <p:cNvPr id="26" name="Image 5" descr="/home/claude/icons/input_assembler.png"/>
+          <p:cNvPicPr>
+            <a:picLocks noChangeAspect="1"/>
+          </p:cNvPicPr>
+          <p:nvPr/>
+        </p:nvPicPr>
+        <p:blipFill>
+          <a:blip r:embed="rId8"/>
+          <a:stretch>
+            <a:fillRect/>
+          </a:stretch>
+        </p:blipFill>
+        <p:spPr>
+          <a:xfrm>
+            <a:off x="4014216" y="3086726"/>
+            <a:ext cx="310896" cy="310896"/>
+          </a:xfrm>
+          <a:prstGeom prst="rect">
+            <a:avLst/>
+          </a:prstGeom>
+        </p:spPr>
+      </p:pic>
+      <p:sp>
+        <p:nvSpPr>
+          <p:cNvPr id="27" name="Text 19"/>
+          <p:cNvSpPr/>
+          <p:nvPr/>
+        </p:nvSpPr>
+        <p:spPr>
+          <a:xfrm>
+            <a:off x="4453128" y="2999858"/>
+            <a:ext cx="3255264" cy="484632"/>
+          </a:xfrm>
+          <a:prstGeom prst="rect">
+            <a:avLst/>
+          </a:prstGeom>
+          <a:noFill/>
+          <a:ln/>
+        </p:spPr>
+        <p:txBody>
+          <a:bodyPr wrap="square" lIns="12700" tIns="12700" rIns="12700" bIns="12700" rtlCol="0" anchor="ctr"/>
+          <a:lstStyle/>
+          <a:p>
+            <a:pPr marL="0" indent="0" algn="l">
               <a:lnSpc>
-                <a:spcPct val="95000"/>
+                <a:spcPct val="97000"/>
               </a:lnSpc>
               <a:buNone/>
             </a:pPr>
             <a:r>
-              <a:rPr lang="en-US" sz="1300" b="1" dirty="0">
-                <a:solidFill>
-                  <a:srgbClr val="3C3489"/>
+              <a:rPr lang="en-US" sz="1250" b="1" dirty="0">
+                <a:solidFill>
+                  <a:srgbClr val="1B1B18"/>
                 </a:solidFill>
                 <a:latin typeface="Calibri" pitchFamily="34" charset="0"/>
                 <a:ea typeface="Calibri" pitchFamily="34" charset="-122"/>
@@ -1651,95 +1841,112 @@
               </a:rPr>
               <a:t>Input assembler</a:t>
             </a:r>
-            <a:endParaRPr lang="en-US" sz="1300" dirty="0"/>
-          </a:p>
-          <a:p>
-            <a:pPr marL="0" indent="0" algn="ctr">
+            <a:endParaRPr lang="en-US" sz="1250" dirty="0"/>
+          </a:p>
+          <a:p>
+            <a:pPr marL="0" indent="0" algn="l">
               <a:lnSpc>
-                <a:spcPct val="95000"/>
+                <a:spcPct val="97000"/>
               </a:lnSpc>
               <a:buNone/>
             </a:pPr>
             <a:r>
-              <a:rPr lang="en-US" sz="950" dirty="0">
-                <a:solidFill>
-                  <a:srgbClr val="534AB7"/>
-                </a:solidFill>
-                <a:latin typeface="Calibri" pitchFamily="34" charset="0"/>
-                <a:ea typeface="Calibri" pitchFamily="34" charset="-122"/>
-                <a:cs typeface="Calibri" pitchFamily="34" charset="-120"/>
-              </a:rPr>
-              <a:t>AWS Lambda builds request JSON</a:t>
-            </a:r>
-            <a:endParaRPr lang="en-US" sz="1300" dirty="0"/>
-          </a:p>
-        </p:txBody>
-      </p:sp>
-      <p:sp>
-        <p:nvSpPr>
-          <p:cNvPr id="22" name="Shape 20"/>
-          <p:cNvSpPr/>
-          <p:nvPr/>
-        </p:nvSpPr>
-        <p:spPr>
-          <a:xfrm>
-            <a:off x="3886200" y="2523744"/>
+              <a:rPr lang="en-US" sz="900" dirty="0">
+                <a:solidFill>
+                  <a:srgbClr val="6B6A64"/>
+                </a:solidFill>
+                <a:latin typeface="Calibri" pitchFamily="34" charset="0"/>
+                <a:ea typeface="Calibri" pitchFamily="34" charset="-122"/>
+                <a:cs typeface="Calibri" pitchFamily="34" charset="-120"/>
+              </a:rPr>
+              <a:t>Builds request JSON</a:t>
+            </a:r>
+            <a:endParaRPr lang="en-US" sz="1250" dirty="0"/>
+          </a:p>
+        </p:txBody>
+      </p:sp>
+      <p:sp>
+        <p:nvSpPr>
+          <p:cNvPr id="28" name="Shape 20"/>
+          <p:cNvSpPr/>
+          <p:nvPr/>
+        </p:nvSpPr>
+        <p:spPr>
+          <a:xfrm>
+            <a:off x="3886200" y="3594218"/>
             <a:ext cx="3931920" cy="484632"/>
           </a:xfrm>
           <a:prstGeom prst="roundRect">
             <a:avLst>
-              <a:gd name="adj" fmla="val 11321"/>
+              <a:gd name="adj" fmla="val 9434"/>
             </a:avLst>
           </a:prstGeom>
           <a:solidFill>
-            <a:srgbClr val="EEEDFE"/>
+            <a:srgbClr val="FFFFFF"/>
           </a:solidFill>
-          <a:ln w="12700">
+          <a:ln w="9525">
             <a:solidFill>
-              <a:srgbClr val="7F77DD"/>
+              <a:srgbClr val="E3E1D8"/>
             </a:solidFill>
             <a:prstDash val="solid"/>
           </a:ln>
-          <a:effectLst>
-            <a:outerShdw blurRad="63500" dist="25400" dir="5400000" algn="bl" rotWithShape="0">
-              <a:srgbClr val="000000">
-                <a:alpha val="10000"/>
-              </a:srgbClr>
-            </a:outerShdw>
-          </a:effectLst>
-        </p:spPr>
-      </p:sp>
-      <p:sp>
-        <p:nvSpPr>
-          <p:cNvPr id="23" name="Text 21"/>
-          <p:cNvSpPr/>
-          <p:nvPr/>
-        </p:nvSpPr>
-        <p:spPr>
-          <a:xfrm>
-            <a:off x="3959352" y="2523744"/>
-            <a:ext cx="3785616" cy="484632"/>
-          </a:xfrm>
-          <a:prstGeom prst="rect">
-            <a:avLst/>
-          </a:prstGeom>
-          <a:noFill/>
-          <a:ln/>
-        </p:spPr>
-        <p:txBody>
-          <a:bodyPr wrap="square" lIns="25400" tIns="25400" rIns="25400" bIns="25400" rtlCol="0" anchor="ctr"/>
-          <a:lstStyle/>
-          <a:p>
-            <a:pPr marL="0" indent="0" algn="ctr">
+        </p:spPr>
+      </p:sp>
+      <p:pic>
+        <p:nvPicPr>
+          <p:cNvPr id="29" name="Image 6" descr="/home/claude/icons/bedrock_agent.png"/>
+          <p:cNvPicPr>
+            <a:picLocks noChangeAspect="1"/>
+          </p:cNvPicPr>
+          <p:nvPr/>
+        </p:nvPicPr>
+        <p:blipFill>
+          <a:blip r:embed="rId9"/>
+          <a:stretch>
+            <a:fillRect/>
+          </a:stretch>
+        </p:blipFill>
+        <p:spPr>
+          <a:xfrm>
+            <a:off x="4014216" y="3681086"/>
+            <a:ext cx="310896" cy="310896"/>
+          </a:xfrm>
+          <a:prstGeom prst="rect">
+            <a:avLst/>
+          </a:prstGeom>
+        </p:spPr>
+      </p:pic>
+      <p:sp>
+        <p:nvSpPr>
+          <p:cNvPr id="30" name="Text 21"/>
+          <p:cNvSpPr/>
+          <p:nvPr/>
+        </p:nvSpPr>
+        <p:spPr>
+          <a:xfrm>
+            <a:off x="4453128" y="3594218"/>
+            <a:ext cx="3255264" cy="484632"/>
+          </a:xfrm>
+          <a:prstGeom prst="rect">
+            <a:avLst/>
+          </a:prstGeom>
+          <a:noFill/>
+          <a:ln/>
+        </p:spPr>
+        <p:txBody>
+          <a:bodyPr wrap="square" lIns="12700" tIns="12700" rIns="12700" bIns="12700" rtlCol="0" anchor="ctr"/>
+          <a:lstStyle/>
+          <a:p>
+            <a:pPr marL="0" indent="0" algn="l">
               <a:lnSpc>
-                <a:spcPct val="95000"/>
+                <a:spcPct val="97000"/>
               </a:lnSpc>
               <a:buNone/>
             </a:pPr>
             <a:r>
-              <a:rPr lang="en-US" sz="1300" b="1" dirty="0">
-                <a:solidFill>
-                  <a:srgbClr val="3C3489"/>
+              <a:rPr lang="en-US" sz="1250" b="1" dirty="0">
+                <a:solidFill>
+                  <a:srgbClr val="1B1B18"/>
                 </a:solidFill>
                 <a:latin typeface="Calibri" pitchFamily="34" charset="0"/>
                 <a:ea typeface="Calibri" pitchFamily="34" charset="-122"/>
@@ -1747,624 +1954,48 @@
               </a:rPr>
               <a:t>Bedrock Agent</a:t>
             </a:r>
-            <a:endParaRPr lang="en-US" sz="1300" dirty="0"/>
-          </a:p>
-          <a:p>
-            <a:pPr marL="0" indent="0" algn="ctr">
+            <a:endParaRPr lang="en-US" sz="1250" dirty="0"/>
+          </a:p>
+          <a:p>
+            <a:pPr marL="0" indent="0" algn="l">
               <a:lnSpc>
-                <a:spcPct val="95000"/>
+                <a:spcPct val="97000"/>
               </a:lnSpc>
               <a:buNone/>
             </a:pPr>
             <a:r>
-              <a:rPr lang="en-US" sz="950" dirty="0">
-                <a:solidFill>
-                  <a:srgbClr val="534AB7"/>
-                </a:solidFill>
-                <a:latin typeface="Calibri" pitchFamily="34" charset="0"/>
-                <a:ea typeface="Calibri" pitchFamily="34" charset="-122"/>
-                <a:cs typeface="Calibri" pitchFamily="34" charset="-120"/>
-              </a:rPr>
-              <a:t>orchestration + prompt assembly</a:t>
-            </a:r>
-            <a:endParaRPr lang="en-US" sz="1300" dirty="0"/>
-          </a:p>
-        </p:txBody>
-      </p:sp>
-      <p:sp>
-        <p:nvSpPr>
-          <p:cNvPr id="24" name="Shape 22"/>
-          <p:cNvSpPr/>
-          <p:nvPr/>
-        </p:nvSpPr>
-        <p:spPr>
-          <a:xfrm>
-            <a:off x="3886200" y="3108960"/>
-            <a:ext cx="3931920" cy="484632"/>
-          </a:xfrm>
-          <a:prstGeom prst="roundRect">
-            <a:avLst>
-              <a:gd name="adj" fmla="val 11321"/>
-            </a:avLst>
-          </a:prstGeom>
-          <a:solidFill>
-            <a:srgbClr val="EEEDFE"/>
-          </a:solidFill>
-          <a:ln w="12700">
+              <a:rPr lang="en-US" sz="900" dirty="0">
+                <a:solidFill>
+                  <a:srgbClr val="6B6A64"/>
+                </a:solidFill>
+                <a:latin typeface="Calibri" pitchFamily="34" charset="0"/>
+                <a:ea typeface="Calibri" pitchFamily="34" charset="-122"/>
+                <a:cs typeface="Calibri" pitchFamily="34" charset="-120"/>
+              </a:rPr>
+              <a:t>Orchestrates the request</a:t>
+            </a:r>
+            <a:endParaRPr lang="en-US" sz="1250" dirty="0"/>
+          </a:p>
+        </p:txBody>
+      </p:sp>
+      <p:sp>
+        <p:nvSpPr>
+          <p:cNvPr id="31" name="Shape 22"/>
+          <p:cNvSpPr/>
+          <p:nvPr/>
+        </p:nvSpPr>
+        <p:spPr>
+          <a:xfrm>
+            <a:off x="4846320" y="2890130"/>
+            <a:ext cx="0" cy="109728"/>
+          </a:xfrm>
+          <a:prstGeom prst="line">
+            <a:avLst/>
+          </a:prstGeom>
+          <a:noFill/>
+          <a:ln w="15875">
             <a:solidFill>
-              <a:srgbClr val="7F77DD"/>
-            </a:solidFill>
-            <a:prstDash val="solid"/>
-          </a:ln>
-          <a:effectLst>
-            <a:outerShdw blurRad="63500" dist="25400" dir="5400000" algn="bl" rotWithShape="0">
-              <a:srgbClr val="000000">
-                <a:alpha val="10000"/>
-              </a:srgbClr>
-            </a:outerShdw>
-          </a:effectLst>
-        </p:spPr>
-      </p:sp>
-      <p:sp>
-        <p:nvSpPr>
-          <p:cNvPr id="25" name="Text 23"/>
-          <p:cNvSpPr/>
-          <p:nvPr/>
-        </p:nvSpPr>
-        <p:spPr>
-          <a:xfrm>
-            <a:off x="3959352" y="3108960"/>
-            <a:ext cx="3785616" cy="484632"/>
-          </a:xfrm>
-          <a:prstGeom prst="rect">
-            <a:avLst/>
-          </a:prstGeom>
-          <a:noFill/>
-          <a:ln/>
-        </p:spPr>
-        <p:txBody>
-          <a:bodyPr wrap="square" lIns="25400" tIns="25400" rIns="25400" bIns="25400" rtlCol="0" anchor="ctr"/>
-          <a:lstStyle/>
-          <a:p>
-            <a:pPr marL="0" indent="0" algn="ctr">
-              <a:lnSpc>
-                <a:spcPct val="95000"/>
-              </a:lnSpc>
-              <a:buNone/>
-            </a:pPr>
-            <a:r>
-              <a:rPr lang="en-US" sz="1300" b="1" dirty="0">
-                <a:solidFill>
-                  <a:srgbClr val="3C3489"/>
-                </a:solidFill>
-                <a:latin typeface="Calibri" pitchFamily="34" charset="0"/>
-                <a:ea typeface="Calibri" pitchFamily="34" charset="-122"/>
-                <a:cs typeface="Calibri" pitchFamily="34" charset="-120"/>
-              </a:rPr>
-              <a:t>Retrieval</a:t>
-            </a:r>
-            <a:endParaRPr lang="en-US" sz="1300" dirty="0"/>
-          </a:p>
-          <a:p>
-            <a:pPr marL="0" indent="0" algn="ctr">
-              <a:lnSpc>
-                <a:spcPct val="95000"/>
-              </a:lnSpc>
-              <a:buNone/>
-            </a:pPr>
-            <a:r>
-              <a:rPr lang="en-US" sz="950" dirty="0">
-                <a:solidFill>
-                  <a:srgbClr val="534AB7"/>
-                </a:solidFill>
-                <a:latin typeface="Calibri" pitchFamily="34" charset="0"/>
-                <a:ea typeface="Calibri" pitchFamily="34" charset="-122"/>
-                <a:cs typeface="Calibri" pitchFamily="34" charset="-120"/>
-              </a:rPr>
-              <a:t>OpenSearch Serverless (vector + semantic)</a:t>
-            </a:r>
-            <a:endParaRPr lang="en-US" sz="1300" dirty="0"/>
-          </a:p>
-        </p:txBody>
-      </p:sp>
-      <p:sp>
-        <p:nvSpPr>
-          <p:cNvPr id="26" name="Shape 24"/>
-          <p:cNvSpPr/>
-          <p:nvPr/>
-        </p:nvSpPr>
-        <p:spPr>
-          <a:xfrm>
-            <a:off x="3886200" y="3694176"/>
-            <a:ext cx="3931920" cy="484632"/>
-          </a:xfrm>
-          <a:prstGeom prst="roundRect">
-            <a:avLst>
-              <a:gd name="adj" fmla="val 11321"/>
-            </a:avLst>
-          </a:prstGeom>
-          <a:solidFill>
-            <a:srgbClr val="EEEDFE"/>
-          </a:solidFill>
-          <a:ln w="12700">
-            <a:solidFill>
-              <a:srgbClr val="7F77DD"/>
-            </a:solidFill>
-            <a:prstDash val="solid"/>
-          </a:ln>
-          <a:effectLst>
-            <a:outerShdw blurRad="63500" dist="25400" dir="5400000" algn="bl" rotWithShape="0">
-              <a:srgbClr val="000000">
-                <a:alpha val="10000"/>
-              </a:srgbClr>
-            </a:outerShdw>
-          </a:effectLst>
-        </p:spPr>
-      </p:sp>
-      <p:sp>
-        <p:nvSpPr>
-          <p:cNvPr id="27" name="Text 25"/>
-          <p:cNvSpPr/>
-          <p:nvPr/>
-        </p:nvSpPr>
-        <p:spPr>
-          <a:xfrm>
-            <a:off x="3959352" y="3694176"/>
-            <a:ext cx="3785616" cy="484632"/>
-          </a:xfrm>
-          <a:prstGeom prst="rect">
-            <a:avLst/>
-          </a:prstGeom>
-          <a:noFill/>
-          <a:ln/>
-        </p:spPr>
-        <p:txBody>
-          <a:bodyPr wrap="square" lIns="25400" tIns="25400" rIns="25400" bIns="25400" rtlCol="0" anchor="ctr"/>
-          <a:lstStyle/>
-          <a:p>
-            <a:pPr marL="0" indent="0" algn="ctr">
-              <a:lnSpc>
-                <a:spcPct val="95000"/>
-              </a:lnSpc>
-              <a:buNone/>
-            </a:pPr>
-            <a:r>
-              <a:rPr lang="en-US" sz="1300" b="1" dirty="0">
-                <a:solidFill>
-                  <a:srgbClr val="3C3489"/>
-                </a:solidFill>
-                <a:latin typeface="Calibri" pitchFamily="34" charset="0"/>
-                <a:ea typeface="Calibri" pitchFamily="34" charset="-122"/>
-                <a:cs typeface="Calibri" pitchFamily="34" charset="-120"/>
-              </a:rPr>
-              <a:t>LLM generation</a:t>
-            </a:r>
-            <a:endParaRPr lang="en-US" sz="1300" dirty="0"/>
-          </a:p>
-          <a:p>
-            <a:pPr marL="0" indent="0" algn="ctr">
-              <a:lnSpc>
-                <a:spcPct val="95000"/>
-              </a:lnSpc>
-              <a:buNone/>
-            </a:pPr>
-            <a:r>
-              <a:rPr lang="en-US" sz="950" dirty="0">
-                <a:solidFill>
-                  <a:srgbClr val="534AB7"/>
-                </a:solidFill>
-                <a:latin typeface="Calibri" pitchFamily="34" charset="0"/>
-                <a:ea typeface="Calibri" pitchFamily="34" charset="-122"/>
-                <a:cs typeface="Calibri" pitchFamily="34" charset="-120"/>
-              </a:rPr>
-              <a:t>Amazon Bedrock + Guardrails</a:t>
-            </a:r>
-            <a:endParaRPr lang="en-US" sz="1300" dirty="0"/>
-          </a:p>
-        </p:txBody>
-      </p:sp>
-      <p:sp>
-        <p:nvSpPr>
-          <p:cNvPr id="28" name="Shape 26"/>
-          <p:cNvSpPr/>
-          <p:nvPr/>
-        </p:nvSpPr>
-        <p:spPr>
-          <a:xfrm>
-            <a:off x="8366760" y="1353312"/>
-            <a:ext cx="3200400" cy="502920"/>
-          </a:xfrm>
-          <a:prstGeom prst="roundRect">
-            <a:avLst>
-              <a:gd name="adj" fmla="val 10909"/>
-            </a:avLst>
-          </a:prstGeom>
-          <a:solidFill>
-            <a:srgbClr val="E1F5EE"/>
-          </a:solidFill>
-          <a:ln w="12700">
-            <a:solidFill>
-              <a:srgbClr val="1D9E75"/>
-            </a:solidFill>
-            <a:prstDash val="solid"/>
-          </a:ln>
-          <a:effectLst>
-            <a:outerShdw blurRad="63500" dist="25400" dir="5400000" algn="bl" rotWithShape="0">
-              <a:srgbClr val="000000">
-                <a:alpha val="10000"/>
-              </a:srgbClr>
-            </a:outerShdw>
-          </a:effectLst>
-        </p:spPr>
-      </p:sp>
-      <p:sp>
-        <p:nvSpPr>
-          <p:cNvPr id="29" name="Text 27"/>
-          <p:cNvSpPr/>
-          <p:nvPr/>
-        </p:nvSpPr>
-        <p:spPr>
-          <a:xfrm>
-            <a:off x="8439912" y="1353312"/>
-            <a:ext cx="3054096" cy="502920"/>
-          </a:xfrm>
-          <a:prstGeom prst="rect">
-            <a:avLst/>
-          </a:prstGeom>
-          <a:noFill/>
-          <a:ln/>
-        </p:spPr>
-        <p:txBody>
-          <a:bodyPr wrap="square" lIns="25400" tIns="25400" rIns="25400" bIns="25400" rtlCol="0" anchor="ctr"/>
-          <a:lstStyle/>
-          <a:p>
-            <a:pPr marL="0" indent="0" algn="ctr">
-              <a:lnSpc>
-                <a:spcPct val="95000"/>
-              </a:lnSpc>
-              <a:buNone/>
-            </a:pPr>
-            <a:r>
-              <a:rPr lang="en-US" sz="1300" b="1" dirty="0">
-                <a:solidFill>
-                  <a:srgbClr val="085041"/>
-                </a:solidFill>
-                <a:latin typeface="Calibri" pitchFamily="34" charset="0"/>
-                <a:ea typeface="Calibri" pitchFamily="34" charset="-122"/>
-                <a:cs typeface="Calibri" pitchFamily="34" charset="-120"/>
-              </a:rPr>
-              <a:t>Draft artefacts</a:t>
-            </a:r>
-            <a:endParaRPr lang="en-US" sz="1300" dirty="0"/>
-          </a:p>
-          <a:p>
-            <a:pPr marL="0" indent="0" algn="ctr">
-              <a:lnSpc>
-                <a:spcPct val="95000"/>
-              </a:lnSpc>
-              <a:buNone/>
-            </a:pPr>
-            <a:r>
-              <a:rPr lang="en-US" sz="950" dirty="0">
-                <a:solidFill>
-                  <a:srgbClr val="0F6E56"/>
-                </a:solidFill>
-                <a:latin typeface="Calibri" pitchFamily="34" charset="0"/>
-                <a:ea typeface="Calibri" pitchFamily="34" charset="-122"/>
-                <a:cs typeface="Calibri" pitchFamily="34" charset="-120"/>
-              </a:rPr>
-              <a:t>scenario, task, email, roleplay</a:t>
-            </a:r>
-            <a:endParaRPr lang="en-US" sz="1300" dirty="0"/>
-          </a:p>
-        </p:txBody>
-      </p:sp>
-      <p:sp>
-        <p:nvSpPr>
-          <p:cNvPr id="30" name="Shape 28"/>
-          <p:cNvSpPr/>
-          <p:nvPr/>
-        </p:nvSpPr>
-        <p:spPr>
-          <a:xfrm>
-            <a:off x="8366760" y="1984248"/>
-            <a:ext cx="3200400" cy="502920"/>
-          </a:xfrm>
-          <a:prstGeom prst="roundRect">
-            <a:avLst>
-              <a:gd name="adj" fmla="val 10909"/>
-            </a:avLst>
-          </a:prstGeom>
-          <a:solidFill>
-            <a:srgbClr val="E1F5EE"/>
-          </a:solidFill>
-          <a:ln w="12700">
-            <a:solidFill>
-              <a:srgbClr val="1D9E75"/>
-            </a:solidFill>
-            <a:prstDash val="solid"/>
-          </a:ln>
-          <a:effectLst>
-            <a:outerShdw blurRad="63500" dist="25400" dir="5400000" algn="bl" rotWithShape="0">
-              <a:srgbClr val="000000">
-                <a:alpha val="10000"/>
-              </a:srgbClr>
-            </a:outerShdw>
-          </a:effectLst>
-        </p:spPr>
-      </p:sp>
-      <p:sp>
-        <p:nvSpPr>
-          <p:cNvPr id="31" name="Text 29"/>
-          <p:cNvSpPr/>
-          <p:nvPr/>
-        </p:nvSpPr>
-        <p:spPr>
-          <a:xfrm>
-            <a:off x="8439912" y="1984248"/>
-            <a:ext cx="3054096" cy="502920"/>
-          </a:xfrm>
-          <a:prstGeom prst="rect">
-            <a:avLst/>
-          </a:prstGeom>
-          <a:noFill/>
-          <a:ln/>
-        </p:spPr>
-        <p:txBody>
-          <a:bodyPr wrap="square" lIns="25400" tIns="25400" rIns="25400" bIns="25400" rtlCol="0" anchor="ctr"/>
-          <a:lstStyle/>
-          <a:p>
-            <a:pPr marL="0" indent="0" algn="ctr">
-              <a:lnSpc>
-                <a:spcPct val="95000"/>
-              </a:lnSpc>
-              <a:buNone/>
-            </a:pPr>
-            <a:r>
-              <a:rPr lang="en-US" sz="1300" b="1" dirty="0">
-                <a:solidFill>
-                  <a:srgbClr val="085041"/>
-                </a:solidFill>
-                <a:latin typeface="Calibri" pitchFamily="34" charset="0"/>
-                <a:ea typeface="Calibri" pitchFamily="34" charset="-122"/>
-                <a:cs typeface="Calibri" pitchFamily="34" charset="-120"/>
-              </a:rPr>
-              <a:t>Citations &amp; sources</a:t>
-            </a:r>
-            <a:endParaRPr lang="en-US" sz="1300" dirty="0"/>
-          </a:p>
-          <a:p>
-            <a:pPr marL="0" indent="0" algn="ctr">
-              <a:lnSpc>
-                <a:spcPct val="95000"/>
-              </a:lnSpc>
-              <a:buNone/>
-            </a:pPr>
-            <a:r>
-              <a:rPr lang="en-US" sz="950" dirty="0">
-                <a:solidFill>
-                  <a:srgbClr val="0F6E56"/>
-                </a:solidFill>
-                <a:latin typeface="Calibri" pitchFamily="34" charset="0"/>
-                <a:ea typeface="Calibri" pitchFamily="34" charset="-122"/>
-                <a:cs typeface="Calibri" pitchFamily="34" charset="-120"/>
-              </a:rPr>
-              <a:t>grounded, traceable</a:t>
-            </a:r>
-            <a:endParaRPr lang="en-US" sz="1300" dirty="0"/>
-          </a:p>
-        </p:txBody>
-      </p:sp>
-      <p:sp>
-        <p:nvSpPr>
-          <p:cNvPr id="32" name="Shape 30"/>
-          <p:cNvSpPr/>
-          <p:nvPr/>
-        </p:nvSpPr>
-        <p:spPr>
-          <a:xfrm>
-            <a:off x="8366760" y="2615184"/>
-            <a:ext cx="3200400" cy="502920"/>
-          </a:xfrm>
-          <a:prstGeom prst="roundRect">
-            <a:avLst>
-              <a:gd name="adj" fmla="val 10909"/>
-            </a:avLst>
-          </a:prstGeom>
-          <a:solidFill>
-            <a:srgbClr val="E1F5EE"/>
-          </a:solidFill>
-          <a:ln w="12700">
-            <a:solidFill>
-              <a:srgbClr val="1D9E75"/>
-            </a:solidFill>
-            <a:prstDash val="solid"/>
-          </a:ln>
-          <a:effectLst>
-            <a:outerShdw blurRad="63500" dist="25400" dir="5400000" algn="bl" rotWithShape="0">
-              <a:srgbClr val="000000">
-                <a:alpha val="10000"/>
-              </a:srgbClr>
-            </a:outerShdw>
-          </a:effectLst>
-        </p:spPr>
-      </p:sp>
-      <p:sp>
-        <p:nvSpPr>
-          <p:cNvPr id="33" name="Text 31"/>
-          <p:cNvSpPr/>
-          <p:nvPr/>
-        </p:nvSpPr>
-        <p:spPr>
-          <a:xfrm>
-            <a:off x="8439912" y="2615184"/>
-            <a:ext cx="3054096" cy="502920"/>
-          </a:xfrm>
-          <a:prstGeom prst="rect">
-            <a:avLst/>
-          </a:prstGeom>
-          <a:noFill/>
-          <a:ln/>
-        </p:spPr>
-        <p:txBody>
-          <a:bodyPr wrap="square" lIns="25400" tIns="25400" rIns="25400" bIns="25400" rtlCol="0" anchor="ctr"/>
-          <a:lstStyle/>
-          <a:p>
-            <a:pPr marL="0" indent="0" algn="ctr">
-              <a:lnSpc>
-                <a:spcPct val="95000"/>
-              </a:lnSpc>
-              <a:buNone/>
-            </a:pPr>
-            <a:r>
-              <a:rPr lang="en-US" sz="1300" b="1" dirty="0">
-                <a:solidFill>
-                  <a:srgbClr val="085041"/>
-                </a:solidFill>
-                <a:latin typeface="Calibri" pitchFamily="34" charset="0"/>
-                <a:ea typeface="Calibri" pitchFamily="34" charset="-122"/>
-                <a:cs typeface="Calibri" pitchFamily="34" charset="-120"/>
-              </a:rPr>
-              <a:t>Educator dashboard</a:t>
-            </a:r>
-            <a:endParaRPr lang="en-US" sz="1300" dirty="0"/>
-          </a:p>
-          <a:p>
-            <a:pPr marL="0" indent="0" algn="ctr">
-              <a:lnSpc>
-                <a:spcPct val="95000"/>
-              </a:lnSpc>
-              <a:buNone/>
-            </a:pPr>
-            <a:r>
-              <a:rPr lang="en-US" sz="950" dirty="0">
-                <a:solidFill>
-                  <a:srgbClr val="0F6E56"/>
-                </a:solidFill>
-                <a:latin typeface="Calibri" pitchFamily="34" charset="0"/>
-                <a:ea typeface="Calibri" pitchFamily="34" charset="-122"/>
-                <a:cs typeface="Calibri" pitchFamily="34" charset="-120"/>
-              </a:rPr>
-              <a:t>review &amp; validate</a:t>
-            </a:r>
-            <a:endParaRPr lang="en-US" sz="1300" dirty="0"/>
-          </a:p>
-        </p:txBody>
-      </p:sp>
-      <p:sp>
-        <p:nvSpPr>
-          <p:cNvPr id="34" name="Shape 32"/>
-          <p:cNvSpPr/>
-          <p:nvPr/>
-        </p:nvSpPr>
-        <p:spPr>
-          <a:xfrm>
-            <a:off x="8366760" y="3246120"/>
-            <a:ext cx="3200400" cy="502920"/>
-          </a:xfrm>
-          <a:prstGeom prst="roundRect">
-            <a:avLst>
-              <a:gd name="adj" fmla="val 10909"/>
-            </a:avLst>
-          </a:prstGeom>
-          <a:solidFill>
-            <a:srgbClr val="E1F5EE"/>
-          </a:solidFill>
-          <a:ln w="12700">
-            <a:solidFill>
-              <a:srgbClr val="1D9E75"/>
-            </a:solidFill>
-            <a:prstDash val="solid"/>
-          </a:ln>
-          <a:effectLst>
-            <a:outerShdw blurRad="63500" dist="25400" dir="5400000" algn="bl" rotWithShape="0">
-              <a:srgbClr val="000000">
-                <a:alpha val="10000"/>
-              </a:srgbClr>
-            </a:outerShdw>
-          </a:effectLst>
-        </p:spPr>
-      </p:sp>
-      <p:sp>
-        <p:nvSpPr>
-          <p:cNvPr id="35" name="Text 33"/>
-          <p:cNvSpPr/>
-          <p:nvPr/>
-        </p:nvSpPr>
-        <p:spPr>
-          <a:xfrm>
-            <a:off x="8439912" y="3246120"/>
-            <a:ext cx="3054096" cy="502920"/>
-          </a:xfrm>
-          <a:prstGeom prst="rect">
-            <a:avLst/>
-          </a:prstGeom>
-          <a:noFill/>
-          <a:ln/>
-        </p:spPr>
-        <p:txBody>
-          <a:bodyPr wrap="square" lIns="25400" tIns="25400" rIns="25400" bIns="25400" rtlCol="0" anchor="ctr"/>
-          <a:lstStyle/>
-          <a:p>
-            <a:pPr marL="0" indent="0" algn="ctr">
-              <a:lnSpc>
-                <a:spcPct val="95000"/>
-              </a:lnSpc>
-              <a:buNone/>
-            </a:pPr>
-            <a:r>
-              <a:rPr lang="en-US" sz="1300" b="1" dirty="0">
-                <a:solidFill>
-                  <a:srgbClr val="085041"/>
-                </a:solidFill>
-                <a:latin typeface="Calibri" pitchFamily="34" charset="0"/>
-                <a:ea typeface="Calibri" pitchFamily="34" charset="-122"/>
-                <a:cs typeface="Calibri" pitchFamily="34" charset="-120"/>
-              </a:rPr>
-              <a:t>Follow-up chat</a:t>
-            </a:r>
-            <a:endParaRPr lang="en-US" sz="1300" dirty="0"/>
-          </a:p>
-          <a:p>
-            <a:pPr marL="0" indent="0" algn="ctr">
-              <a:lnSpc>
-                <a:spcPct val="95000"/>
-              </a:lnSpc>
-              <a:buNone/>
-            </a:pPr>
-            <a:r>
-              <a:rPr lang="en-US" sz="950" dirty="0">
-                <a:solidFill>
-                  <a:srgbClr val="0F6E56"/>
-                </a:solidFill>
-                <a:latin typeface="Calibri" pitchFamily="34" charset="0"/>
-                <a:ea typeface="Calibri" pitchFamily="34" charset="-122"/>
-                <a:cs typeface="Calibri" pitchFamily="34" charset="-120"/>
-              </a:rPr>
-              <a:t>refine outputs</a:t>
-            </a:r>
-            <a:endParaRPr lang="en-US" sz="1300" dirty="0"/>
-          </a:p>
-        </p:txBody>
-      </p:sp>
-      <p:sp>
-        <p:nvSpPr>
-          <p:cNvPr id="36" name="Shape 34"/>
-          <p:cNvSpPr/>
-          <p:nvPr/>
-        </p:nvSpPr>
-        <p:spPr>
-          <a:xfrm>
-            <a:off x="3474720" y="1920240"/>
-            <a:ext cx="274320" cy="0"/>
-          </a:xfrm>
-          <a:prstGeom prst="line">
-            <a:avLst/>
-          </a:prstGeom>
-          <a:noFill/>
-          <a:ln w="22225">
-            <a:solidFill>
-              <a:srgbClr val="534AB7"/>
+              <a:srgbClr val="9A988E"/>
             </a:solidFill>
             <a:prstDash val="solid"/>
             <a:tailEnd type="triangle"/>
@@ -2373,22 +2004,22 @@
       </p:sp>
       <p:sp>
         <p:nvSpPr>
-          <p:cNvPr id="37" name="Shape 35"/>
-          <p:cNvSpPr/>
-          <p:nvPr/>
-        </p:nvSpPr>
-        <p:spPr>
-          <a:xfrm>
-            <a:off x="7955280" y="1920240"/>
-            <a:ext cx="274320" cy="0"/>
+          <p:cNvPr id="32" name="Shape 23"/>
+          <p:cNvSpPr/>
+          <p:nvPr/>
+        </p:nvSpPr>
+        <p:spPr>
+          <a:xfrm>
+            <a:off x="6858000" y="2890130"/>
+            <a:ext cx="0" cy="109728"/>
           </a:xfrm>
           <a:prstGeom prst="line">
             <a:avLst/>
           </a:prstGeom>
           <a:noFill/>
-          <a:ln w="22225">
+          <a:ln w="15875">
             <a:solidFill>
-              <a:srgbClr val="534AB7"/>
+              <a:srgbClr val="9A988E"/>
             </a:solidFill>
             <a:prstDash val="solid"/>
             <a:tailEnd type="triangle"/>
@@ -2397,568 +2028,22 @@
       </p:sp>
       <p:sp>
         <p:nvSpPr>
-          <p:cNvPr id="38" name="Shape 36"/>
-          <p:cNvSpPr/>
-          <p:nvPr/>
-        </p:nvSpPr>
-        <p:spPr>
-          <a:xfrm>
-            <a:off x="457200" y="4498848"/>
-            <a:ext cx="11247120" cy="941832"/>
-          </a:xfrm>
-          <a:prstGeom prst="roundRect">
-            <a:avLst>
-              <a:gd name="adj" fmla="val 7767"/>
-            </a:avLst>
-          </a:prstGeom>
-          <a:solidFill>
-            <a:srgbClr val="F7F6F1"/>
-          </a:solidFill>
-          <a:ln w="12700">
+          <p:cNvPr id="33" name="Shape 24"/>
+          <p:cNvSpPr/>
+          <p:nvPr/>
+        </p:nvSpPr>
+        <p:spPr>
+          <a:xfrm>
+            <a:off x="5852160" y="3484490"/>
+            <a:ext cx="0" cy="109728"/>
+          </a:xfrm>
+          <a:prstGeom prst="line">
+            <a:avLst/>
+          </a:prstGeom>
+          <a:noFill/>
+          <a:ln w="15875">
             <a:solidFill>
-              <a:srgbClr val="C9C7BE"/>
-            </a:solidFill>
-            <a:prstDash val="dash"/>
-          </a:ln>
-        </p:spPr>
-      </p:sp>
-      <p:sp>
-        <p:nvSpPr>
-          <p:cNvPr id="39" name="Text 37"/>
-          <p:cNvSpPr/>
-          <p:nvPr/>
-        </p:nvSpPr>
-        <p:spPr>
-          <a:xfrm>
-            <a:off x="621792" y="4553712"/>
-            <a:ext cx="10917936" cy="219456"/>
-          </a:xfrm>
-          <a:prstGeom prst="rect">
-            <a:avLst/>
-          </a:prstGeom>
-          <a:noFill/>
-          <a:ln/>
-        </p:spPr>
-        <p:txBody>
-          <a:bodyPr wrap="square" lIns="0" tIns="0" rIns="0" bIns="0" rtlCol="0" anchor="ctr"/>
-          <a:lstStyle/>
-          <a:p>
-            <a:pPr marL="0" indent="0" algn="l">
-              <a:buNone/>
-            </a:pPr>
-            <a:r>
-              <a:rPr lang="en-US" sz="1300" b="1" dirty="0">
-                <a:solidFill>
-                  <a:srgbClr val="2C2C2A"/>
-                </a:solidFill>
-                <a:latin typeface="Calibri" pitchFamily="34" charset="0"/>
-                <a:ea typeface="Calibri" pitchFamily="34" charset="-122"/>
-                <a:cs typeface="Calibri" pitchFamily="34" charset="-120"/>
-              </a:rPr>
-              <a:t>Knowledge ingestion pipeline  ·  runs in the background to build the retrieval store</a:t>
-            </a:r>
-            <a:endParaRPr lang="en-US" sz="1300" dirty="0"/>
-          </a:p>
-        </p:txBody>
-      </p:sp>
-      <p:sp>
-        <p:nvSpPr>
-          <p:cNvPr id="40" name="Shape 38"/>
-          <p:cNvSpPr/>
-          <p:nvPr/>
-        </p:nvSpPr>
-        <p:spPr>
-          <a:xfrm>
-            <a:off x="804672" y="4864608"/>
-            <a:ext cx="1965960" cy="457200"/>
-          </a:xfrm>
-          <a:prstGeom prst="roundRect">
-            <a:avLst>
-              <a:gd name="adj" fmla="val 12000"/>
-            </a:avLst>
-          </a:prstGeom>
-          <a:solidFill>
-            <a:srgbClr val="F1EFE8"/>
-          </a:solidFill>
-          <a:ln w="12700">
-            <a:solidFill>
-              <a:srgbClr val="888780"/>
-            </a:solidFill>
-            <a:prstDash val="solid"/>
-          </a:ln>
-          <a:effectLst>
-            <a:outerShdw blurRad="63500" dist="25400" dir="5400000" algn="bl" rotWithShape="0">
-              <a:srgbClr val="000000">
-                <a:alpha val="10000"/>
-              </a:srgbClr>
-            </a:outerShdw>
-          </a:effectLst>
-        </p:spPr>
-      </p:sp>
-      <p:sp>
-        <p:nvSpPr>
-          <p:cNvPr id="41" name="Text 39"/>
-          <p:cNvSpPr/>
-          <p:nvPr/>
-        </p:nvSpPr>
-        <p:spPr>
-          <a:xfrm>
-            <a:off x="877824" y="4864608"/>
-            <a:ext cx="1819656" cy="457200"/>
-          </a:xfrm>
-          <a:prstGeom prst="rect">
-            <a:avLst/>
-          </a:prstGeom>
-          <a:noFill/>
-          <a:ln/>
-        </p:spPr>
-        <p:txBody>
-          <a:bodyPr wrap="square" lIns="25400" tIns="25400" rIns="25400" bIns="25400" rtlCol="0" anchor="ctr"/>
-          <a:lstStyle/>
-          <a:p>
-            <a:pPr marL="0" indent="0" algn="ctr">
-              <a:lnSpc>
-                <a:spcPct val="95000"/>
-              </a:lnSpc>
-              <a:buNone/>
-            </a:pPr>
-            <a:r>
-              <a:rPr lang="en-US" sz="1100" b="1" dirty="0">
-                <a:solidFill>
-                  <a:srgbClr val="2C2C2A"/>
-                </a:solidFill>
-                <a:latin typeface="Calibri" pitchFamily="34" charset="0"/>
-                <a:ea typeface="Calibri" pitchFamily="34" charset="-122"/>
-                <a:cs typeface="Calibri" pitchFamily="34" charset="-120"/>
-              </a:rPr>
-              <a:t>Source docs</a:t>
-            </a:r>
-            <a:endParaRPr lang="en-US" sz="1100" dirty="0"/>
-          </a:p>
-          <a:p>
-            <a:pPr marL="0" indent="0" algn="ctr">
-              <a:lnSpc>
-                <a:spcPct val="95000"/>
-              </a:lnSpc>
-              <a:buNone/>
-            </a:pPr>
-            <a:r>
-              <a:rPr lang="en-US" sz="900" dirty="0">
-                <a:solidFill>
-                  <a:srgbClr val="444441"/>
-                </a:solidFill>
-                <a:latin typeface="Calibri" pitchFamily="34" charset="0"/>
-                <a:ea typeface="Calibri" pitchFamily="34" charset="-122"/>
-                <a:cs typeface="Calibri" pitchFamily="34" charset="-120"/>
-              </a:rPr>
-              <a:t>Amazon S3</a:t>
-            </a:r>
-            <a:endParaRPr lang="en-US" sz="1100" dirty="0"/>
-          </a:p>
-        </p:txBody>
-      </p:sp>
-      <p:sp>
-        <p:nvSpPr>
-          <p:cNvPr id="42" name="Shape 40"/>
-          <p:cNvSpPr/>
-          <p:nvPr/>
-        </p:nvSpPr>
-        <p:spPr>
-          <a:xfrm>
-            <a:off x="2953512" y="4864608"/>
-            <a:ext cx="1965960" cy="457200"/>
-          </a:xfrm>
-          <a:prstGeom prst="roundRect">
-            <a:avLst>
-              <a:gd name="adj" fmla="val 12000"/>
-            </a:avLst>
-          </a:prstGeom>
-          <a:solidFill>
-            <a:srgbClr val="F1EFE8"/>
-          </a:solidFill>
-          <a:ln w="12700">
-            <a:solidFill>
-              <a:srgbClr val="888780"/>
-            </a:solidFill>
-            <a:prstDash val="solid"/>
-          </a:ln>
-          <a:effectLst>
-            <a:outerShdw blurRad="63500" dist="25400" dir="5400000" algn="bl" rotWithShape="0">
-              <a:srgbClr val="000000">
-                <a:alpha val="10000"/>
-              </a:srgbClr>
-            </a:outerShdw>
-          </a:effectLst>
-        </p:spPr>
-      </p:sp>
-      <p:sp>
-        <p:nvSpPr>
-          <p:cNvPr id="43" name="Text 41"/>
-          <p:cNvSpPr/>
-          <p:nvPr/>
-        </p:nvSpPr>
-        <p:spPr>
-          <a:xfrm>
-            <a:off x="3026664" y="4864608"/>
-            <a:ext cx="1819656" cy="457200"/>
-          </a:xfrm>
-          <a:prstGeom prst="rect">
-            <a:avLst/>
-          </a:prstGeom>
-          <a:noFill/>
-          <a:ln/>
-        </p:spPr>
-        <p:txBody>
-          <a:bodyPr wrap="square" lIns="25400" tIns="25400" rIns="25400" bIns="25400" rtlCol="0" anchor="ctr"/>
-          <a:lstStyle/>
-          <a:p>
-            <a:pPr marL="0" indent="0" algn="ctr">
-              <a:lnSpc>
-                <a:spcPct val="95000"/>
-              </a:lnSpc>
-              <a:buNone/>
-            </a:pPr>
-            <a:r>
-              <a:rPr lang="en-US" sz="1100" b="1" dirty="0">
-                <a:solidFill>
-                  <a:srgbClr val="2C2C2A"/>
-                </a:solidFill>
-                <a:latin typeface="Calibri" pitchFamily="34" charset="0"/>
-                <a:ea typeface="Calibri" pitchFamily="34" charset="-122"/>
-                <a:cs typeface="Calibri" pitchFamily="34" charset="-120"/>
-              </a:rPr>
-              <a:t>Extract</a:t>
-            </a:r>
-            <a:endParaRPr lang="en-US" sz="1100" dirty="0"/>
-          </a:p>
-          <a:p>
-            <a:pPr marL="0" indent="0" algn="ctr">
-              <a:lnSpc>
-                <a:spcPct val="95000"/>
-              </a:lnSpc>
-              <a:buNone/>
-            </a:pPr>
-            <a:r>
-              <a:rPr lang="en-US" sz="900" dirty="0">
-                <a:solidFill>
-                  <a:srgbClr val="444441"/>
-                </a:solidFill>
-                <a:latin typeface="Calibri" pitchFamily="34" charset="0"/>
-                <a:ea typeface="Calibri" pitchFamily="34" charset="-122"/>
-                <a:cs typeface="Calibri" pitchFamily="34" charset="-120"/>
-              </a:rPr>
-              <a:t>Textract / BDA</a:t>
-            </a:r>
-            <a:endParaRPr lang="en-US" sz="1100" dirty="0"/>
-          </a:p>
-        </p:txBody>
-      </p:sp>
-      <p:sp>
-        <p:nvSpPr>
-          <p:cNvPr id="44" name="Shape 42"/>
-          <p:cNvSpPr/>
-          <p:nvPr/>
-        </p:nvSpPr>
-        <p:spPr>
-          <a:xfrm>
-            <a:off x="5102352" y="4864608"/>
-            <a:ext cx="1965960" cy="457200"/>
-          </a:xfrm>
-          <a:prstGeom prst="roundRect">
-            <a:avLst>
-              <a:gd name="adj" fmla="val 12000"/>
-            </a:avLst>
-          </a:prstGeom>
-          <a:solidFill>
-            <a:srgbClr val="F1EFE8"/>
-          </a:solidFill>
-          <a:ln w="12700">
-            <a:solidFill>
-              <a:srgbClr val="888780"/>
-            </a:solidFill>
-            <a:prstDash val="solid"/>
-          </a:ln>
-          <a:effectLst>
-            <a:outerShdw blurRad="63500" dist="25400" dir="5400000" algn="bl" rotWithShape="0">
-              <a:srgbClr val="000000">
-                <a:alpha val="10000"/>
-              </a:srgbClr>
-            </a:outerShdw>
-          </a:effectLst>
-        </p:spPr>
-      </p:sp>
-      <p:sp>
-        <p:nvSpPr>
-          <p:cNvPr id="45" name="Text 43"/>
-          <p:cNvSpPr/>
-          <p:nvPr/>
-        </p:nvSpPr>
-        <p:spPr>
-          <a:xfrm>
-            <a:off x="5175504" y="4864608"/>
-            <a:ext cx="1819656" cy="457200"/>
-          </a:xfrm>
-          <a:prstGeom prst="rect">
-            <a:avLst/>
-          </a:prstGeom>
-          <a:noFill/>
-          <a:ln/>
-        </p:spPr>
-        <p:txBody>
-          <a:bodyPr wrap="square" lIns="25400" tIns="25400" rIns="25400" bIns="25400" rtlCol="0" anchor="ctr"/>
-          <a:lstStyle/>
-          <a:p>
-            <a:pPr marL="0" indent="0" algn="ctr">
-              <a:lnSpc>
-                <a:spcPct val="95000"/>
-              </a:lnSpc>
-              <a:buNone/>
-            </a:pPr>
-            <a:r>
-              <a:rPr lang="en-US" sz="1100" b="1" dirty="0">
-                <a:solidFill>
-                  <a:srgbClr val="2C2C2A"/>
-                </a:solidFill>
-                <a:latin typeface="Calibri" pitchFamily="34" charset="0"/>
-                <a:ea typeface="Calibri" pitchFamily="34" charset="-122"/>
-                <a:cs typeface="Calibri" pitchFamily="34" charset="-120"/>
-              </a:rPr>
-              <a:t>Chunk</a:t>
-            </a:r>
-            <a:endParaRPr lang="en-US" sz="1100" dirty="0"/>
-          </a:p>
-          <a:p>
-            <a:pPr marL="0" indent="0" algn="ctr">
-              <a:lnSpc>
-                <a:spcPct val="95000"/>
-              </a:lnSpc>
-              <a:buNone/>
-            </a:pPr>
-            <a:r>
-              <a:rPr lang="en-US" sz="900" dirty="0">
-                <a:solidFill>
-                  <a:srgbClr val="444441"/>
-                </a:solidFill>
-                <a:latin typeface="Calibri" pitchFamily="34" charset="0"/>
-                <a:ea typeface="Calibri" pitchFamily="34" charset="-122"/>
-                <a:cs typeface="Calibri" pitchFamily="34" charset="-120"/>
-              </a:rPr>
-              <a:t>AWS Lambda</a:t>
-            </a:r>
-            <a:endParaRPr lang="en-US" sz="1100" dirty="0"/>
-          </a:p>
-        </p:txBody>
-      </p:sp>
-      <p:sp>
-        <p:nvSpPr>
-          <p:cNvPr id="46" name="Shape 44"/>
-          <p:cNvSpPr/>
-          <p:nvPr/>
-        </p:nvSpPr>
-        <p:spPr>
-          <a:xfrm>
-            <a:off x="7251192" y="4864608"/>
-            <a:ext cx="1965960" cy="457200"/>
-          </a:xfrm>
-          <a:prstGeom prst="roundRect">
-            <a:avLst>
-              <a:gd name="adj" fmla="val 12000"/>
-            </a:avLst>
-          </a:prstGeom>
-          <a:solidFill>
-            <a:srgbClr val="F1EFE8"/>
-          </a:solidFill>
-          <a:ln w="12700">
-            <a:solidFill>
-              <a:srgbClr val="888780"/>
-            </a:solidFill>
-            <a:prstDash val="solid"/>
-          </a:ln>
-          <a:effectLst>
-            <a:outerShdw blurRad="63500" dist="25400" dir="5400000" algn="bl" rotWithShape="0">
-              <a:srgbClr val="000000">
-                <a:alpha val="10000"/>
-              </a:srgbClr>
-            </a:outerShdw>
-          </a:effectLst>
-        </p:spPr>
-      </p:sp>
-      <p:sp>
-        <p:nvSpPr>
-          <p:cNvPr id="47" name="Text 45"/>
-          <p:cNvSpPr/>
-          <p:nvPr/>
-        </p:nvSpPr>
-        <p:spPr>
-          <a:xfrm>
-            <a:off x="7324344" y="4864608"/>
-            <a:ext cx="1819656" cy="457200"/>
-          </a:xfrm>
-          <a:prstGeom prst="rect">
-            <a:avLst/>
-          </a:prstGeom>
-          <a:noFill/>
-          <a:ln/>
-        </p:spPr>
-        <p:txBody>
-          <a:bodyPr wrap="square" lIns="25400" tIns="25400" rIns="25400" bIns="25400" rtlCol="0" anchor="ctr"/>
-          <a:lstStyle/>
-          <a:p>
-            <a:pPr marL="0" indent="0" algn="ctr">
-              <a:lnSpc>
-                <a:spcPct val="95000"/>
-              </a:lnSpc>
-              <a:buNone/>
-            </a:pPr>
-            <a:r>
-              <a:rPr lang="en-US" sz="1100" b="1" dirty="0">
-                <a:solidFill>
-                  <a:srgbClr val="2C2C2A"/>
-                </a:solidFill>
-                <a:latin typeface="Calibri" pitchFamily="34" charset="0"/>
-                <a:ea typeface="Calibri" pitchFamily="34" charset="-122"/>
-                <a:cs typeface="Calibri" pitchFamily="34" charset="-120"/>
-              </a:rPr>
-              <a:t>Embed</a:t>
-            </a:r>
-            <a:endParaRPr lang="en-US" sz="1100" dirty="0"/>
-          </a:p>
-          <a:p>
-            <a:pPr marL="0" indent="0" algn="ctr">
-              <a:lnSpc>
-                <a:spcPct val="95000"/>
-              </a:lnSpc>
-              <a:buNone/>
-            </a:pPr>
-            <a:r>
-              <a:rPr lang="en-US" sz="900" dirty="0">
-                <a:solidFill>
-                  <a:srgbClr val="444441"/>
-                </a:solidFill>
-                <a:latin typeface="Calibri" pitchFamily="34" charset="0"/>
-                <a:ea typeface="Calibri" pitchFamily="34" charset="-122"/>
-                <a:cs typeface="Calibri" pitchFamily="34" charset="-120"/>
-              </a:rPr>
-              <a:t>Titan (Bedrock)</a:t>
-            </a:r>
-            <a:endParaRPr lang="en-US" sz="1100" dirty="0"/>
-          </a:p>
-        </p:txBody>
-      </p:sp>
-      <p:sp>
-        <p:nvSpPr>
-          <p:cNvPr id="48" name="Shape 46"/>
-          <p:cNvSpPr/>
-          <p:nvPr/>
-        </p:nvSpPr>
-        <p:spPr>
-          <a:xfrm>
-            <a:off x="9400032" y="4864608"/>
-            <a:ext cx="1965960" cy="457200"/>
-          </a:xfrm>
-          <a:prstGeom prst="roundRect">
-            <a:avLst>
-              <a:gd name="adj" fmla="val 12000"/>
-            </a:avLst>
-          </a:prstGeom>
-          <a:solidFill>
-            <a:srgbClr val="F1EFE8"/>
-          </a:solidFill>
-          <a:ln w="12700">
-            <a:solidFill>
-              <a:srgbClr val="888780"/>
-            </a:solidFill>
-            <a:prstDash val="solid"/>
-          </a:ln>
-          <a:effectLst>
-            <a:outerShdw blurRad="63500" dist="25400" dir="5400000" algn="bl" rotWithShape="0">
-              <a:srgbClr val="000000">
-                <a:alpha val="10000"/>
-              </a:srgbClr>
-            </a:outerShdw>
-          </a:effectLst>
-        </p:spPr>
-      </p:sp>
-      <p:sp>
-        <p:nvSpPr>
-          <p:cNvPr id="49" name="Text 47"/>
-          <p:cNvSpPr/>
-          <p:nvPr/>
-        </p:nvSpPr>
-        <p:spPr>
-          <a:xfrm>
-            <a:off x="9473184" y="4864608"/>
-            <a:ext cx="1819656" cy="457200"/>
-          </a:xfrm>
-          <a:prstGeom prst="rect">
-            <a:avLst/>
-          </a:prstGeom>
-          <a:noFill/>
-          <a:ln/>
-        </p:spPr>
-        <p:txBody>
-          <a:bodyPr wrap="square" lIns="25400" tIns="25400" rIns="25400" bIns="25400" rtlCol="0" anchor="ctr"/>
-          <a:lstStyle/>
-          <a:p>
-            <a:pPr marL="0" indent="0" algn="ctr">
-              <a:lnSpc>
-                <a:spcPct val="95000"/>
-              </a:lnSpc>
-              <a:buNone/>
-            </a:pPr>
-            <a:r>
-              <a:rPr lang="en-US" sz="1100" b="1" dirty="0">
-                <a:solidFill>
-                  <a:srgbClr val="2C2C2A"/>
-                </a:solidFill>
-                <a:latin typeface="Calibri" pitchFamily="34" charset="0"/>
-                <a:ea typeface="Calibri" pitchFamily="34" charset="-122"/>
-                <a:cs typeface="Calibri" pitchFamily="34" charset="-120"/>
-              </a:rPr>
-              <a:t>Index</a:t>
-            </a:r>
-            <a:endParaRPr lang="en-US" sz="1100" dirty="0"/>
-          </a:p>
-          <a:p>
-            <a:pPr marL="0" indent="0" algn="ctr">
-              <a:lnSpc>
-                <a:spcPct val="95000"/>
-              </a:lnSpc>
-              <a:buNone/>
-            </a:pPr>
-            <a:r>
-              <a:rPr lang="en-US" sz="900" dirty="0">
-                <a:solidFill>
-                  <a:srgbClr val="444441"/>
-                </a:solidFill>
-                <a:latin typeface="Calibri" pitchFamily="34" charset="0"/>
-                <a:ea typeface="Calibri" pitchFamily="34" charset="-122"/>
-                <a:cs typeface="Calibri" pitchFamily="34" charset="-120"/>
-              </a:rPr>
-              <a:t>OpenSearch</a:t>
-            </a:r>
-            <a:endParaRPr lang="en-US" sz="1100" dirty="0"/>
-          </a:p>
-        </p:txBody>
-      </p:sp>
-      <p:sp>
-        <p:nvSpPr>
-          <p:cNvPr id="50" name="Shape 48"/>
-          <p:cNvSpPr/>
-          <p:nvPr/>
-        </p:nvSpPr>
-        <p:spPr>
-          <a:xfrm>
-            <a:off x="2770632" y="5093208"/>
-            <a:ext cx="182880" cy="0"/>
-          </a:xfrm>
-          <a:prstGeom prst="line">
-            <a:avLst/>
-          </a:prstGeom>
-          <a:noFill/>
-          <a:ln w="22225">
-            <a:solidFill>
-              <a:srgbClr val="888780"/>
+              <a:srgbClr val="9A988E"/>
             </a:solidFill>
             <a:prstDash val="solid"/>
             <a:tailEnd type="triangle"/>
@@ -2967,22 +2052,201 @@
       </p:sp>
       <p:sp>
         <p:nvSpPr>
-          <p:cNvPr id="51" name="Shape 49"/>
-          <p:cNvSpPr/>
-          <p:nvPr/>
-        </p:nvSpPr>
-        <p:spPr>
-          <a:xfrm>
-            <a:off x="4919472" y="5093208"/>
-            <a:ext cx="182880" cy="0"/>
+          <p:cNvPr id="34" name="Shape 25"/>
+          <p:cNvSpPr/>
+          <p:nvPr/>
+        </p:nvSpPr>
+        <p:spPr>
+          <a:xfrm>
+            <a:off x="3749040" y="4334882"/>
+            <a:ext cx="4206240" cy="1005840"/>
+          </a:xfrm>
+          <a:prstGeom prst="roundRect">
+            <a:avLst>
+              <a:gd name="adj" fmla="val 6364"/>
+            </a:avLst>
+          </a:prstGeom>
+          <a:solidFill>
+            <a:srgbClr val="FAFAF8"/>
+          </a:solidFill>
+          <a:ln w="12700">
+            <a:solidFill>
+              <a:srgbClr val="DEDCD3"/>
+            </a:solidFill>
+            <a:prstDash val="dash"/>
+          </a:ln>
+        </p:spPr>
+      </p:sp>
+      <p:sp>
+        <p:nvSpPr>
+          <p:cNvPr id="35" name="Text 26"/>
+          <p:cNvSpPr/>
+          <p:nvPr/>
+        </p:nvSpPr>
+        <p:spPr>
+          <a:xfrm>
+            <a:off x="3913632" y="4389746"/>
+            <a:ext cx="3877056" cy="219456"/>
+          </a:xfrm>
+          <a:prstGeom prst="rect">
+            <a:avLst/>
+          </a:prstGeom>
+          <a:noFill/>
+          <a:ln/>
+        </p:spPr>
+        <p:txBody>
+          <a:bodyPr wrap="square" lIns="0" tIns="0" rIns="0" bIns="0" rtlCol="0" anchor="ctr"/>
+          <a:lstStyle/>
+          <a:p>
+            <a:pPr marL="0" indent="0" algn="l">
+              <a:buNone/>
+            </a:pPr>
+            <a:r>
+              <a:rPr lang="en-US" sz="1250" b="1" dirty="0">
+                <a:solidFill>
+                  <a:srgbClr val="2F4858"/>
+                </a:solidFill>
+                <a:latin typeface="Calibri" pitchFamily="34" charset="0"/>
+                <a:ea typeface="Calibri" pitchFamily="34" charset="-122"/>
+                <a:cs typeface="Calibri" pitchFamily="34" charset="-120"/>
+              </a:rPr>
+              <a:t>LLM LAYER</a:t>
+            </a:r>
+            <a:endParaRPr lang="en-US" sz="1250" dirty="0"/>
+          </a:p>
+        </p:txBody>
+      </p:sp>
+      <p:sp>
+        <p:nvSpPr>
+          <p:cNvPr id="36" name="Shape 27"/>
+          <p:cNvSpPr/>
+          <p:nvPr/>
+        </p:nvSpPr>
+        <p:spPr>
+          <a:xfrm>
+            <a:off x="3886200" y="4618346"/>
+            <a:ext cx="3931920" cy="566928"/>
+          </a:xfrm>
+          <a:prstGeom prst="roundRect">
+            <a:avLst>
+              <a:gd name="adj" fmla="val 8065"/>
+            </a:avLst>
+          </a:prstGeom>
+          <a:solidFill>
+            <a:srgbClr val="FFFFFF"/>
+          </a:solidFill>
+          <a:ln w="9525">
+            <a:solidFill>
+              <a:srgbClr val="E3E1D8"/>
+            </a:solidFill>
+            <a:prstDash val="solid"/>
+          </a:ln>
+        </p:spPr>
+      </p:sp>
+      <p:pic>
+        <p:nvPicPr>
+          <p:cNvPr id="37" name="Image 7" descr="/home/claude/icons/llm_layer.png"/>
+          <p:cNvPicPr>
+            <a:picLocks noChangeAspect="1"/>
+          </p:cNvPicPr>
+          <p:nvPr/>
+        </p:nvPicPr>
+        <p:blipFill>
+          <a:blip r:embed="rId10"/>
+          <a:stretch>
+            <a:fillRect/>
+          </a:stretch>
+        </p:blipFill>
+        <p:spPr>
+          <a:xfrm>
+            <a:off x="4014216" y="4746362"/>
+            <a:ext cx="310896" cy="310896"/>
+          </a:xfrm>
+          <a:prstGeom prst="rect">
+            <a:avLst/>
+          </a:prstGeom>
+        </p:spPr>
+      </p:pic>
+      <p:sp>
+        <p:nvSpPr>
+          <p:cNvPr id="38" name="Text 28"/>
+          <p:cNvSpPr/>
+          <p:nvPr/>
+        </p:nvSpPr>
+        <p:spPr>
+          <a:xfrm>
+            <a:off x="4453128" y="4618346"/>
+            <a:ext cx="3255264" cy="566928"/>
+          </a:xfrm>
+          <a:prstGeom prst="rect">
+            <a:avLst/>
+          </a:prstGeom>
+          <a:noFill/>
+          <a:ln/>
+        </p:spPr>
+        <p:txBody>
+          <a:bodyPr wrap="square" lIns="12700" tIns="12700" rIns="12700" bIns="12700" rtlCol="0" anchor="ctr"/>
+          <a:lstStyle/>
+          <a:p>
+            <a:pPr marL="0" indent="0" algn="l">
+              <a:lnSpc>
+                <a:spcPct val="97000"/>
+              </a:lnSpc>
+              <a:buNone/>
+            </a:pPr>
+            <a:r>
+              <a:rPr lang="en-US" sz="1300" b="1" dirty="0">
+                <a:solidFill>
+                  <a:srgbClr val="1B1B18"/>
+                </a:solidFill>
+                <a:latin typeface="Calibri" pitchFamily="34" charset="0"/>
+                <a:ea typeface="Calibri" pitchFamily="34" charset="-122"/>
+                <a:cs typeface="Calibri" pitchFamily="34" charset="-120"/>
+              </a:rPr>
+              <a:t>Claude · Titan · Llama</a:t>
+            </a:r>
+            <a:endParaRPr lang="en-US" sz="1300" dirty="0"/>
+          </a:p>
+          <a:p>
+            <a:pPr marL="0" indent="0" algn="l">
+              <a:lnSpc>
+                <a:spcPct val="97000"/>
+              </a:lnSpc>
+              <a:buNone/>
+            </a:pPr>
+            <a:r>
+              <a:rPr lang="en-US" sz="950" dirty="0">
+                <a:solidFill>
+                  <a:srgbClr val="6B6A64"/>
+                </a:solidFill>
+                <a:latin typeface="Calibri" pitchFamily="34" charset="0"/>
+                <a:ea typeface="Calibri" pitchFamily="34" charset="-122"/>
+                <a:cs typeface="Calibri" pitchFamily="34" charset="-120"/>
+              </a:rPr>
+              <a:t>+ Bedrock Guardrails</a:t>
+            </a:r>
+            <a:endParaRPr lang="en-US" sz="1300" dirty="0"/>
+          </a:p>
+        </p:txBody>
+      </p:sp>
+      <p:sp>
+        <p:nvSpPr>
+          <p:cNvPr id="39" name="Shape 29"/>
+          <p:cNvSpPr/>
+          <p:nvPr/>
+        </p:nvSpPr>
+        <p:spPr>
+          <a:xfrm>
+            <a:off x="5852160" y="4078850"/>
+            <a:ext cx="0" cy="539496"/>
           </a:xfrm>
           <a:prstGeom prst="line">
             <a:avLst/>
           </a:prstGeom>
           <a:noFill/>
-          <a:ln w="22225">
+          <a:ln w="15875">
             <a:solidFill>
-              <a:srgbClr val="888780"/>
+              <a:srgbClr val="9A988E"/>
             </a:solidFill>
             <a:prstDash val="solid"/>
             <a:tailEnd type="triangle"/>
@@ -2991,22 +2255,407 @@
       </p:sp>
       <p:sp>
         <p:nvSpPr>
-          <p:cNvPr id="52" name="Shape 50"/>
-          <p:cNvSpPr/>
-          <p:nvPr/>
-        </p:nvSpPr>
-        <p:spPr>
-          <a:xfrm>
-            <a:off x="7068312" y="5093208"/>
-            <a:ext cx="182880" cy="0"/>
+          <p:cNvPr id="40" name="Shape 30"/>
+          <p:cNvSpPr/>
+          <p:nvPr/>
+        </p:nvSpPr>
+        <p:spPr>
+          <a:xfrm>
+            <a:off x="8366760" y="2405498"/>
+            <a:ext cx="3200400" cy="502920"/>
+          </a:xfrm>
+          <a:prstGeom prst="roundRect">
+            <a:avLst>
+              <a:gd name="adj" fmla="val 9091"/>
+            </a:avLst>
+          </a:prstGeom>
+          <a:solidFill>
+            <a:srgbClr val="FFFFFF"/>
+          </a:solidFill>
+          <a:ln w="9525">
+            <a:solidFill>
+              <a:srgbClr val="E3E1D8"/>
+            </a:solidFill>
+            <a:prstDash val="solid"/>
+          </a:ln>
+        </p:spPr>
+      </p:sp>
+      <p:pic>
+        <p:nvPicPr>
+          <p:cNvPr id="41" name="Image 8" descr="/home/claude/icons/draft_artefacts.png"/>
+          <p:cNvPicPr>
+            <a:picLocks noChangeAspect="1"/>
+          </p:cNvPicPr>
+          <p:nvPr/>
+        </p:nvPicPr>
+        <p:blipFill>
+          <a:blip r:embed="rId11"/>
+          <a:stretch>
+            <a:fillRect/>
+          </a:stretch>
+        </p:blipFill>
+        <p:spPr>
+          <a:xfrm>
+            <a:off x="8494776" y="2501510"/>
+            <a:ext cx="310896" cy="310896"/>
+          </a:xfrm>
+          <a:prstGeom prst="rect">
+            <a:avLst/>
+          </a:prstGeom>
+        </p:spPr>
+      </p:pic>
+      <p:sp>
+        <p:nvSpPr>
+          <p:cNvPr id="42" name="Text 31"/>
+          <p:cNvSpPr/>
+          <p:nvPr/>
+        </p:nvSpPr>
+        <p:spPr>
+          <a:xfrm>
+            <a:off x="8933688" y="2405498"/>
+            <a:ext cx="2523744" cy="502920"/>
+          </a:xfrm>
+          <a:prstGeom prst="rect">
+            <a:avLst/>
+          </a:prstGeom>
+          <a:noFill/>
+          <a:ln/>
+        </p:spPr>
+        <p:txBody>
+          <a:bodyPr wrap="square" lIns="12700" tIns="12700" rIns="12700" bIns="12700" rtlCol="0" anchor="ctr"/>
+          <a:lstStyle/>
+          <a:p>
+            <a:pPr marL="0" indent="0" algn="l">
+              <a:lnSpc>
+                <a:spcPct val="97000"/>
+              </a:lnSpc>
+              <a:buNone/>
+            </a:pPr>
+            <a:r>
+              <a:rPr lang="en-US" sz="1250" b="1" dirty="0">
+                <a:solidFill>
+                  <a:srgbClr val="1B1B18"/>
+                </a:solidFill>
+                <a:latin typeface="Calibri" pitchFamily="34" charset="0"/>
+                <a:ea typeface="Calibri" pitchFamily="34" charset="-122"/>
+                <a:cs typeface="Calibri" pitchFamily="34" charset="-120"/>
+              </a:rPr>
+              <a:t>Draft artefacts</a:t>
+            </a:r>
+            <a:endParaRPr lang="en-US" sz="1250" dirty="0"/>
+          </a:p>
+          <a:p>
+            <a:pPr marL="0" indent="0" algn="l">
+              <a:lnSpc>
+                <a:spcPct val="97000"/>
+              </a:lnSpc>
+              <a:buNone/>
+            </a:pPr>
+            <a:r>
+              <a:rPr lang="en-US" sz="900" dirty="0">
+                <a:solidFill>
+                  <a:srgbClr val="6B6A64"/>
+                </a:solidFill>
+                <a:latin typeface="Calibri" pitchFamily="34" charset="0"/>
+                <a:ea typeface="Calibri" pitchFamily="34" charset="-122"/>
+                <a:cs typeface="Calibri" pitchFamily="34" charset="-120"/>
+              </a:rPr>
+              <a:t>Scenario, task, email, roleplay</a:t>
+            </a:r>
+            <a:endParaRPr lang="en-US" sz="1250" dirty="0"/>
+          </a:p>
+        </p:txBody>
+      </p:sp>
+      <p:sp>
+        <p:nvSpPr>
+          <p:cNvPr id="43" name="Shape 32"/>
+          <p:cNvSpPr/>
+          <p:nvPr/>
+        </p:nvSpPr>
+        <p:spPr>
+          <a:xfrm>
+            <a:off x="8366760" y="3036434"/>
+            <a:ext cx="3200400" cy="502920"/>
+          </a:xfrm>
+          <a:prstGeom prst="roundRect">
+            <a:avLst>
+              <a:gd name="adj" fmla="val 9091"/>
+            </a:avLst>
+          </a:prstGeom>
+          <a:solidFill>
+            <a:srgbClr val="FFFFFF"/>
+          </a:solidFill>
+          <a:ln w="9525">
+            <a:solidFill>
+              <a:srgbClr val="E3E1D8"/>
+            </a:solidFill>
+            <a:prstDash val="solid"/>
+          </a:ln>
+        </p:spPr>
+      </p:sp>
+      <p:pic>
+        <p:nvPicPr>
+          <p:cNvPr id="44" name="Image 9" descr="/home/claude/icons/citations.png"/>
+          <p:cNvPicPr>
+            <a:picLocks noChangeAspect="1"/>
+          </p:cNvPicPr>
+          <p:nvPr/>
+        </p:nvPicPr>
+        <p:blipFill>
+          <a:blip r:embed="rId12"/>
+          <a:stretch>
+            <a:fillRect/>
+          </a:stretch>
+        </p:blipFill>
+        <p:spPr>
+          <a:xfrm>
+            <a:off x="8494776" y="3132446"/>
+            <a:ext cx="310896" cy="310896"/>
+          </a:xfrm>
+          <a:prstGeom prst="rect">
+            <a:avLst/>
+          </a:prstGeom>
+        </p:spPr>
+      </p:pic>
+      <p:sp>
+        <p:nvSpPr>
+          <p:cNvPr id="45" name="Text 33"/>
+          <p:cNvSpPr/>
+          <p:nvPr/>
+        </p:nvSpPr>
+        <p:spPr>
+          <a:xfrm>
+            <a:off x="8933688" y="3036434"/>
+            <a:ext cx="2523744" cy="502920"/>
+          </a:xfrm>
+          <a:prstGeom prst="rect">
+            <a:avLst/>
+          </a:prstGeom>
+          <a:noFill/>
+          <a:ln/>
+        </p:spPr>
+        <p:txBody>
+          <a:bodyPr wrap="square" lIns="12700" tIns="12700" rIns="12700" bIns="12700" rtlCol="0" anchor="ctr"/>
+          <a:lstStyle/>
+          <a:p>
+            <a:pPr marL="0" indent="0" algn="l">
+              <a:lnSpc>
+                <a:spcPct val="97000"/>
+              </a:lnSpc>
+              <a:buNone/>
+            </a:pPr>
+            <a:r>
+              <a:rPr lang="en-US" sz="1250" b="1" dirty="0">
+                <a:solidFill>
+                  <a:srgbClr val="1B1B18"/>
+                </a:solidFill>
+                <a:latin typeface="Calibri" pitchFamily="34" charset="0"/>
+                <a:ea typeface="Calibri" pitchFamily="34" charset="-122"/>
+                <a:cs typeface="Calibri" pitchFamily="34" charset="-120"/>
+              </a:rPr>
+              <a:t>Citations &amp; sources</a:t>
+            </a:r>
+            <a:endParaRPr lang="en-US" sz="1250" dirty="0"/>
+          </a:p>
+          <a:p>
+            <a:pPr marL="0" indent="0" algn="l">
+              <a:lnSpc>
+                <a:spcPct val="97000"/>
+              </a:lnSpc>
+              <a:buNone/>
+            </a:pPr>
+            <a:r>
+              <a:rPr lang="en-US" sz="900" dirty="0">
+                <a:solidFill>
+                  <a:srgbClr val="6B6A64"/>
+                </a:solidFill>
+                <a:latin typeface="Calibri" pitchFamily="34" charset="0"/>
+                <a:ea typeface="Calibri" pitchFamily="34" charset="-122"/>
+                <a:cs typeface="Calibri" pitchFamily="34" charset="-120"/>
+              </a:rPr>
+              <a:t>Grounded, traceable</a:t>
+            </a:r>
+            <a:endParaRPr lang="en-US" sz="1250" dirty="0"/>
+          </a:p>
+        </p:txBody>
+      </p:sp>
+      <p:sp>
+        <p:nvSpPr>
+          <p:cNvPr id="46" name="Shape 34"/>
+          <p:cNvSpPr/>
+          <p:nvPr/>
+        </p:nvSpPr>
+        <p:spPr>
+          <a:xfrm>
+            <a:off x="8366760" y="3667370"/>
+            <a:ext cx="3200400" cy="502920"/>
+          </a:xfrm>
+          <a:prstGeom prst="roundRect">
+            <a:avLst>
+              <a:gd name="adj" fmla="val 9091"/>
+            </a:avLst>
+          </a:prstGeom>
+          <a:solidFill>
+            <a:srgbClr val="FFFFFF"/>
+          </a:solidFill>
+          <a:ln w="9525">
+            <a:solidFill>
+              <a:srgbClr val="E3E1D8"/>
+            </a:solidFill>
+            <a:prstDash val="solid"/>
+          </a:ln>
+        </p:spPr>
+      </p:sp>
+      <p:pic>
+        <p:nvPicPr>
+          <p:cNvPr id="47" name="Image 10" descr="/home/claude/icons/followup_chat.png"/>
+          <p:cNvPicPr>
+            <a:picLocks noChangeAspect="1"/>
+          </p:cNvPicPr>
+          <p:nvPr/>
+        </p:nvPicPr>
+        <p:blipFill>
+          <a:blip r:embed="rId13"/>
+          <a:stretch>
+            <a:fillRect/>
+          </a:stretch>
+        </p:blipFill>
+        <p:spPr>
+          <a:xfrm>
+            <a:off x="8494776" y="3763382"/>
+            <a:ext cx="310896" cy="310896"/>
+          </a:xfrm>
+          <a:prstGeom prst="rect">
+            <a:avLst/>
+          </a:prstGeom>
+        </p:spPr>
+      </p:pic>
+      <p:sp>
+        <p:nvSpPr>
+          <p:cNvPr id="48" name="Text 35"/>
+          <p:cNvSpPr/>
+          <p:nvPr/>
+        </p:nvSpPr>
+        <p:spPr>
+          <a:xfrm>
+            <a:off x="8933688" y="3667370"/>
+            <a:ext cx="2523744" cy="502920"/>
+          </a:xfrm>
+          <a:prstGeom prst="rect">
+            <a:avLst/>
+          </a:prstGeom>
+          <a:noFill/>
+          <a:ln/>
+        </p:spPr>
+        <p:txBody>
+          <a:bodyPr wrap="square" lIns="12700" tIns="12700" rIns="12700" bIns="12700" rtlCol="0" anchor="ctr"/>
+          <a:lstStyle/>
+          <a:p>
+            <a:pPr marL="0" indent="0" algn="l">
+              <a:lnSpc>
+                <a:spcPct val="97000"/>
+              </a:lnSpc>
+              <a:buNone/>
+            </a:pPr>
+            <a:r>
+              <a:rPr lang="en-US" sz="1250" b="1" dirty="0">
+                <a:solidFill>
+                  <a:srgbClr val="1B1B18"/>
+                </a:solidFill>
+                <a:latin typeface="Calibri" pitchFamily="34" charset="0"/>
+                <a:ea typeface="Calibri" pitchFamily="34" charset="-122"/>
+                <a:cs typeface="Calibri" pitchFamily="34" charset="-120"/>
+              </a:rPr>
+              <a:t>Follow-up chat</a:t>
+            </a:r>
+            <a:endParaRPr lang="en-US" sz="1250" dirty="0"/>
+          </a:p>
+          <a:p>
+            <a:pPr marL="0" indent="0" algn="l">
+              <a:lnSpc>
+                <a:spcPct val="97000"/>
+              </a:lnSpc>
+              <a:buNone/>
+            </a:pPr>
+            <a:r>
+              <a:rPr lang="en-US" sz="900" dirty="0">
+                <a:solidFill>
+                  <a:srgbClr val="6B6A64"/>
+                </a:solidFill>
+                <a:latin typeface="Calibri" pitchFamily="34" charset="0"/>
+                <a:ea typeface="Calibri" pitchFamily="34" charset="-122"/>
+                <a:cs typeface="Calibri" pitchFamily="34" charset="-120"/>
+              </a:rPr>
+              <a:t>Loops back to the agent</a:t>
+            </a:r>
+            <a:endParaRPr lang="en-US" sz="1250" dirty="0"/>
+          </a:p>
+        </p:txBody>
+      </p:sp>
+      <p:sp>
+        <p:nvSpPr>
+          <p:cNvPr id="49" name="Shape 36"/>
+          <p:cNvSpPr/>
+          <p:nvPr/>
+        </p:nvSpPr>
+        <p:spPr>
+          <a:xfrm>
+            <a:off x="7818120" y="3836534"/>
+            <a:ext cx="228600" cy="0"/>
           </a:xfrm>
           <a:prstGeom prst="line">
             <a:avLst/>
           </a:prstGeom>
           <a:noFill/>
-          <a:ln w="22225">
+          <a:ln w="15875">
             <a:solidFill>
-              <a:srgbClr val="888780"/>
+              <a:srgbClr val="9A988E"/>
+            </a:solidFill>
+            <a:prstDash val="solid"/>
+          </a:ln>
+        </p:spPr>
+      </p:sp>
+      <p:sp>
+        <p:nvSpPr>
+          <p:cNvPr id="50" name="Shape 37"/>
+          <p:cNvSpPr/>
+          <p:nvPr/>
+        </p:nvSpPr>
+        <p:spPr>
+          <a:xfrm>
+            <a:off x="8046720" y="2656958"/>
+            <a:ext cx="0" cy="1179576"/>
+          </a:xfrm>
+          <a:prstGeom prst="line">
+            <a:avLst/>
+          </a:prstGeom>
+          <a:noFill/>
+          <a:ln w="15875">
+            <a:solidFill>
+              <a:srgbClr val="9A988E"/>
+            </a:solidFill>
+            <a:prstDash val="solid"/>
+          </a:ln>
+        </p:spPr>
+      </p:sp>
+      <p:sp>
+        <p:nvSpPr>
+          <p:cNvPr id="51" name="Shape 38"/>
+          <p:cNvSpPr/>
+          <p:nvPr/>
+        </p:nvSpPr>
+        <p:spPr>
+          <a:xfrm>
+            <a:off x="8046720" y="2656958"/>
+            <a:ext cx="301752" cy="0"/>
+          </a:xfrm>
+          <a:prstGeom prst="line">
+            <a:avLst/>
+          </a:prstGeom>
+          <a:noFill/>
+          <a:ln w="15875">
+            <a:solidFill>
+              <a:srgbClr val="9A988E"/>
             </a:solidFill>
             <a:prstDash val="solid"/>
             <a:tailEnd type="triangle"/>
@@ -3015,46 +2664,68 @@
       </p:sp>
       <p:sp>
         <p:nvSpPr>
-          <p:cNvPr id="53" name="Shape 51"/>
-          <p:cNvSpPr/>
-          <p:nvPr/>
-        </p:nvSpPr>
-        <p:spPr>
-          <a:xfrm>
-            <a:off x="9217152" y="5093208"/>
-            <a:ext cx="182880" cy="0"/>
+          <p:cNvPr id="52" name="Shape 39"/>
+          <p:cNvSpPr/>
+          <p:nvPr/>
+        </p:nvSpPr>
+        <p:spPr>
+          <a:xfrm>
+            <a:off x="8138160" y="3918830"/>
+            <a:ext cx="210312" cy="0"/>
           </a:xfrm>
           <a:prstGeom prst="line">
             <a:avLst/>
           </a:prstGeom>
           <a:noFill/>
-          <a:ln w="22225">
+          <a:ln w="15875">
             <a:solidFill>
-              <a:srgbClr val="888780"/>
+              <a:srgbClr val="9A988E"/>
             </a:solidFill>
-            <a:prstDash val="solid"/>
-            <a:tailEnd type="triangle"/>
+            <a:prstDash val="dash"/>
           </a:ln>
         </p:spPr>
       </p:sp>
       <p:sp>
         <p:nvSpPr>
-          <p:cNvPr id="54" name="Shape 52"/>
-          <p:cNvSpPr/>
-          <p:nvPr/>
-        </p:nvSpPr>
-        <p:spPr>
-          <a:xfrm>
-            <a:off x="5852160" y="4498848"/>
+          <p:cNvPr id="53" name="Shape 40"/>
+          <p:cNvSpPr/>
+          <p:nvPr/>
+        </p:nvSpPr>
+        <p:spPr>
+          <a:xfrm>
+            <a:off x="8138160" y="3836534"/>
+            <a:ext cx="0" cy="82296"/>
+          </a:xfrm>
+          <a:prstGeom prst="line">
+            <a:avLst/>
+          </a:prstGeom>
+          <a:noFill/>
+          <a:ln w="15875">
+            <a:solidFill>
+              <a:srgbClr val="9A988E"/>
+            </a:solidFill>
+            <a:prstDash val="dash"/>
+          </a:ln>
+        </p:spPr>
+      </p:sp>
+      <p:sp>
+        <p:nvSpPr>
+          <p:cNvPr id="54" name="Shape 41"/>
+          <p:cNvSpPr/>
+          <p:nvPr/>
+        </p:nvSpPr>
+        <p:spPr>
+          <a:xfrm>
+            <a:off x="8138160" y="3836534"/>
             <a:ext cx="0" cy="0"/>
           </a:xfrm>
           <a:prstGeom prst="line">
             <a:avLst/>
           </a:prstGeom>
           <a:noFill/>
-          <a:ln w="22225">
+          <a:ln w="15875">
             <a:solidFill>
-              <a:srgbClr val="888780"/>
+              <a:srgbClr val="9A988E"/>
             </a:solidFill>
             <a:prstDash val="dash"/>
             <a:tailEnd type="triangle"/>
@@ -3063,26 +2734,73 @@
       </p:sp>
       <p:sp>
         <p:nvSpPr>
-          <p:cNvPr id="55" name="Shape 53"/>
-          <p:cNvSpPr/>
-          <p:nvPr/>
-        </p:nvSpPr>
-        <p:spPr>
-          <a:xfrm>
-            <a:off x="457200" y="5550408"/>
+          <p:cNvPr id="82" name="Shape 61"/>
+          <p:cNvSpPr/>
+          <p:nvPr/>
+        </p:nvSpPr>
+        <p:spPr>
+          <a:xfrm>
+            <a:off x="3794760" y="2890130"/>
+            <a:ext cx="0" cy="2999232"/>
+          </a:xfrm>
+          <a:prstGeom prst="line">
+            <a:avLst/>
+          </a:prstGeom>
+          <a:noFill/>
+          <a:ln w="15875">
+            <a:solidFill>
+              <a:srgbClr val="9A988E"/>
+            </a:solidFill>
+            <a:prstDash val="dash"/>
+          </a:ln>
+        </p:spPr>
+      </p:sp>
+      <p:sp>
+        <p:nvSpPr>
+          <p:cNvPr id="83" name="Shape 62"/>
+          <p:cNvSpPr/>
+          <p:nvPr/>
+        </p:nvSpPr>
+        <p:spPr>
+          <a:xfrm>
+            <a:off x="3794760" y="2890130"/>
+            <a:ext cx="82296" cy="0"/>
+          </a:xfrm>
+          <a:prstGeom prst="line">
+            <a:avLst/>
+          </a:prstGeom>
+          <a:noFill/>
+          <a:ln w="15875">
+            <a:solidFill>
+              <a:srgbClr val="9A988E"/>
+            </a:solidFill>
+            <a:prstDash val="dash"/>
+            <a:tailEnd type="triangle"/>
+          </a:ln>
+        </p:spPr>
+      </p:sp>
+      <p:sp>
+        <p:nvSpPr>
+          <p:cNvPr id="84" name="Shape 63"/>
+          <p:cNvSpPr/>
+          <p:nvPr/>
+        </p:nvSpPr>
+        <p:spPr>
+          <a:xfrm>
+            <a:off x="457200" y="5577840"/>
             <a:ext cx="11247120" cy="731520"/>
           </a:xfrm>
           <a:prstGeom prst="roundRect">
             <a:avLst>
-              <a:gd name="adj" fmla="val 10000"/>
+              <a:gd name="adj" fmla="val 8750"/>
             </a:avLst>
           </a:prstGeom>
           <a:solidFill>
-            <a:srgbClr val="F7F6F1"/>
+            <a:srgbClr val="FAFAF8"/>
           </a:solidFill>
           <a:ln w="12700">
             <a:solidFill>
-              <a:srgbClr val="C9C7BE"/>
+              <a:srgbClr val="DEDCD3"/>
             </a:solidFill>
             <a:prstDash val="solid"/>
           </a:ln>
@@ -3090,13 +2808,13 @@
       </p:sp>
       <p:sp>
         <p:nvSpPr>
-          <p:cNvPr id="56" name="Text 54"/>
-          <p:cNvSpPr/>
-          <p:nvPr/>
-        </p:nvSpPr>
-        <p:spPr>
-          <a:xfrm>
-            <a:off x="621792" y="5605272"/>
+          <p:cNvPr id="85" name="Text 64"/>
+          <p:cNvSpPr/>
+          <p:nvPr/>
+        </p:nvSpPr>
+        <p:spPr>
+          <a:xfrm>
+            <a:off x="621792" y="5632704"/>
             <a:ext cx="10917936" cy="201168"/>
           </a:xfrm>
           <a:prstGeom prst="rect">
@@ -3113,85 +2831,102 @@
               <a:buNone/>
             </a:pPr>
             <a:r>
-              <a:rPr lang="en-US" sz="1300" b="1" dirty="0">
-                <a:solidFill>
-                  <a:srgbClr val="2C2C2A"/>
-                </a:solidFill>
-                <a:latin typeface="Calibri" pitchFamily="34" charset="0"/>
-                <a:ea typeface="Calibri" pitchFamily="34" charset="-122"/>
-                <a:cs typeface="Calibri" pitchFamily="34" charset="-120"/>
-              </a:rPr>
-              <a:t>Cross-cutting services</a:t>
-            </a:r>
-            <a:endParaRPr lang="en-US" sz="1300" dirty="0"/>
-          </a:p>
-        </p:txBody>
-      </p:sp>
-      <p:sp>
-        <p:nvSpPr>
-          <p:cNvPr id="57" name="Shape 55"/>
-          <p:cNvSpPr/>
-          <p:nvPr/>
-        </p:nvSpPr>
-        <p:spPr>
-          <a:xfrm>
-            <a:off x="804672" y="5815584"/>
+              <a:rPr lang="en-US" sz="1250" b="1" dirty="0">
+                <a:solidFill>
+                  <a:srgbClr val="2F4858"/>
+                </a:solidFill>
+                <a:latin typeface="Calibri" pitchFamily="34" charset="0"/>
+                <a:ea typeface="Calibri" pitchFamily="34" charset="-122"/>
+                <a:cs typeface="Calibri" pitchFamily="34" charset="-120"/>
+              </a:rPr>
+              <a:t>CROSS-CUTTING SERVICES</a:t>
+            </a:r>
+            <a:endParaRPr lang="en-US" sz="1250" dirty="0"/>
+          </a:p>
+        </p:txBody>
+      </p:sp>
+      <p:sp>
+        <p:nvSpPr>
+          <p:cNvPr id="86" name="Shape 65"/>
+          <p:cNvSpPr/>
+          <p:nvPr/>
+        </p:nvSpPr>
+        <p:spPr>
+          <a:xfrm>
+            <a:off x="658368" y="5897880"/>
             <a:ext cx="1965960" cy="384048"/>
           </a:xfrm>
           <a:prstGeom prst="roundRect">
             <a:avLst>
-              <a:gd name="adj" fmla="val 14286"/>
+              <a:gd name="adj" fmla="val 11905"/>
             </a:avLst>
           </a:prstGeom>
           <a:solidFill>
-            <a:srgbClr val="F1EFE8"/>
+            <a:srgbClr val="FFFFFF"/>
           </a:solidFill>
-          <a:ln w="12700">
+          <a:ln w="9525">
             <a:solidFill>
-              <a:srgbClr val="888780"/>
+              <a:srgbClr val="E3E1D8"/>
             </a:solidFill>
             <a:prstDash val="solid"/>
           </a:ln>
-          <a:effectLst>
-            <a:outerShdw blurRad="63500" dist="25400" dir="5400000" algn="bl" rotWithShape="0">
-              <a:srgbClr val="000000">
-                <a:alpha val="10000"/>
-              </a:srgbClr>
-            </a:outerShdw>
-          </a:effectLst>
-        </p:spPr>
-      </p:sp>
-      <p:sp>
-        <p:nvSpPr>
-          <p:cNvPr id="58" name="Text 56"/>
-          <p:cNvSpPr/>
-          <p:nvPr/>
-        </p:nvSpPr>
-        <p:spPr>
-          <a:xfrm>
-            <a:off x="877824" y="5815584"/>
-            <a:ext cx="1819656" cy="384048"/>
-          </a:xfrm>
-          <a:prstGeom prst="rect">
-            <a:avLst/>
-          </a:prstGeom>
-          <a:noFill/>
-          <a:ln/>
-        </p:spPr>
-        <p:txBody>
-          <a:bodyPr wrap="square" lIns="25400" tIns="25400" rIns="25400" bIns="25400" rtlCol="0" anchor="ctr"/>
-          <a:lstStyle/>
-          <a:p>
-            <a:pPr marL="0" indent="0" algn="ctr">
+        </p:spPr>
+      </p:sp>
+      <p:pic>
+        <p:nvPicPr>
+          <p:cNvPr id="87" name="Image 19" descr="/home/claude/icons/auth.png"/>
+          <p:cNvPicPr>
+            <a:picLocks noChangeAspect="1"/>
+          </p:cNvPicPr>
+          <p:nvPr/>
+        </p:nvPicPr>
+        <p:blipFill>
+          <a:blip r:embed="rId14"/>
+          <a:stretch>
+            <a:fillRect/>
+          </a:stretch>
+        </p:blipFill>
+        <p:spPr>
+          <a:xfrm>
+            <a:off x="786384" y="5971032"/>
+            <a:ext cx="237744" cy="237744"/>
+          </a:xfrm>
+          <a:prstGeom prst="rect">
+            <a:avLst/>
+          </a:prstGeom>
+        </p:spPr>
+      </p:pic>
+      <p:sp>
+        <p:nvSpPr>
+          <p:cNvPr id="88" name="Text 66"/>
+          <p:cNvSpPr/>
+          <p:nvPr/>
+        </p:nvSpPr>
+        <p:spPr>
+          <a:xfrm>
+            <a:off x="1152144" y="5897880"/>
+            <a:ext cx="1362456" cy="384048"/>
+          </a:xfrm>
+          <a:prstGeom prst="rect">
+            <a:avLst/>
+          </a:prstGeom>
+          <a:noFill/>
+          <a:ln/>
+        </p:spPr>
+        <p:txBody>
+          <a:bodyPr wrap="square" lIns="12700" tIns="12700" rIns="12700" bIns="12700" rtlCol="0" anchor="ctr"/>
+          <a:lstStyle/>
+          <a:p>
+            <a:pPr marL="0" indent="0" algn="l">
               <a:lnSpc>
-                <a:spcPct val="95000"/>
+                <a:spcPct val="97000"/>
               </a:lnSpc>
               <a:buNone/>
             </a:pPr>
             <a:r>
               <a:rPr lang="en-US" sz="1050" b="1" dirty="0">
                 <a:solidFill>
-                  <a:srgbClr val="2C2C2A"/>
+                  <a:srgbClr val="1B1B18"/>
                 </a:solidFill>
                 <a:latin typeface="Calibri" pitchFamily="34" charset="0"/>
                 <a:ea typeface="Calibri" pitchFamily="34" charset="-122"/>
@@ -3202,16 +2937,16 @@
             <a:endParaRPr lang="en-US" sz="1050" dirty="0"/>
           </a:p>
           <a:p>
-            <a:pPr marL="0" indent="0" algn="ctr">
+            <a:pPr marL="0" indent="0" algn="l">
               <a:lnSpc>
-                <a:spcPct val="95000"/>
+                <a:spcPct val="97000"/>
               </a:lnSpc>
               <a:buNone/>
             </a:pPr>
             <a:r>
-              <a:rPr lang="en-US" sz="900" dirty="0">
-                <a:solidFill>
-                  <a:srgbClr val="444441"/>
+              <a:rPr lang="en-US" sz="850" dirty="0">
+                <a:solidFill>
+                  <a:srgbClr val="6B6A64"/>
                 </a:solidFill>
                 <a:latin typeface="Calibri" pitchFamily="34" charset="0"/>
                 <a:ea typeface="Calibri" pitchFamily="34" charset="-122"/>
@@ -3225,69 +2960,86 @@
       </p:sp>
       <p:sp>
         <p:nvSpPr>
-          <p:cNvPr id="59" name="Shape 57"/>
-          <p:cNvSpPr/>
-          <p:nvPr/>
-        </p:nvSpPr>
-        <p:spPr>
-          <a:xfrm>
-            <a:off x="2953512" y="5815584"/>
+          <p:cNvPr id="89" name="Shape 67"/>
+          <p:cNvSpPr/>
+          <p:nvPr/>
+        </p:nvSpPr>
+        <p:spPr>
+          <a:xfrm>
+            <a:off x="2788920" y="5897880"/>
             <a:ext cx="1965960" cy="384048"/>
           </a:xfrm>
           <a:prstGeom prst="roundRect">
             <a:avLst>
-              <a:gd name="adj" fmla="val 14286"/>
+              <a:gd name="adj" fmla="val 11905"/>
             </a:avLst>
           </a:prstGeom>
           <a:solidFill>
-            <a:srgbClr val="F1EFE8"/>
+            <a:srgbClr val="FFFFFF"/>
           </a:solidFill>
-          <a:ln w="12700">
+          <a:ln w="9525">
             <a:solidFill>
-              <a:srgbClr val="888780"/>
+              <a:srgbClr val="E3E1D8"/>
             </a:solidFill>
             <a:prstDash val="solid"/>
           </a:ln>
-          <a:effectLst>
-            <a:outerShdw blurRad="63500" dist="25400" dir="5400000" algn="bl" rotWithShape="0">
-              <a:srgbClr val="000000">
-                <a:alpha val="10000"/>
-              </a:srgbClr>
-            </a:outerShdw>
-          </a:effectLst>
-        </p:spPr>
-      </p:sp>
-      <p:sp>
-        <p:nvSpPr>
-          <p:cNvPr id="60" name="Text 58"/>
-          <p:cNvSpPr/>
-          <p:nvPr/>
-        </p:nvSpPr>
-        <p:spPr>
-          <a:xfrm>
-            <a:off x="3026664" y="5815584"/>
-            <a:ext cx="1819656" cy="384048"/>
-          </a:xfrm>
-          <a:prstGeom prst="rect">
-            <a:avLst/>
-          </a:prstGeom>
-          <a:noFill/>
-          <a:ln/>
-        </p:spPr>
-        <p:txBody>
-          <a:bodyPr wrap="square" lIns="25400" tIns="25400" rIns="25400" bIns="25400" rtlCol="0" anchor="ctr"/>
-          <a:lstStyle/>
-          <a:p>
-            <a:pPr marL="0" indent="0" algn="ctr">
+        </p:spPr>
+      </p:sp>
+      <p:pic>
+        <p:nvPicPr>
+          <p:cNvPr id="90" name="Image 20" descr="/home/claude/icons/access.png"/>
+          <p:cNvPicPr>
+            <a:picLocks noChangeAspect="1"/>
+          </p:cNvPicPr>
+          <p:nvPr/>
+        </p:nvPicPr>
+        <p:blipFill>
+          <a:blip r:embed="rId15"/>
+          <a:stretch>
+            <a:fillRect/>
+          </a:stretch>
+        </p:blipFill>
+        <p:spPr>
+          <a:xfrm>
+            <a:off x="2916936" y="5971032"/>
+            <a:ext cx="237744" cy="237744"/>
+          </a:xfrm>
+          <a:prstGeom prst="rect">
+            <a:avLst/>
+          </a:prstGeom>
+        </p:spPr>
+      </p:pic>
+      <p:sp>
+        <p:nvSpPr>
+          <p:cNvPr id="91" name="Text 68"/>
+          <p:cNvSpPr/>
+          <p:nvPr/>
+        </p:nvSpPr>
+        <p:spPr>
+          <a:xfrm>
+            <a:off x="3282696" y="5897880"/>
+            <a:ext cx="1362456" cy="384048"/>
+          </a:xfrm>
+          <a:prstGeom prst="rect">
+            <a:avLst/>
+          </a:prstGeom>
+          <a:noFill/>
+          <a:ln/>
+        </p:spPr>
+        <p:txBody>
+          <a:bodyPr wrap="square" lIns="12700" tIns="12700" rIns="12700" bIns="12700" rtlCol="0" anchor="ctr"/>
+          <a:lstStyle/>
+          <a:p>
+            <a:pPr marL="0" indent="0" algn="l">
               <a:lnSpc>
-                <a:spcPct val="95000"/>
+                <a:spcPct val="97000"/>
               </a:lnSpc>
               <a:buNone/>
             </a:pPr>
             <a:r>
               <a:rPr lang="en-US" sz="1050" b="1" dirty="0">
                 <a:solidFill>
-                  <a:srgbClr val="2C2C2A"/>
+                  <a:srgbClr val="1B1B18"/>
                 </a:solidFill>
                 <a:latin typeface="Calibri" pitchFamily="34" charset="0"/>
                 <a:ea typeface="Calibri" pitchFamily="34" charset="-122"/>
@@ -3298,16 +3050,16 @@
             <a:endParaRPr lang="en-US" sz="1050" dirty="0"/>
           </a:p>
           <a:p>
-            <a:pPr marL="0" indent="0" algn="ctr">
+            <a:pPr marL="0" indent="0" algn="l">
               <a:lnSpc>
-                <a:spcPct val="95000"/>
+                <a:spcPct val="97000"/>
               </a:lnSpc>
               <a:buNone/>
             </a:pPr>
             <a:r>
-              <a:rPr lang="en-US" sz="900" dirty="0">
-                <a:solidFill>
-                  <a:srgbClr val="444441"/>
+              <a:rPr lang="en-US" sz="850" dirty="0">
+                <a:solidFill>
+                  <a:srgbClr val="6B6A64"/>
                 </a:solidFill>
                 <a:latin typeface="Calibri" pitchFamily="34" charset="0"/>
                 <a:ea typeface="Calibri" pitchFamily="34" charset="-122"/>
@@ -3321,69 +3073,86 @@
       </p:sp>
       <p:sp>
         <p:nvSpPr>
-          <p:cNvPr id="61" name="Shape 59"/>
-          <p:cNvSpPr/>
-          <p:nvPr/>
-        </p:nvSpPr>
-        <p:spPr>
-          <a:xfrm>
-            <a:off x="5102352" y="5815584"/>
+          <p:cNvPr id="92" name="Shape 69"/>
+          <p:cNvSpPr/>
+          <p:nvPr/>
+        </p:nvSpPr>
+        <p:spPr>
+          <a:xfrm>
+            <a:off x="4919472" y="5897880"/>
             <a:ext cx="1965960" cy="384048"/>
           </a:xfrm>
           <a:prstGeom prst="roundRect">
             <a:avLst>
-              <a:gd name="adj" fmla="val 14286"/>
+              <a:gd name="adj" fmla="val 11905"/>
             </a:avLst>
           </a:prstGeom>
           <a:solidFill>
-            <a:srgbClr val="F1EFE8"/>
+            <a:srgbClr val="FFFFFF"/>
           </a:solidFill>
-          <a:ln w="12700">
+          <a:ln w="9525">
             <a:solidFill>
-              <a:srgbClr val="888780"/>
+              <a:srgbClr val="E3E1D8"/>
             </a:solidFill>
             <a:prstDash val="solid"/>
           </a:ln>
-          <a:effectLst>
-            <a:outerShdw blurRad="63500" dist="25400" dir="5400000" algn="bl" rotWithShape="0">
-              <a:srgbClr val="000000">
-                <a:alpha val="10000"/>
-              </a:srgbClr>
-            </a:outerShdw>
-          </a:effectLst>
-        </p:spPr>
-      </p:sp>
-      <p:sp>
-        <p:nvSpPr>
-          <p:cNvPr id="62" name="Text 60"/>
-          <p:cNvSpPr/>
-          <p:nvPr/>
-        </p:nvSpPr>
-        <p:spPr>
-          <a:xfrm>
-            <a:off x="5175504" y="5815584"/>
-            <a:ext cx="1819656" cy="384048"/>
-          </a:xfrm>
-          <a:prstGeom prst="rect">
-            <a:avLst/>
-          </a:prstGeom>
-          <a:noFill/>
-          <a:ln/>
-        </p:spPr>
-        <p:txBody>
-          <a:bodyPr wrap="square" lIns="25400" tIns="25400" rIns="25400" bIns="25400" rtlCol="0" anchor="ctr"/>
-          <a:lstStyle/>
-          <a:p>
-            <a:pPr marL="0" indent="0" algn="ctr">
+        </p:spPr>
+      </p:sp>
+      <p:pic>
+        <p:nvPicPr>
+          <p:cNvPr id="93" name="Image 21" descr="/home/claude/icons/encryption.png"/>
+          <p:cNvPicPr>
+            <a:picLocks noChangeAspect="1"/>
+          </p:cNvPicPr>
+          <p:nvPr/>
+        </p:nvPicPr>
+        <p:blipFill>
+          <a:blip r:embed="rId16"/>
+          <a:stretch>
+            <a:fillRect/>
+          </a:stretch>
+        </p:blipFill>
+        <p:spPr>
+          <a:xfrm>
+            <a:off x="5047488" y="5971032"/>
+            <a:ext cx="237744" cy="237744"/>
+          </a:xfrm>
+          <a:prstGeom prst="rect">
+            <a:avLst/>
+          </a:prstGeom>
+        </p:spPr>
+      </p:pic>
+      <p:sp>
+        <p:nvSpPr>
+          <p:cNvPr id="94" name="Text 70"/>
+          <p:cNvSpPr/>
+          <p:nvPr/>
+        </p:nvSpPr>
+        <p:spPr>
+          <a:xfrm>
+            <a:off x="5413248" y="5897880"/>
+            <a:ext cx="1362456" cy="384048"/>
+          </a:xfrm>
+          <a:prstGeom prst="rect">
+            <a:avLst/>
+          </a:prstGeom>
+          <a:noFill/>
+          <a:ln/>
+        </p:spPr>
+        <p:txBody>
+          <a:bodyPr wrap="square" lIns="12700" tIns="12700" rIns="12700" bIns="12700" rtlCol="0" anchor="ctr"/>
+          <a:lstStyle/>
+          <a:p>
+            <a:pPr marL="0" indent="0" algn="l">
               <a:lnSpc>
-                <a:spcPct val="95000"/>
+                <a:spcPct val="97000"/>
               </a:lnSpc>
               <a:buNone/>
             </a:pPr>
             <a:r>
               <a:rPr lang="en-US" sz="1050" b="1" dirty="0">
                 <a:solidFill>
-                  <a:srgbClr val="2C2C2A"/>
+                  <a:srgbClr val="1B1B18"/>
                 </a:solidFill>
                 <a:latin typeface="Calibri" pitchFamily="34" charset="0"/>
                 <a:ea typeface="Calibri" pitchFamily="34" charset="-122"/>
@@ -3394,16 +3163,16 @@
             <a:endParaRPr lang="en-US" sz="1050" dirty="0"/>
           </a:p>
           <a:p>
-            <a:pPr marL="0" indent="0" algn="ctr">
+            <a:pPr marL="0" indent="0" algn="l">
               <a:lnSpc>
-                <a:spcPct val="95000"/>
+                <a:spcPct val="97000"/>
               </a:lnSpc>
               <a:buNone/>
             </a:pPr>
             <a:r>
-              <a:rPr lang="en-US" sz="900" dirty="0">
-                <a:solidFill>
-                  <a:srgbClr val="444441"/>
+              <a:rPr lang="en-US" sz="850" dirty="0">
+                <a:solidFill>
+                  <a:srgbClr val="6B6A64"/>
                 </a:solidFill>
                 <a:latin typeface="Calibri" pitchFamily="34" charset="0"/>
                 <a:ea typeface="Calibri" pitchFamily="34" charset="-122"/>
@@ -3417,69 +3186,86 @@
       </p:sp>
       <p:sp>
         <p:nvSpPr>
-          <p:cNvPr id="63" name="Shape 61"/>
-          <p:cNvSpPr/>
-          <p:nvPr/>
-        </p:nvSpPr>
-        <p:spPr>
-          <a:xfrm>
-            <a:off x="7251192" y="5815584"/>
+          <p:cNvPr id="95" name="Shape 71"/>
+          <p:cNvSpPr/>
+          <p:nvPr/>
+        </p:nvSpPr>
+        <p:spPr>
+          <a:xfrm>
+            <a:off x="7050024" y="5897880"/>
             <a:ext cx="1965960" cy="384048"/>
           </a:xfrm>
           <a:prstGeom prst="roundRect">
             <a:avLst>
-              <a:gd name="adj" fmla="val 14286"/>
+              <a:gd name="adj" fmla="val 11905"/>
             </a:avLst>
           </a:prstGeom>
           <a:solidFill>
-            <a:srgbClr val="F1EFE8"/>
+            <a:srgbClr val="FFFFFF"/>
           </a:solidFill>
-          <a:ln w="12700">
+          <a:ln w="9525">
             <a:solidFill>
-              <a:srgbClr val="888780"/>
+              <a:srgbClr val="E3E1D8"/>
             </a:solidFill>
             <a:prstDash val="solid"/>
           </a:ln>
-          <a:effectLst>
-            <a:outerShdw blurRad="63500" dist="25400" dir="5400000" algn="bl" rotWithShape="0">
-              <a:srgbClr val="000000">
-                <a:alpha val="10000"/>
-              </a:srgbClr>
-            </a:outerShdw>
-          </a:effectLst>
-        </p:spPr>
-      </p:sp>
-      <p:sp>
-        <p:nvSpPr>
-          <p:cNvPr id="64" name="Text 62"/>
-          <p:cNvSpPr/>
-          <p:nvPr/>
-        </p:nvSpPr>
-        <p:spPr>
-          <a:xfrm>
-            <a:off x="7324344" y="5815584"/>
-            <a:ext cx="1819656" cy="384048"/>
-          </a:xfrm>
-          <a:prstGeom prst="rect">
-            <a:avLst/>
-          </a:prstGeom>
-          <a:noFill/>
-          <a:ln/>
-        </p:spPr>
-        <p:txBody>
-          <a:bodyPr wrap="square" lIns="25400" tIns="25400" rIns="25400" bIns="25400" rtlCol="0" anchor="ctr"/>
-          <a:lstStyle/>
-          <a:p>
-            <a:pPr marL="0" indent="0" algn="ctr">
+        </p:spPr>
+      </p:sp>
+      <p:pic>
+        <p:nvPicPr>
+          <p:cNvPr id="96" name="Image 22" descr="/home/claude/icons/monitoring.png"/>
+          <p:cNvPicPr>
+            <a:picLocks noChangeAspect="1"/>
+          </p:cNvPicPr>
+          <p:nvPr/>
+        </p:nvPicPr>
+        <p:blipFill>
+          <a:blip r:embed="rId17"/>
+          <a:stretch>
+            <a:fillRect/>
+          </a:stretch>
+        </p:blipFill>
+        <p:spPr>
+          <a:xfrm>
+            <a:off x="7178040" y="5971032"/>
+            <a:ext cx="237744" cy="237744"/>
+          </a:xfrm>
+          <a:prstGeom prst="rect">
+            <a:avLst/>
+          </a:prstGeom>
+        </p:spPr>
+      </p:pic>
+      <p:sp>
+        <p:nvSpPr>
+          <p:cNvPr id="97" name="Text 72"/>
+          <p:cNvSpPr/>
+          <p:nvPr/>
+        </p:nvSpPr>
+        <p:spPr>
+          <a:xfrm>
+            <a:off x="7543800" y="5897880"/>
+            <a:ext cx="1362456" cy="384048"/>
+          </a:xfrm>
+          <a:prstGeom prst="rect">
+            <a:avLst/>
+          </a:prstGeom>
+          <a:noFill/>
+          <a:ln/>
+        </p:spPr>
+        <p:txBody>
+          <a:bodyPr wrap="square" lIns="12700" tIns="12700" rIns="12700" bIns="12700" rtlCol="0" anchor="ctr"/>
+          <a:lstStyle/>
+          <a:p>
+            <a:pPr marL="0" indent="0" algn="l">
               <a:lnSpc>
-                <a:spcPct val="95000"/>
+                <a:spcPct val="97000"/>
               </a:lnSpc>
               <a:buNone/>
             </a:pPr>
             <a:r>
               <a:rPr lang="en-US" sz="1050" b="1" dirty="0">
                 <a:solidFill>
-                  <a:srgbClr val="2C2C2A"/>
+                  <a:srgbClr val="1B1B18"/>
                 </a:solidFill>
                 <a:latin typeface="Calibri" pitchFamily="34" charset="0"/>
                 <a:ea typeface="Calibri" pitchFamily="34" charset="-122"/>
@@ -3490,16 +3276,16 @@
             <a:endParaRPr lang="en-US" sz="1050" dirty="0"/>
           </a:p>
           <a:p>
-            <a:pPr marL="0" indent="0" algn="ctr">
+            <a:pPr marL="0" indent="0" algn="l">
               <a:lnSpc>
-                <a:spcPct val="95000"/>
+                <a:spcPct val="97000"/>
               </a:lnSpc>
               <a:buNone/>
             </a:pPr>
             <a:r>
-              <a:rPr lang="en-US" sz="900" dirty="0">
-                <a:solidFill>
-                  <a:srgbClr val="444441"/>
+              <a:rPr lang="en-US" sz="850" dirty="0">
+                <a:solidFill>
+                  <a:srgbClr val="6B6A64"/>
                 </a:solidFill>
                 <a:latin typeface="Calibri" pitchFamily="34" charset="0"/>
                 <a:ea typeface="Calibri" pitchFamily="34" charset="-122"/>
@@ -3513,69 +3299,86 @@
       </p:sp>
       <p:sp>
         <p:nvSpPr>
-          <p:cNvPr id="65" name="Shape 63"/>
-          <p:cNvSpPr/>
-          <p:nvPr/>
-        </p:nvSpPr>
-        <p:spPr>
-          <a:xfrm>
-            <a:off x="9400032" y="5815584"/>
+          <p:cNvPr id="98" name="Shape 73"/>
+          <p:cNvSpPr/>
+          <p:nvPr/>
+        </p:nvSpPr>
+        <p:spPr>
+          <a:xfrm>
+            <a:off x="9180576" y="5897880"/>
             <a:ext cx="1965960" cy="384048"/>
           </a:xfrm>
           <a:prstGeom prst="roundRect">
             <a:avLst>
-              <a:gd name="adj" fmla="val 14286"/>
+              <a:gd name="adj" fmla="val 11905"/>
             </a:avLst>
           </a:prstGeom>
           <a:solidFill>
-            <a:srgbClr val="F1EFE8"/>
+            <a:srgbClr val="FFFFFF"/>
           </a:solidFill>
-          <a:ln w="12700">
+          <a:ln w="9525">
             <a:solidFill>
-              <a:srgbClr val="888780"/>
+              <a:srgbClr val="E3E1D8"/>
             </a:solidFill>
             <a:prstDash val="solid"/>
           </a:ln>
-          <a:effectLst>
-            <a:outerShdw blurRad="63500" dist="25400" dir="5400000" algn="bl" rotWithShape="0">
-              <a:srgbClr val="000000">
-                <a:alpha val="10000"/>
-              </a:srgbClr>
-            </a:outerShdw>
-          </a:effectLst>
-        </p:spPr>
-      </p:sp>
-      <p:sp>
-        <p:nvSpPr>
-          <p:cNvPr id="66" name="Text 64"/>
-          <p:cNvSpPr/>
-          <p:nvPr/>
-        </p:nvSpPr>
-        <p:spPr>
-          <a:xfrm>
-            <a:off x="9473184" y="5815584"/>
-            <a:ext cx="1819656" cy="384048"/>
-          </a:xfrm>
-          <a:prstGeom prst="rect">
-            <a:avLst/>
-          </a:prstGeom>
-          <a:noFill/>
-          <a:ln/>
-        </p:spPr>
-        <p:txBody>
-          <a:bodyPr wrap="square" lIns="25400" tIns="25400" rIns="25400" bIns="25400" rtlCol="0" anchor="ctr"/>
-          <a:lstStyle/>
-          <a:p>
-            <a:pPr marL="0" indent="0" algn="ctr">
+        </p:spPr>
+      </p:sp>
+      <p:pic>
+        <p:nvPicPr>
+          <p:cNvPr id="99" name="Image 23" descr="/home/claude/icons/audit.png"/>
+          <p:cNvPicPr>
+            <a:picLocks noChangeAspect="1"/>
+          </p:cNvPicPr>
+          <p:nvPr/>
+        </p:nvPicPr>
+        <p:blipFill>
+          <a:blip r:embed="rId18"/>
+          <a:stretch>
+            <a:fillRect/>
+          </a:stretch>
+        </p:blipFill>
+        <p:spPr>
+          <a:xfrm>
+            <a:off x="9308592" y="5971032"/>
+            <a:ext cx="237744" cy="237744"/>
+          </a:xfrm>
+          <a:prstGeom prst="rect">
+            <a:avLst/>
+          </a:prstGeom>
+        </p:spPr>
+      </p:pic>
+      <p:sp>
+        <p:nvSpPr>
+          <p:cNvPr id="100" name="Text 74"/>
+          <p:cNvSpPr/>
+          <p:nvPr/>
+        </p:nvSpPr>
+        <p:spPr>
+          <a:xfrm>
+            <a:off x="9674352" y="5897880"/>
+            <a:ext cx="1362456" cy="384048"/>
+          </a:xfrm>
+          <a:prstGeom prst="rect">
+            <a:avLst/>
+          </a:prstGeom>
+          <a:noFill/>
+          <a:ln/>
+        </p:spPr>
+        <p:txBody>
+          <a:bodyPr wrap="square" lIns="12700" tIns="12700" rIns="12700" bIns="12700" rtlCol="0" anchor="ctr"/>
+          <a:lstStyle/>
+          <a:p>
+            <a:pPr marL="0" indent="0" algn="l">
               <a:lnSpc>
-                <a:spcPct val="95000"/>
+                <a:spcPct val="97000"/>
               </a:lnSpc>
               <a:buNone/>
             </a:pPr>
             <a:r>
               <a:rPr lang="en-US" sz="1050" b="1" dirty="0">
                 <a:solidFill>
-                  <a:srgbClr val="2C2C2A"/>
+                  <a:srgbClr val="1B1B18"/>
                 </a:solidFill>
                 <a:latin typeface="Calibri" pitchFamily="34" charset="0"/>
                 <a:ea typeface="Calibri" pitchFamily="34" charset="-122"/>
@@ -3586,16 +3389,16 @@
             <a:endParaRPr lang="en-US" sz="1050" dirty="0"/>
           </a:p>
           <a:p>
-            <a:pPr marL="0" indent="0" algn="ctr">
+            <a:pPr marL="0" indent="0" algn="l">
               <a:lnSpc>
-                <a:spcPct val="95000"/>
+                <a:spcPct val="97000"/>
               </a:lnSpc>
               <a:buNone/>
             </a:pPr>
             <a:r>
-              <a:rPr lang="en-US" sz="900" dirty="0">
-                <a:solidFill>
-                  <a:srgbClr val="444441"/>
+              <a:rPr lang="en-US" sz="850" dirty="0">
+                <a:solidFill>
+                  <a:srgbClr val="6B6A64"/>
                 </a:solidFill>
                 <a:latin typeface="Calibri" pitchFamily="34" charset="0"/>
                 <a:ea typeface="Calibri" pitchFamily="34" charset="-122"/>
@@ -3607,55 +3410,950 @@
           </a:p>
         </p:txBody>
       </p:sp>
-      <p:sp>
-        <p:nvSpPr>
-          <p:cNvPr id="67" name="Text 65"/>
-          <p:cNvSpPr/>
-          <p:nvPr/>
-        </p:nvSpPr>
-        <p:spPr>
-          <a:xfrm>
-            <a:off x="457200" y="6355080"/>
-            <a:ext cx="11247120" cy="320040"/>
-          </a:xfrm>
-          <a:prstGeom prst="rect">
-            <a:avLst/>
-          </a:prstGeom>
-          <a:noFill/>
-          <a:ln/>
-        </p:spPr>
-        <p:txBody>
-          <a:bodyPr wrap="square" lIns="0" tIns="0" rIns="0" bIns="0" rtlCol="0" anchor="ctr"/>
-          <a:lstStyle/>
-          <a:p>
-            <a:pPr marL="0" indent="0" algn="l">
-              <a:buNone/>
-            </a:pPr>
-            <a:r>
-              <a:rPr lang="en-US" sz="850" i="1" dirty="0">
-                <a:solidFill>
-                  <a:srgbClr val="8A897F"/>
-                </a:solidFill>
-                <a:latin typeface="Calibri" pitchFamily="34" charset="0"/>
-                <a:ea typeface="Calibri" pitchFamily="34" charset="-122"/>
-                <a:cs typeface="Calibri" pitchFamily="34" charset="-120"/>
-              </a:rPr>
-              <a:t>Metadata &amp; ontology — AQF level, Bloom's level, DigComp mapping, output templates and learner state — live in AWS Glue Data Catalog + Amazon DynamoDB/Aurora, read by the input assembler so competency data is never guessed.</a:t>
-            </a:r>
-            <a:endParaRPr lang="en-US" sz="850" dirty="0"/>
-          </a:p>
-        </p:txBody>
-      </p:sp>
+      <p:grpSp>
+        <p:nvGrpSpPr>
+          <p:cNvPr id="103" name="Group 102"/>
+          <p:cNvGrpSpPr/>
+          <p:nvPr/>
+        </p:nvGrpSpPr>
+        <p:grpSpPr>
+          <a:xfrm>
+            <a:off x="459835" y="893716"/>
+            <a:ext cx="11247120" cy="1005840"/>
+            <a:chOff x="457200" y="4434840"/>
+            <a:chExt cx="11247120" cy="1005840"/>
+          </a:xfrm>
+        </p:grpSpPr>
+        <p:sp>
+          <p:nvSpPr>
+            <p:cNvPr id="104" name="Shape 42"/>
+            <p:cNvSpPr/>
+            <p:nvPr/>
+          </p:nvSpPr>
+          <p:spPr>
+            <a:xfrm>
+              <a:off x="457200" y="4434840"/>
+              <a:ext cx="11247120" cy="1005840"/>
+            </a:xfrm>
+            <a:prstGeom prst="roundRect">
+              <a:avLst>
+                <a:gd name="adj" fmla="val 6364"/>
+              </a:avLst>
+            </a:prstGeom>
+            <a:solidFill>
+              <a:srgbClr val="FAFAF8"/>
+            </a:solidFill>
+            <a:ln w="12700">
+              <a:solidFill>
+                <a:srgbClr val="DEDCD3"/>
+              </a:solidFill>
+              <a:prstDash val="dash"/>
+            </a:ln>
+          </p:spPr>
+        </p:sp>
+        <p:sp>
+          <p:nvSpPr>
+            <p:cNvPr id="105" name="Text 43"/>
+            <p:cNvSpPr/>
+            <p:nvPr/>
+          </p:nvSpPr>
+          <p:spPr>
+            <a:xfrm>
+              <a:off x="621792" y="4489704"/>
+              <a:ext cx="10917936" cy="219456"/>
+            </a:xfrm>
+            <a:prstGeom prst="rect">
+              <a:avLst/>
+            </a:prstGeom>
+            <a:noFill/>
+            <a:ln/>
+          </p:spPr>
+          <p:txBody>
+            <a:bodyPr wrap="square" lIns="0" tIns="0" rIns="0" bIns="0" rtlCol="0" anchor="ctr"/>
+            <a:lstStyle/>
+            <a:p>
+              <a:pPr marL="0" indent="0" algn="l">
+                <a:buNone/>
+              </a:pPr>
+              <a:r>
+                <a:rPr lang="en-US" sz="1250" b="1" dirty="0">
+                  <a:solidFill>
+                    <a:srgbClr val="2F4858"/>
+                  </a:solidFill>
+                  <a:latin typeface="Calibri" pitchFamily="34" charset="0"/>
+                  <a:ea typeface="Calibri" pitchFamily="34" charset="-122"/>
+                  <a:cs typeface="Calibri" pitchFamily="34" charset="-120"/>
+                </a:rPr>
+                <a:t>KNOWLEDGE INGESTION PIPELINE  ·  builds the vector DB</a:t>
+              </a:r>
+              <a:endParaRPr lang="en-US" sz="1250" dirty="0"/>
+            </a:p>
+          </p:txBody>
+        </p:sp>
+        <p:sp>
+          <p:nvSpPr>
+            <p:cNvPr id="106" name="Shape 44"/>
+            <p:cNvSpPr/>
+            <p:nvPr/>
+          </p:nvSpPr>
+          <p:spPr>
+            <a:xfrm>
+              <a:off x="594360" y="4800600"/>
+              <a:ext cx="1600200" cy="512064"/>
+            </a:xfrm>
+            <a:prstGeom prst="roundRect">
+              <a:avLst>
+                <a:gd name="adj" fmla="val 8929"/>
+              </a:avLst>
+            </a:prstGeom>
+            <a:solidFill>
+              <a:srgbClr val="FFFFFF"/>
+            </a:solidFill>
+            <a:ln w="9525">
+              <a:solidFill>
+                <a:srgbClr val="E3E1D8"/>
+              </a:solidFill>
+              <a:prstDash val="solid"/>
+            </a:ln>
+          </p:spPr>
+        </p:sp>
+        <p:pic>
+          <p:nvPicPr>
+            <p:cNvPr id="107" name="Image 11" descr="/home/claude/icons/doc_icon.png"/>
+            <p:cNvPicPr>
+              <a:picLocks noChangeAspect="1"/>
+            </p:cNvPicPr>
+            <p:nvPr/>
+          </p:nvPicPr>
+          <p:blipFill>
+            <a:blip r:embed="rId11"/>
+            <a:stretch>
+              <a:fillRect/>
+            </a:stretch>
+          </p:blipFill>
+          <p:spPr>
+            <a:xfrm>
+              <a:off x="722376" y="4864608"/>
+              <a:ext cx="182880" cy="182880"/>
+            </a:xfrm>
+            <a:prstGeom prst="rect">
+              <a:avLst/>
+            </a:prstGeom>
+          </p:spPr>
+        </p:pic>
+        <p:pic>
+          <p:nvPicPr>
+            <p:cNvPr id="108" name="Image 12" descr="/home/claude/icons/pdf_icon.png"/>
+            <p:cNvPicPr>
+              <a:picLocks noChangeAspect="1"/>
+            </p:cNvPicPr>
+            <p:nvPr/>
+          </p:nvPicPr>
+          <p:blipFill>
+            <a:blip r:embed="rId19"/>
+            <a:stretch>
+              <a:fillRect/>
+            </a:stretch>
+          </p:blipFill>
+          <p:spPr>
+            <a:xfrm>
+              <a:off x="941832" y="4864608"/>
+              <a:ext cx="182880" cy="182880"/>
+            </a:xfrm>
+            <a:prstGeom prst="rect">
+              <a:avLst/>
+            </a:prstGeom>
+          </p:spPr>
+        </p:pic>
+        <p:pic>
+          <p:nvPicPr>
+            <p:cNvPr id="109" name="Image 13" descr="/home/claude/icons/url_icon.png"/>
+            <p:cNvPicPr>
+              <a:picLocks noChangeAspect="1"/>
+            </p:cNvPicPr>
+            <p:nvPr/>
+          </p:nvPicPr>
+          <p:blipFill>
+            <a:blip r:embed="rId20"/>
+            <a:stretch>
+              <a:fillRect/>
+            </a:stretch>
+          </p:blipFill>
+          <p:spPr>
+            <a:xfrm>
+              <a:off x="1161288" y="4864608"/>
+              <a:ext cx="182880" cy="182880"/>
+            </a:xfrm>
+            <a:prstGeom prst="rect">
+              <a:avLst/>
+            </a:prstGeom>
+          </p:spPr>
+        </p:pic>
+        <p:sp>
+          <p:nvSpPr>
+            <p:cNvPr id="110" name="Text 45"/>
+            <p:cNvSpPr/>
+            <p:nvPr/>
+          </p:nvSpPr>
+          <p:spPr>
+            <a:xfrm>
+              <a:off x="685800" y="5047488"/>
+              <a:ext cx="1417320" cy="265176"/>
+            </a:xfrm>
+            <a:prstGeom prst="rect">
+              <a:avLst/>
+            </a:prstGeom>
+            <a:noFill/>
+            <a:ln/>
+          </p:spPr>
+          <p:txBody>
+            <a:bodyPr wrap="square" lIns="12700" tIns="12700" rIns="12700" bIns="12700" rtlCol="0" anchor="t"/>
+            <a:lstStyle/>
+            <a:p>
+              <a:pPr marL="0" indent="0" algn="l">
+                <a:lnSpc>
+                  <a:spcPct val="95000"/>
+                </a:lnSpc>
+                <a:buNone/>
+              </a:pPr>
+              <a:r>
+                <a:rPr lang="en-US" sz="1050" b="1" dirty="0">
+                  <a:solidFill>
+                    <a:srgbClr val="1B1B18"/>
+                  </a:solidFill>
+                  <a:latin typeface="Calibri" pitchFamily="34" charset="0"/>
+                  <a:ea typeface="Calibri" pitchFamily="34" charset="-122"/>
+                  <a:cs typeface="Calibri" pitchFamily="34" charset="-120"/>
+                </a:rPr>
+                <a:t>Docs, PDFs, URLs</a:t>
+              </a:r>
+              <a:endParaRPr lang="en-US" sz="1050" dirty="0"/>
+            </a:p>
+            <a:p>
+              <a:pPr marL="0" indent="0" algn="l">
+                <a:lnSpc>
+                  <a:spcPct val="95000"/>
+                </a:lnSpc>
+                <a:buNone/>
+              </a:pPr>
+              <a:r>
+                <a:rPr lang="en-US" sz="850" dirty="0">
+                  <a:solidFill>
+                    <a:srgbClr val="6B6A64"/>
+                  </a:solidFill>
+                  <a:latin typeface="Calibri" pitchFamily="34" charset="0"/>
+                  <a:ea typeface="Calibri" pitchFamily="34" charset="-122"/>
+                  <a:cs typeface="Calibri" pitchFamily="34" charset="-120"/>
+                </a:rPr>
+                <a:t>Provided by trainer</a:t>
+              </a:r>
+              <a:endParaRPr lang="en-US" sz="1050" dirty="0"/>
+            </a:p>
+          </p:txBody>
+        </p:sp>
+        <p:sp>
+          <p:nvSpPr>
+            <p:cNvPr id="111" name="Shape 46"/>
+            <p:cNvSpPr/>
+            <p:nvPr/>
+          </p:nvSpPr>
+          <p:spPr>
+            <a:xfrm>
+              <a:off x="2331720" y="4800600"/>
+              <a:ext cx="1600200" cy="512064"/>
+            </a:xfrm>
+            <a:prstGeom prst="roundRect">
+              <a:avLst>
+                <a:gd name="adj" fmla="val 8929"/>
+              </a:avLst>
+            </a:prstGeom>
+            <a:solidFill>
+              <a:srgbClr val="FFFFFF"/>
+            </a:solidFill>
+            <a:ln w="9525">
+              <a:solidFill>
+                <a:srgbClr val="E3E1D8"/>
+              </a:solidFill>
+              <a:prstDash val="solid"/>
+            </a:ln>
+          </p:spPr>
+        </p:sp>
+        <p:pic>
+          <p:nvPicPr>
+            <p:cNvPr id="112" name="Image 14" descr="/home/claude/icons/s3_bucket.png"/>
+            <p:cNvPicPr>
+              <a:picLocks noChangeAspect="1"/>
+            </p:cNvPicPr>
+            <p:nvPr/>
+          </p:nvPicPr>
+          <p:blipFill>
+            <a:blip r:embed="rId21"/>
+            <a:stretch>
+              <a:fillRect/>
+            </a:stretch>
+          </p:blipFill>
+          <p:spPr>
+            <a:xfrm>
+              <a:off x="2459736" y="4901184"/>
+              <a:ext cx="310896" cy="310896"/>
+            </a:xfrm>
+            <a:prstGeom prst="rect">
+              <a:avLst/>
+            </a:prstGeom>
+          </p:spPr>
+        </p:pic>
+        <p:sp>
+          <p:nvSpPr>
+            <p:cNvPr id="113" name="Text 47"/>
+            <p:cNvSpPr/>
+            <p:nvPr/>
+          </p:nvSpPr>
+          <p:spPr>
+            <a:xfrm>
+              <a:off x="2898648" y="4800600"/>
+              <a:ext cx="923544" cy="512064"/>
+            </a:xfrm>
+            <a:prstGeom prst="rect">
+              <a:avLst/>
+            </a:prstGeom>
+            <a:noFill/>
+            <a:ln/>
+          </p:spPr>
+          <p:txBody>
+            <a:bodyPr wrap="square" lIns="12700" tIns="12700" rIns="12700" bIns="12700" rtlCol="0" anchor="ctr"/>
+            <a:lstStyle/>
+            <a:p>
+              <a:pPr marL="0" indent="0" algn="l">
+                <a:lnSpc>
+                  <a:spcPct val="97000"/>
+                </a:lnSpc>
+                <a:buNone/>
+              </a:pPr>
+              <a:r>
+                <a:rPr lang="en-US" sz="1100" b="1" dirty="0">
+                  <a:solidFill>
+                    <a:srgbClr val="1B1B18"/>
+                  </a:solidFill>
+                  <a:latin typeface="Calibri" pitchFamily="34" charset="0"/>
+                  <a:ea typeface="Calibri" pitchFamily="34" charset="-122"/>
+                  <a:cs typeface="Calibri" pitchFamily="34" charset="-120"/>
+                </a:rPr>
+                <a:t>Amazon S3</a:t>
+              </a:r>
+              <a:endParaRPr lang="en-US" sz="1100" dirty="0"/>
+            </a:p>
+            <a:p>
+              <a:pPr marL="0" indent="0" algn="l">
+                <a:lnSpc>
+                  <a:spcPct val="97000"/>
+                </a:lnSpc>
+                <a:buNone/>
+              </a:pPr>
+              <a:r>
+                <a:rPr lang="en-US" sz="850" dirty="0">
+                  <a:solidFill>
+                    <a:srgbClr val="6B6A64"/>
+                  </a:solidFill>
+                  <a:latin typeface="Calibri" pitchFamily="34" charset="0"/>
+                  <a:ea typeface="Calibri" pitchFamily="34" charset="-122"/>
+                  <a:cs typeface="Calibri" pitchFamily="34" charset="-120"/>
+                </a:rPr>
+                <a:t>Landing zone</a:t>
+              </a:r>
+              <a:endParaRPr lang="en-US" sz="1100" dirty="0"/>
+            </a:p>
+          </p:txBody>
+        </p:sp>
+        <p:sp>
+          <p:nvSpPr>
+            <p:cNvPr id="114" name="Shape 48"/>
+            <p:cNvSpPr/>
+            <p:nvPr/>
+          </p:nvSpPr>
+          <p:spPr>
+            <a:xfrm>
+              <a:off x="4069080" y="4800600"/>
+              <a:ext cx="1600200" cy="512064"/>
+            </a:xfrm>
+            <a:prstGeom prst="roundRect">
+              <a:avLst>
+                <a:gd name="adj" fmla="val 8929"/>
+              </a:avLst>
+            </a:prstGeom>
+            <a:solidFill>
+              <a:srgbClr val="FFFFFF"/>
+            </a:solidFill>
+            <a:ln w="9525">
+              <a:solidFill>
+                <a:srgbClr val="E3E1D8"/>
+              </a:solidFill>
+              <a:prstDash val="solid"/>
+            </a:ln>
+          </p:spPr>
+        </p:sp>
+        <p:pic>
+          <p:nvPicPr>
+            <p:cNvPr id="115" name="Image 15" descr="/home/claude/icons/extract.png"/>
+            <p:cNvPicPr>
+              <a:picLocks noChangeAspect="1"/>
+            </p:cNvPicPr>
+            <p:nvPr/>
+          </p:nvPicPr>
+          <p:blipFill>
+            <a:blip r:embed="rId22"/>
+            <a:stretch>
+              <a:fillRect/>
+            </a:stretch>
+          </p:blipFill>
+          <p:spPr>
+            <a:xfrm>
+              <a:off x="4197096" y="4901184"/>
+              <a:ext cx="310896" cy="310896"/>
+            </a:xfrm>
+            <a:prstGeom prst="rect">
+              <a:avLst/>
+            </a:prstGeom>
+          </p:spPr>
+        </p:pic>
+        <p:sp>
+          <p:nvSpPr>
+            <p:cNvPr id="116" name="Text 49"/>
+            <p:cNvSpPr/>
+            <p:nvPr/>
+          </p:nvSpPr>
+          <p:spPr>
+            <a:xfrm>
+              <a:off x="4636008" y="4800600"/>
+              <a:ext cx="923544" cy="512064"/>
+            </a:xfrm>
+            <a:prstGeom prst="rect">
+              <a:avLst/>
+            </a:prstGeom>
+            <a:noFill/>
+            <a:ln/>
+          </p:spPr>
+          <p:txBody>
+            <a:bodyPr wrap="square" lIns="12700" tIns="12700" rIns="12700" bIns="12700" rtlCol="0" anchor="ctr"/>
+            <a:lstStyle/>
+            <a:p>
+              <a:pPr marL="0" indent="0" algn="l">
+                <a:lnSpc>
+                  <a:spcPct val="97000"/>
+                </a:lnSpc>
+                <a:buNone/>
+              </a:pPr>
+              <a:r>
+                <a:rPr lang="en-US" sz="1100" b="1" dirty="0">
+                  <a:solidFill>
+                    <a:srgbClr val="1B1B18"/>
+                  </a:solidFill>
+                  <a:latin typeface="Calibri" pitchFamily="34" charset="0"/>
+                  <a:ea typeface="Calibri" pitchFamily="34" charset="-122"/>
+                  <a:cs typeface="Calibri" pitchFamily="34" charset="-120"/>
+                </a:rPr>
+                <a:t>Extract</a:t>
+              </a:r>
+              <a:endParaRPr lang="en-US" sz="1100" dirty="0"/>
+            </a:p>
+            <a:p>
+              <a:pPr marL="0" indent="0" algn="l">
+                <a:lnSpc>
+                  <a:spcPct val="97000"/>
+                </a:lnSpc>
+                <a:buNone/>
+              </a:pPr>
+              <a:r>
+                <a:rPr lang="en-US" sz="850" dirty="0">
+                  <a:solidFill>
+                    <a:srgbClr val="6B6A64"/>
+                  </a:solidFill>
+                  <a:latin typeface="Calibri" pitchFamily="34" charset="0"/>
+                  <a:ea typeface="Calibri" pitchFamily="34" charset="-122"/>
+                  <a:cs typeface="Calibri" pitchFamily="34" charset="-120"/>
+                </a:rPr>
+                <a:t>Textract</a:t>
+              </a:r>
+              <a:endParaRPr lang="en-US" sz="1100" dirty="0"/>
+            </a:p>
+          </p:txBody>
+        </p:sp>
+        <p:sp>
+          <p:nvSpPr>
+            <p:cNvPr id="117" name="Shape 50"/>
+            <p:cNvSpPr/>
+            <p:nvPr/>
+          </p:nvSpPr>
+          <p:spPr>
+            <a:xfrm>
+              <a:off x="5806440" y="4800600"/>
+              <a:ext cx="1600200" cy="512064"/>
+            </a:xfrm>
+            <a:prstGeom prst="roundRect">
+              <a:avLst>
+                <a:gd name="adj" fmla="val 8929"/>
+              </a:avLst>
+            </a:prstGeom>
+            <a:solidFill>
+              <a:srgbClr val="FFFFFF"/>
+            </a:solidFill>
+            <a:ln w="9525">
+              <a:solidFill>
+                <a:srgbClr val="E3E1D8"/>
+              </a:solidFill>
+              <a:prstDash val="solid"/>
+            </a:ln>
+          </p:spPr>
+        </p:sp>
+        <p:pic>
+          <p:nvPicPr>
+            <p:cNvPr id="118" name="Image 16" descr="/home/claude/icons/chunk.png"/>
+            <p:cNvPicPr>
+              <a:picLocks noChangeAspect="1"/>
+            </p:cNvPicPr>
+            <p:nvPr/>
+          </p:nvPicPr>
+          <p:blipFill>
+            <a:blip r:embed="rId23"/>
+            <a:stretch>
+              <a:fillRect/>
+            </a:stretch>
+          </p:blipFill>
+          <p:spPr>
+            <a:xfrm>
+              <a:off x="5934456" y="4901184"/>
+              <a:ext cx="310896" cy="310896"/>
+            </a:xfrm>
+            <a:prstGeom prst="rect">
+              <a:avLst/>
+            </a:prstGeom>
+          </p:spPr>
+        </p:pic>
+        <p:sp>
+          <p:nvSpPr>
+            <p:cNvPr id="119" name="Text 51"/>
+            <p:cNvSpPr/>
+            <p:nvPr/>
+          </p:nvSpPr>
+          <p:spPr>
+            <a:xfrm>
+              <a:off x="6373368" y="4800600"/>
+              <a:ext cx="923544" cy="512064"/>
+            </a:xfrm>
+            <a:prstGeom prst="rect">
+              <a:avLst/>
+            </a:prstGeom>
+            <a:noFill/>
+            <a:ln/>
+          </p:spPr>
+          <p:txBody>
+            <a:bodyPr wrap="square" lIns="12700" tIns="12700" rIns="12700" bIns="12700" rtlCol="0" anchor="ctr"/>
+            <a:lstStyle/>
+            <a:p>
+              <a:pPr marL="0" indent="0" algn="l">
+                <a:lnSpc>
+                  <a:spcPct val="97000"/>
+                </a:lnSpc>
+                <a:buNone/>
+              </a:pPr>
+              <a:r>
+                <a:rPr lang="en-US" sz="1100" b="1" dirty="0">
+                  <a:solidFill>
+                    <a:srgbClr val="1B1B18"/>
+                  </a:solidFill>
+                  <a:latin typeface="Calibri" pitchFamily="34" charset="0"/>
+                  <a:ea typeface="Calibri" pitchFamily="34" charset="-122"/>
+                  <a:cs typeface="Calibri" pitchFamily="34" charset="-120"/>
+                </a:rPr>
+                <a:t>Chunk</a:t>
+              </a:r>
+              <a:endParaRPr lang="en-US" sz="1100" dirty="0"/>
+            </a:p>
+            <a:p>
+              <a:pPr marL="0" indent="0" algn="l">
+                <a:lnSpc>
+                  <a:spcPct val="97000"/>
+                </a:lnSpc>
+                <a:buNone/>
+              </a:pPr>
+              <a:r>
+                <a:rPr lang="en-US" sz="850" dirty="0">
+                  <a:solidFill>
+                    <a:srgbClr val="6B6A64"/>
+                  </a:solidFill>
+                  <a:latin typeface="Calibri" pitchFamily="34" charset="0"/>
+                  <a:ea typeface="Calibri" pitchFamily="34" charset="-122"/>
+                  <a:cs typeface="Calibri" pitchFamily="34" charset="-120"/>
+                </a:rPr>
+                <a:t>AWS Lambda</a:t>
+              </a:r>
+              <a:endParaRPr lang="en-US" sz="1100" dirty="0"/>
+            </a:p>
+          </p:txBody>
+        </p:sp>
+        <p:sp>
+          <p:nvSpPr>
+            <p:cNvPr id="120" name="Shape 52"/>
+            <p:cNvSpPr/>
+            <p:nvPr/>
+          </p:nvSpPr>
+          <p:spPr>
+            <a:xfrm>
+              <a:off x="7543800" y="4800600"/>
+              <a:ext cx="1600200" cy="512064"/>
+            </a:xfrm>
+            <a:prstGeom prst="roundRect">
+              <a:avLst>
+                <a:gd name="adj" fmla="val 8929"/>
+              </a:avLst>
+            </a:prstGeom>
+            <a:solidFill>
+              <a:srgbClr val="FFFFFF"/>
+            </a:solidFill>
+            <a:ln w="9525">
+              <a:solidFill>
+                <a:srgbClr val="E3E1D8"/>
+              </a:solidFill>
+              <a:prstDash val="solid"/>
+            </a:ln>
+          </p:spPr>
+        </p:sp>
+        <p:pic>
+          <p:nvPicPr>
+            <p:cNvPr id="121" name="Image 17" descr="/home/claude/icons/embed.png"/>
+            <p:cNvPicPr>
+              <a:picLocks noChangeAspect="1"/>
+            </p:cNvPicPr>
+            <p:nvPr/>
+          </p:nvPicPr>
+          <p:blipFill>
+            <a:blip r:embed="rId24"/>
+            <a:stretch>
+              <a:fillRect/>
+            </a:stretch>
+          </p:blipFill>
+          <p:spPr>
+            <a:xfrm>
+              <a:off x="7671816" y="4901184"/>
+              <a:ext cx="310896" cy="310896"/>
+            </a:xfrm>
+            <a:prstGeom prst="rect">
+              <a:avLst/>
+            </a:prstGeom>
+          </p:spPr>
+        </p:pic>
+        <p:sp>
+          <p:nvSpPr>
+            <p:cNvPr id="122" name="Text 53"/>
+            <p:cNvSpPr/>
+            <p:nvPr/>
+          </p:nvSpPr>
+          <p:spPr>
+            <a:xfrm>
+              <a:off x="8110728" y="4800600"/>
+              <a:ext cx="923544" cy="512064"/>
+            </a:xfrm>
+            <a:prstGeom prst="rect">
+              <a:avLst/>
+            </a:prstGeom>
+            <a:noFill/>
+            <a:ln/>
+          </p:spPr>
+          <p:txBody>
+            <a:bodyPr wrap="square" lIns="12700" tIns="12700" rIns="12700" bIns="12700" rtlCol="0" anchor="ctr"/>
+            <a:lstStyle/>
+            <a:p>
+              <a:pPr marL="0" indent="0" algn="l">
+                <a:lnSpc>
+                  <a:spcPct val="97000"/>
+                </a:lnSpc>
+                <a:buNone/>
+              </a:pPr>
+              <a:r>
+                <a:rPr lang="en-US" sz="1100" b="1" dirty="0">
+                  <a:solidFill>
+                    <a:srgbClr val="1B1B18"/>
+                  </a:solidFill>
+                  <a:latin typeface="Calibri" pitchFamily="34" charset="0"/>
+                  <a:ea typeface="Calibri" pitchFamily="34" charset="-122"/>
+                  <a:cs typeface="Calibri" pitchFamily="34" charset="-120"/>
+                </a:rPr>
+                <a:t>Embed</a:t>
+              </a:r>
+              <a:endParaRPr lang="en-US" sz="1100" dirty="0"/>
+            </a:p>
+            <a:p>
+              <a:pPr marL="0" indent="0" algn="l">
+                <a:lnSpc>
+                  <a:spcPct val="97000"/>
+                </a:lnSpc>
+                <a:buNone/>
+              </a:pPr>
+              <a:r>
+                <a:rPr lang="en-US" sz="850" dirty="0">
+                  <a:solidFill>
+                    <a:srgbClr val="6B6A64"/>
+                  </a:solidFill>
+                  <a:latin typeface="Calibri" pitchFamily="34" charset="0"/>
+                  <a:ea typeface="Calibri" pitchFamily="34" charset="-122"/>
+                  <a:cs typeface="Calibri" pitchFamily="34" charset="-120"/>
+                </a:rPr>
+                <a:t>Titan (Bedrock)</a:t>
+              </a:r>
+              <a:endParaRPr lang="en-US" sz="1100" dirty="0"/>
+            </a:p>
+          </p:txBody>
+        </p:sp>
+        <p:sp>
+          <p:nvSpPr>
+            <p:cNvPr id="123" name="Shape 54"/>
+            <p:cNvSpPr/>
+            <p:nvPr/>
+          </p:nvSpPr>
+          <p:spPr>
+            <a:xfrm>
+              <a:off x="9281160" y="4800600"/>
+              <a:ext cx="1600200" cy="512064"/>
+            </a:xfrm>
+            <a:prstGeom prst="roundRect">
+              <a:avLst>
+                <a:gd name="adj" fmla="val 8929"/>
+              </a:avLst>
+            </a:prstGeom>
+            <a:solidFill>
+              <a:srgbClr val="FFFFFF"/>
+            </a:solidFill>
+            <a:ln w="9525">
+              <a:solidFill>
+                <a:srgbClr val="E3E1D8"/>
+              </a:solidFill>
+              <a:prstDash val="solid"/>
+            </a:ln>
+          </p:spPr>
+        </p:sp>
+        <p:pic>
+          <p:nvPicPr>
+            <p:cNvPr id="124" name="Image 18" descr="/home/claude/icons/vector_db.png"/>
+            <p:cNvPicPr>
+              <a:picLocks noChangeAspect="1"/>
+            </p:cNvPicPr>
+            <p:nvPr/>
+          </p:nvPicPr>
+          <p:blipFill>
+            <a:blip r:embed="rId25"/>
+            <a:stretch>
+              <a:fillRect/>
+            </a:stretch>
+          </p:blipFill>
+          <p:spPr>
+            <a:xfrm>
+              <a:off x="9409176" y="4901184"/>
+              <a:ext cx="310896" cy="310896"/>
+            </a:xfrm>
+            <a:prstGeom prst="rect">
+              <a:avLst/>
+            </a:prstGeom>
+          </p:spPr>
+        </p:pic>
+        <p:sp>
+          <p:nvSpPr>
+            <p:cNvPr id="125" name="Text 55"/>
+            <p:cNvSpPr/>
+            <p:nvPr/>
+          </p:nvSpPr>
+          <p:spPr>
+            <a:xfrm>
+              <a:off x="9848088" y="4800600"/>
+              <a:ext cx="923544" cy="512064"/>
+            </a:xfrm>
+            <a:prstGeom prst="rect">
+              <a:avLst/>
+            </a:prstGeom>
+            <a:noFill/>
+            <a:ln/>
+          </p:spPr>
+          <p:txBody>
+            <a:bodyPr wrap="square" lIns="12700" tIns="12700" rIns="12700" bIns="12700" rtlCol="0" anchor="ctr"/>
+            <a:lstStyle/>
+            <a:p>
+              <a:pPr marL="0" indent="0" algn="l">
+                <a:lnSpc>
+                  <a:spcPct val="97000"/>
+                </a:lnSpc>
+                <a:buNone/>
+              </a:pPr>
+              <a:r>
+                <a:rPr lang="en-US" sz="1100" b="1" dirty="0">
+                  <a:solidFill>
+                    <a:srgbClr val="1B1B18"/>
+                  </a:solidFill>
+                  <a:latin typeface="Calibri" pitchFamily="34" charset="0"/>
+                  <a:ea typeface="Calibri" pitchFamily="34" charset="-122"/>
+                  <a:cs typeface="Calibri" pitchFamily="34" charset="-120"/>
+                </a:rPr>
+                <a:t>Vector DB</a:t>
+              </a:r>
+              <a:endParaRPr lang="en-US" sz="1100" dirty="0"/>
+            </a:p>
+            <a:p>
+              <a:pPr marL="0" indent="0" algn="l">
+                <a:lnSpc>
+                  <a:spcPct val="97000"/>
+                </a:lnSpc>
+                <a:buNone/>
+              </a:pPr>
+              <a:r>
+                <a:rPr lang="en-US" sz="850" dirty="0">
+                  <a:solidFill>
+                    <a:srgbClr val="6B6A64"/>
+                  </a:solidFill>
+                  <a:latin typeface="Calibri" pitchFamily="34" charset="0"/>
+                  <a:ea typeface="Calibri" pitchFamily="34" charset="-122"/>
+                  <a:cs typeface="Calibri" pitchFamily="34" charset="-120"/>
+                </a:rPr>
+                <a:t>OpenSearch</a:t>
+              </a:r>
+              <a:endParaRPr lang="en-US" sz="1100" dirty="0"/>
+            </a:p>
+          </p:txBody>
+        </p:sp>
+        <p:sp>
+          <p:nvSpPr>
+            <p:cNvPr id="126" name="Shape 56"/>
+            <p:cNvSpPr/>
+            <p:nvPr/>
+          </p:nvSpPr>
+          <p:spPr>
+            <a:xfrm>
+              <a:off x="2194560" y="5056632"/>
+              <a:ext cx="137160" cy="0"/>
+            </a:xfrm>
+            <a:prstGeom prst="line">
+              <a:avLst/>
+            </a:prstGeom>
+            <a:noFill/>
+            <a:ln w="15875">
+              <a:solidFill>
+                <a:srgbClr val="9A988E"/>
+              </a:solidFill>
+              <a:prstDash val="solid"/>
+              <a:tailEnd type="triangle"/>
+            </a:ln>
+          </p:spPr>
+        </p:sp>
+        <p:sp>
+          <p:nvSpPr>
+            <p:cNvPr id="127" name="Shape 57"/>
+            <p:cNvSpPr/>
+            <p:nvPr/>
+          </p:nvSpPr>
+          <p:spPr>
+            <a:xfrm>
+              <a:off x="3931920" y="5056632"/>
+              <a:ext cx="137160" cy="0"/>
+            </a:xfrm>
+            <a:prstGeom prst="line">
+              <a:avLst/>
+            </a:prstGeom>
+            <a:noFill/>
+            <a:ln w="15875">
+              <a:solidFill>
+                <a:srgbClr val="9A988E"/>
+              </a:solidFill>
+              <a:prstDash val="solid"/>
+              <a:tailEnd type="triangle"/>
+            </a:ln>
+          </p:spPr>
+        </p:sp>
+        <p:sp>
+          <p:nvSpPr>
+            <p:cNvPr id="128" name="Shape 58"/>
+            <p:cNvSpPr/>
+            <p:nvPr/>
+          </p:nvSpPr>
+          <p:spPr>
+            <a:xfrm>
+              <a:off x="5669280" y="5056632"/>
+              <a:ext cx="137160" cy="0"/>
+            </a:xfrm>
+            <a:prstGeom prst="line">
+              <a:avLst/>
+            </a:prstGeom>
+            <a:noFill/>
+            <a:ln w="15875">
+              <a:solidFill>
+                <a:srgbClr val="9A988E"/>
+              </a:solidFill>
+              <a:prstDash val="solid"/>
+              <a:tailEnd type="triangle"/>
+            </a:ln>
+          </p:spPr>
+        </p:sp>
+        <p:sp>
+          <p:nvSpPr>
+            <p:cNvPr id="129" name="Shape 59"/>
+            <p:cNvSpPr/>
+            <p:nvPr/>
+          </p:nvSpPr>
+          <p:spPr>
+            <a:xfrm>
+              <a:off x="7406640" y="5056632"/>
+              <a:ext cx="137160" cy="0"/>
+            </a:xfrm>
+            <a:prstGeom prst="line">
+              <a:avLst/>
+            </a:prstGeom>
+            <a:noFill/>
+            <a:ln w="15875">
+              <a:solidFill>
+                <a:srgbClr val="9A988E"/>
+              </a:solidFill>
+              <a:prstDash val="solid"/>
+              <a:tailEnd type="triangle"/>
+            </a:ln>
+          </p:spPr>
+        </p:sp>
+        <p:sp>
+          <p:nvSpPr>
+            <p:cNvPr id="130" name="Shape 60"/>
+            <p:cNvSpPr/>
+            <p:nvPr/>
+          </p:nvSpPr>
+          <p:spPr>
+            <a:xfrm>
+              <a:off x="9144000" y="5056632"/>
+              <a:ext cx="137160" cy="0"/>
+            </a:xfrm>
+            <a:prstGeom prst="line">
+              <a:avLst/>
+            </a:prstGeom>
+            <a:noFill/>
+            <a:ln w="15875">
+              <a:solidFill>
+                <a:srgbClr val="9A988E"/>
+              </a:solidFill>
+              <a:prstDash val="solid"/>
+              <a:tailEnd type="triangle"/>
+            </a:ln>
+          </p:spPr>
+        </p:sp>
+      </p:grpSp>
     </p:spTree>
     <p:extLst>
       <p:ext uri="{BB962C8B-B14F-4D97-AF65-F5344CB8AC3E}">
-        <p14:creationId xmlns:p14="http://schemas.microsoft.com/office/powerpoint/2010/main" val="2962748602"/>
+        <p14:creationId xmlns:p14="http://schemas.microsoft.com/office/powerpoint/2010/main" val="2449711157"/>
       </p:ext>
     </p:extLst>
   </p:cSld>
   <p:clrMapOvr>
     <a:masterClrMapping/>
   </p:clrMapOvr>
+  <p:timing>
+    <p:tnLst>
+      <p:par>
+        <p:cTn id="1" dur="indefinite" restart="never" nodeType="tmRoot"/>
+      </p:par>
+    </p:tnLst>
+  </p:timing>
 </p:sld>
 </file>
 
@@ -3678,6 +4376,2866 @@
       </p:grpSpPr>
       <p:sp>
         <p:nvSpPr>
+          <p:cNvPr id="2" name="Text 0"/>
+          <p:cNvSpPr/>
+          <p:nvPr/>
+        </p:nvSpPr>
+        <p:spPr>
+          <a:xfrm>
+            <a:off x="457200" y="219456"/>
+            <a:ext cx="11247120" cy="457200"/>
+          </a:xfrm>
+          <a:prstGeom prst="rect">
+            <a:avLst/>
+          </a:prstGeom>
+          <a:noFill/>
+          <a:ln/>
+        </p:spPr>
+        <p:txBody>
+          <a:bodyPr wrap="square" lIns="0" tIns="0" rIns="0" bIns="0" rtlCol="0" anchor="ctr"/>
+          <a:lstStyle/>
+          <a:p>
+            <a:pPr marL="0" indent="0" algn="l">
+              <a:buNone/>
+            </a:pPr>
+            <a:r>
+              <a:rPr lang="en-US" sz="3000" b="1" dirty="0">
+                <a:solidFill>
+                  <a:srgbClr val="1B1B18"/>
+                </a:solidFill>
+                <a:latin typeface="Calibri" pitchFamily="34" charset="0"/>
+                <a:ea typeface="Calibri" pitchFamily="34" charset="-122"/>
+                <a:cs typeface="Calibri" pitchFamily="34" charset="-120"/>
+              </a:rPr>
+              <a:t>Educator Buddy — AWS RAG architecture</a:t>
+            </a:r>
+            <a:endParaRPr lang="en-US" sz="3000" dirty="0"/>
+          </a:p>
+        </p:txBody>
+      </p:sp>
+      <p:sp>
+        <p:nvSpPr>
+          <p:cNvPr id="3" name="Text 1"/>
+          <p:cNvSpPr/>
+          <p:nvPr/>
+        </p:nvSpPr>
+        <p:spPr>
+          <a:xfrm>
+            <a:off x="457200" y="658368"/>
+            <a:ext cx="11247120" cy="274320"/>
+          </a:xfrm>
+          <a:prstGeom prst="rect">
+            <a:avLst/>
+          </a:prstGeom>
+          <a:noFill/>
+          <a:ln/>
+        </p:spPr>
+        <p:txBody>
+          <a:bodyPr wrap="square" lIns="0" tIns="0" rIns="0" bIns="0" rtlCol="0" anchor="ctr"/>
+          <a:lstStyle/>
+          <a:p>
+            <a:pPr marL="0" indent="0" algn="l">
+              <a:buNone/>
+            </a:pPr>
+            <a:r>
+              <a:rPr lang="en-US" sz="1200" dirty="0">
+                <a:solidFill>
+                  <a:srgbClr val="6B6A64"/>
+                </a:solidFill>
+                <a:latin typeface="Calibri" pitchFamily="34" charset="0"/>
+                <a:ea typeface="Calibri" pitchFamily="34" charset="-122"/>
+                <a:cs typeface="Calibri" pitchFamily="34" charset="-120"/>
+              </a:rPr>
+              <a:t>Source-backed generation for trainers and learners, grounded in governed VET content</a:t>
+            </a:r>
+            <a:endParaRPr lang="en-US" sz="1200" dirty="0"/>
+          </a:p>
+        </p:txBody>
+      </p:sp>
+      <p:sp>
+        <p:nvSpPr>
+          <p:cNvPr id="4" name="Shape 2"/>
+          <p:cNvSpPr/>
+          <p:nvPr/>
+        </p:nvSpPr>
+        <p:spPr>
+          <a:xfrm>
+            <a:off x="457200" y="932688"/>
+            <a:ext cx="3017520" cy="3108960"/>
+          </a:xfrm>
+          <a:prstGeom prst="roundRect">
+            <a:avLst>
+              <a:gd name="adj" fmla="val 2424"/>
+            </a:avLst>
+          </a:prstGeom>
+          <a:solidFill>
+            <a:srgbClr val="F5F9FE"/>
+          </a:solidFill>
+          <a:ln w="12700">
+            <a:solidFill>
+              <a:srgbClr val="D6E5F5"/>
+            </a:solidFill>
+            <a:prstDash val="solid"/>
+          </a:ln>
+        </p:spPr>
+      </p:sp>
+      <p:sp>
+        <p:nvSpPr>
+          <p:cNvPr id="5" name="Shape 3"/>
+          <p:cNvSpPr/>
+          <p:nvPr/>
+        </p:nvSpPr>
+        <p:spPr>
+          <a:xfrm>
+            <a:off x="8229600" y="932688"/>
+            <a:ext cx="3474720" cy="3108960"/>
+          </a:xfrm>
+          <a:prstGeom prst="roundRect">
+            <a:avLst>
+              <a:gd name="adj" fmla="val 2353"/>
+            </a:avLst>
+          </a:prstGeom>
+          <a:solidFill>
+            <a:srgbClr val="F0FAF6"/>
+          </a:solidFill>
+          <a:ln w="12700">
+            <a:solidFill>
+              <a:srgbClr val="D3EDE4"/>
+            </a:solidFill>
+            <a:prstDash val="solid"/>
+          </a:ln>
+        </p:spPr>
+      </p:sp>
+      <p:sp>
+        <p:nvSpPr>
+          <p:cNvPr id="6" name="Shape 4"/>
+          <p:cNvSpPr/>
+          <p:nvPr/>
+        </p:nvSpPr>
+        <p:spPr>
+          <a:xfrm>
+            <a:off x="3749040" y="932688"/>
+            <a:ext cx="4206240" cy="3438144"/>
+          </a:xfrm>
+          <a:prstGeom prst="roundRect">
+            <a:avLst>
+              <a:gd name="adj" fmla="val 2128"/>
+            </a:avLst>
+          </a:prstGeom>
+          <a:solidFill>
+            <a:srgbClr val="F6F5FD"/>
+          </a:solidFill>
+          <a:ln w="12700">
+            <a:solidFill>
+              <a:srgbClr val="DAD7F3"/>
+            </a:solidFill>
+            <a:prstDash val="solid"/>
+          </a:ln>
+        </p:spPr>
+      </p:sp>
+      <p:sp>
+        <p:nvSpPr>
+          <p:cNvPr id="7" name="Text 5"/>
+          <p:cNvSpPr/>
+          <p:nvPr/>
+        </p:nvSpPr>
+        <p:spPr>
+          <a:xfrm>
+            <a:off x="621792" y="987552"/>
+            <a:ext cx="2688336" cy="274320"/>
+          </a:xfrm>
+          <a:prstGeom prst="rect">
+            <a:avLst/>
+          </a:prstGeom>
+          <a:noFill/>
+          <a:ln/>
+        </p:spPr>
+        <p:txBody>
+          <a:bodyPr wrap="square" lIns="0" tIns="0" rIns="0" bIns="0" rtlCol="0" anchor="ctr"/>
+          <a:lstStyle/>
+          <a:p>
+            <a:pPr marL="0" indent="0" algn="l">
+              <a:buNone/>
+            </a:pPr>
+            <a:r>
+              <a:rPr lang="en-US" sz="1300" b="1" dirty="0">
+                <a:solidFill>
+                  <a:srgbClr val="0C447C"/>
+                </a:solidFill>
+                <a:latin typeface="Calibri" pitchFamily="34" charset="0"/>
+                <a:ea typeface="Calibri" pitchFamily="34" charset="-122"/>
+                <a:cs typeface="Calibri" pitchFamily="34" charset="-120"/>
+              </a:rPr>
+              <a:t>User interface</a:t>
+            </a:r>
+            <a:endParaRPr lang="en-US" sz="1300" dirty="0"/>
+          </a:p>
+        </p:txBody>
+      </p:sp>
+      <p:sp>
+        <p:nvSpPr>
+          <p:cNvPr id="8" name="Text 6"/>
+          <p:cNvSpPr/>
+          <p:nvPr/>
+        </p:nvSpPr>
+        <p:spPr>
+          <a:xfrm>
+            <a:off x="3913632" y="987552"/>
+            <a:ext cx="3877056" cy="274320"/>
+          </a:xfrm>
+          <a:prstGeom prst="rect">
+            <a:avLst/>
+          </a:prstGeom>
+          <a:noFill/>
+          <a:ln/>
+        </p:spPr>
+        <p:txBody>
+          <a:bodyPr wrap="square" lIns="0" tIns="0" rIns="0" bIns="0" rtlCol="0" anchor="ctr"/>
+          <a:lstStyle/>
+          <a:p>
+            <a:pPr marL="0" indent="0" algn="l">
+              <a:buNone/>
+            </a:pPr>
+            <a:r>
+              <a:rPr lang="en-US" sz="1300" b="1" dirty="0">
+                <a:solidFill>
+                  <a:srgbClr val="3C3489"/>
+                </a:solidFill>
+                <a:latin typeface="Calibri" pitchFamily="34" charset="0"/>
+                <a:ea typeface="Calibri" pitchFamily="34" charset="-122"/>
+                <a:cs typeface="Calibri" pitchFamily="34" charset="-120"/>
+              </a:rPr>
+              <a:t>RAG orchestration</a:t>
+            </a:r>
+            <a:endParaRPr lang="en-US" sz="1300" dirty="0"/>
+          </a:p>
+        </p:txBody>
+      </p:sp>
+      <p:sp>
+        <p:nvSpPr>
+          <p:cNvPr id="9" name="Text 7"/>
+          <p:cNvSpPr/>
+          <p:nvPr/>
+        </p:nvSpPr>
+        <p:spPr>
+          <a:xfrm>
+            <a:off x="8394192" y="987552"/>
+            <a:ext cx="3145536" cy="274320"/>
+          </a:xfrm>
+          <a:prstGeom prst="rect">
+            <a:avLst/>
+          </a:prstGeom>
+          <a:noFill/>
+          <a:ln/>
+        </p:spPr>
+        <p:txBody>
+          <a:bodyPr wrap="square" lIns="0" tIns="0" rIns="0" bIns="0" rtlCol="0" anchor="ctr"/>
+          <a:lstStyle/>
+          <a:p>
+            <a:pPr marL="0" indent="0" algn="l">
+              <a:buNone/>
+            </a:pPr>
+            <a:r>
+              <a:rPr lang="en-US" sz="1300" b="1" dirty="0">
+                <a:solidFill>
+                  <a:srgbClr val="085041"/>
+                </a:solidFill>
+                <a:latin typeface="Calibri" pitchFamily="34" charset="0"/>
+                <a:ea typeface="Calibri" pitchFamily="34" charset="-122"/>
+                <a:cs typeface="Calibri" pitchFamily="34" charset="-120"/>
+              </a:rPr>
+              <a:t>Outputs</a:t>
+            </a:r>
+            <a:endParaRPr lang="en-US" sz="1300" dirty="0"/>
+          </a:p>
+        </p:txBody>
+      </p:sp>
+      <p:sp>
+        <p:nvSpPr>
+          <p:cNvPr id="10" name="Shape 8"/>
+          <p:cNvSpPr/>
+          <p:nvPr/>
+        </p:nvSpPr>
+        <p:spPr>
+          <a:xfrm>
+            <a:off x="594360" y="1353312"/>
+            <a:ext cx="2743200" cy="502920"/>
+          </a:xfrm>
+          <a:prstGeom prst="roundRect">
+            <a:avLst>
+              <a:gd name="adj" fmla="val 10909"/>
+            </a:avLst>
+          </a:prstGeom>
+          <a:solidFill>
+            <a:srgbClr val="E6F1FB"/>
+          </a:solidFill>
+          <a:ln w="12700">
+            <a:solidFill>
+              <a:srgbClr val="378ADD"/>
+            </a:solidFill>
+            <a:prstDash val="solid"/>
+          </a:ln>
+          <a:effectLst>
+            <a:outerShdw blurRad="63500" dist="25400" dir="5400000" algn="bl" rotWithShape="0">
+              <a:srgbClr val="000000">
+                <a:alpha val="10000"/>
+              </a:srgbClr>
+            </a:outerShdw>
+          </a:effectLst>
+        </p:spPr>
+      </p:sp>
+      <p:sp>
+        <p:nvSpPr>
+          <p:cNvPr id="11" name="Text 9"/>
+          <p:cNvSpPr/>
+          <p:nvPr/>
+        </p:nvSpPr>
+        <p:spPr>
+          <a:xfrm>
+            <a:off x="667512" y="1353312"/>
+            <a:ext cx="2596896" cy="502920"/>
+          </a:xfrm>
+          <a:prstGeom prst="rect">
+            <a:avLst/>
+          </a:prstGeom>
+          <a:noFill/>
+          <a:ln/>
+        </p:spPr>
+        <p:txBody>
+          <a:bodyPr wrap="square" lIns="25400" tIns="25400" rIns="25400" bIns="25400" rtlCol="0" anchor="ctr"/>
+          <a:lstStyle/>
+          <a:p>
+            <a:pPr marL="0" indent="0" algn="ctr">
+              <a:lnSpc>
+                <a:spcPct val="95000"/>
+              </a:lnSpc>
+              <a:buNone/>
+            </a:pPr>
+            <a:r>
+              <a:rPr lang="en-US" sz="1300" b="1" dirty="0">
+                <a:solidFill>
+                  <a:srgbClr val="0C447C"/>
+                </a:solidFill>
+                <a:latin typeface="Calibri" pitchFamily="34" charset="0"/>
+                <a:ea typeface="Calibri" pitchFamily="34" charset="-122"/>
+                <a:cs typeface="Calibri" pitchFamily="34" charset="-120"/>
+              </a:rPr>
+              <a:t>End users</a:t>
+            </a:r>
+            <a:endParaRPr lang="en-US" sz="1300" dirty="0"/>
+          </a:p>
+          <a:p>
+            <a:pPr marL="0" indent="0" algn="ctr">
+              <a:lnSpc>
+                <a:spcPct val="95000"/>
+              </a:lnSpc>
+              <a:buNone/>
+            </a:pPr>
+            <a:r>
+              <a:rPr lang="en-US" sz="950" dirty="0">
+                <a:solidFill>
+                  <a:srgbClr val="185FA5"/>
+                </a:solidFill>
+                <a:latin typeface="Calibri" pitchFamily="34" charset="0"/>
+                <a:ea typeface="Calibri" pitchFamily="34" charset="-122"/>
+                <a:cs typeface="Calibri" pitchFamily="34" charset="-120"/>
+              </a:rPr>
+              <a:t>trainers, learners</a:t>
+            </a:r>
+            <a:endParaRPr lang="en-US" sz="1300" dirty="0"/>
+          </a:p>
+        </p:txBody>
+      </p:sp>
+      <p:sp>
+        <p:nvSpPr>
+          <p:cNvPr id="12" name="Shape 10"/>
+          <p:cNvSpPr/>
+          <p:nvPr/>
+        </p:nvSpPr>
+        <p:spPr>
+          <a:xfrm>
+            <a:off x="594360" y="1984248"/>
+            <a:ext cx="2743200" cy="502920"/>
+          </a:xfrm>
+          <a:prstGeom prst="roundRect">
+            <a:avLst>
+              <a:gd name="adj" fmla="val 10909"/>
+            </a:avLst>
+          </a:prstGeom>
+          <a:solidFill>
+            <a:srgbClr val="E6F1FB"/>
+          </a:solidFill>
+          <a:ln w="12700">
+            <a:solidFill>
+              <a:srgbClr val="378ADD"/>
+            </a:solidFill>
+            <a:prstDash val="solid"/>
+          </a:ln>
+          <a:effectLst>
+            <a:outerShdw blurRad="63500" dist="25400" dir="5400000" algn="bl" rotWithShape="0">
+              <a:srgbClr val="000000">
+                <a:alpha val="10000"/>
+              </a:srgbClr>
+            </a:outerShdw>
+          </a:effectLst>
+        </p:spPr>
+      </p:sp>
+      <p:sp>
+        <p:nvSpPr>
+          <p:cNvPr id="13" name="Text 11"/>
+          <p:cNvSpPr/>
+          <p:nvPr/>
+        </p:nvSpPr>
+        <p:spPr>
+          <a:xfrm>
+            <a:off x="667512" y="1984248"/>
+            <a:ext cx="2596896" cy="502920"/>
+          </a:xfrm>
+          <a:prstGeom prst="rect">
+            <a:avLst/>
+          </a:prstGeom>
+          <a:noFill/>
+          <a:ln/>
+        </p:spPr>
+        <p:txBody>
+          <a:bodyPr wrap="square" lIns="25400" tIns="25400" rIns="25400" bIns="25400" rtlCol="0" anchor="ctr"/>
+          <a:lstStyle/>
+          <a:p>
+            <a:pPr marL="0" indent="0" algn="ctr">
+              <a:lnSpc>
+                <a:spcPct val="95000"/>
+              </a:lnSpc>
+              <a:buNone/>
+            </a:pPr>
+            <a:r>
+              <a:rPr lang="en-US" sz="1300" b="1" dirty="0">
+                <a:solidFill>
+                  <a:srgbClr val="0C447C"/>
+                </a:solidFill>
+                <a:latin typeface="Calibri" pitchFamily="34" charset="0"/>
+                <a:ea typeface="Calibri" pitchFamily="34" charset="-122"/>
+                <a:cs typeface="Calibri" pitchFamily="34" charset="-120"/>
+              </a:rPr>
+              <a:t>Web app</a:t>
+            </a:r>
+            <a:endParaRPr lang="en-US" sz="1300" dirty="0"/>
+          </a:p>
+          <a:p>
+            <a:pPr marL="0" indent="0" algn="ctr">
+              <a:lnSpc>
+                <a:spcPct val="95000"/>
+              </a:lnSpc>
+              <a:buNone/>
+            </a:pPr>
+            <a:r>
+              <a:rPr lang="en-US" sz="950" dirty="0">
+                <a:solidFill>
+                  <a:srgbClr val="185FA5"/>
+                </a:solidFill>
+                <a:latin typeface="Calibri" pitchFamily="34" charset="0"/>
+                <a:ea typeface="Calibri" pitchFamily="34" charset="-122"/>
+                <a:cs typeface="Calibri" pitchFamily="34" charset="-120"/>
+              </a:rPr>
+              <a:t>AWS Amplify + CloudFront</a:t>
+            </a:r>
+            <a:endParaRPr lang="en-US" sz="1300" dirty="0"/>
+          </a:p>
+        </p:txBody>
+      </p:sp>
+      <p:sp>
+        <p:nvSpPr>
+          <p:cNvPr id="14" name="Shape 12"/>
+          <p:cNvSpPr/>
+          <p:nvPr/>
+        </p:nvSpPr>
+        <p:spPr>
+          <a:xfrm>
+            <a:off x="594360" y="2615184"/>
+            <a:ext cx="2743200" cy="502920"/>
+          </a:xfrm>
+          <a:prstGeom prst="roundRect">
+            <a:avLst>
+              <a:gd name="adj" fmla="val 10909"/>
+            </a:avLst>
+          </a:prstGeom>
+          <a:solidFill>
+            <a:srgbClr val="E6F1FB"/>
+          </a:solidFill>
+          <a:ln w="12700">
+            <a:solidFill>
+              <a:srgbClr val="378ADD"/>
+            </a:solidFill>
+            <a:prstDash val="solid"/>
+          </a:ln>
+          <a:effectLst>
+            <a:outerShdw blurRad="63500" dist="25400" dir="5400000" algn="bl" rotWithShape="0">
+              <a:srgbClr val="000000">
+                <a:alpha val="10000"/>
+              </a:srgbClr>
+            </a:outerShdw>
+          </a:effectLst>
+        </p:spPr>
+      </p:sp>
+      <p:sp>
+        <p:nvSpPr>
+          <p:cNvPr id="15" name="Text 13"/>
+          <p:cNvSpPr/>
+          <p:nvPr/>
+        </p:nvSpPr>
+        <p:spPr>
+          <a:xfrm>
+            <a:off x="667512" y="2615184"/>
+            <a:ext cx="2596896" cy="502920"/>
+          </a:xfrm>
+          <a:prstGeom prst="rect">
+            <a:avLst/>
+          </a:prstGeom>
+          <a:noFill/>
+          <a:ln/>
+        </p:spPr>
+        <p:txBody>
+          <a:bodyPr wrap="square" lIns="25400" tIns="25400" rIns="25400" bIns="25400" rtlCol="0" anchor="ctr"/>
+          <a:lstStyle/>
+          <a:p>
+            <a:pPr marL="0" indent="0" algn="ctr">
+              <a:lnSpc>
+                <a:spcPct val="95000"/>
+              </a:lnSpc>
+              <a:buNone/>
+            </a:pPr>
+            <a:r>
+              <a:rPr lang="en-US" sz="1300" b="1" dirty="0">
+                <a:solidFill>
+                  <a:srgbClr val="0C447C"/>
+                </a:solidFill>
+                <a:latin typeface="Calibri" pitchFamily="34" charset="0"/>
+                <a:ea typeface="Calibri" pitchFamily="34" charset="-122"/>
+                <a:cs typeface="Calibri" pitchFamily="34" charset="-120"/>
+              </a:rPr>
+              <a:t>Dropdowns</a:t>
+            </a:r>
+            <a:endParaRPr lang="en-US" sz="1300" dirty="0"/>
+          </a:p>
+          <a:p>
+            <a:pPr marL="0" indent="0" algn="ctr">
+              <a:lnSpc>
+                <a:spcPct val="95000"/>
+              </a:lnSpc>
+              <a:buNone/>
+            </a:pPr>
+            <a:r>
+              <a:rPr lang="en-US" sz="950" dirty="0">
+                <a:solidFill>
+                  <a:srgbClr val="185FA5"/>
+                </a:solidFill>
+                <a:latin typeface="Calibri" pitchFamily="34" charset="0"/>
+                <a:ea typeface="Calibri" pitchFamily="34" charset="-122"/>
+                <a:cs typeface="Calibri" pitchFamily="34" charset="-120"/>
+              </a:rPr>
+              <a:t>unit, element, PC, output type</a:t>
+            </a:r>
+            <a:endParaRPr lang="en-US" sz="1300" dirty="0"/>
+          </a:p>
+        </p:txBody>
+      </p:sp>
+      <p:sp>
+        <p:nvSpPr>
+          <p:cNvPr id="16" name="Shape 14"/>
+          <p:cNvSpPr/>
+          <p:nvPr/>
+        </p:nvSpPr>
+        <p:spPr>
+          <a:xfrm>
+            <a:off x="594360" y="3246120"/>
+            <a:ext cx="2743200" cy="502920"/>
+          </a:xfrm>
+          <a:prstGeom prst="roundRect">
+            <a:avLst>
+              <a:gd name="adj" fmla="val 10909"/>
+            </a:avLst>
+          </a:prstGeom>
+          <a:solidFill>
+            <a:srgbClr val="E6F1FB"/>
+          </a:solidFill>
+          <a:ln w="12700">
+            <a:solidFill>
+              <a:srgbClr val="378ADD"/>
+            </a:solidFill>
+            <a:prstDash val="solid"/>
+          </a:ln>
+          <a:effectLst>
+            <a:outerShdw blurRad="63500" dist="25400" dir="5400000" algn="bl" rotWithShape="0">
+              <a:srgbClr val="000000">
+                <a:alpha val="10000"/>
+              </a:srgbClr>
+            </a:outerShdw>
+          </a:effectLst>
+        </p:spPr>
+      </p:sp>
+      <p:sp>
+        <p:nvSpPr>
+          <p:cNvPr id="17" name="Text 15"/>
+          <p:cNvSpPr/>
+          <p:nvPr/>
+        </p:nvSpPr>
+        <p:spPr>
+          <a:xfrm>
+            <a:off x="667512" y="3246120"/>
+            <a:ext cx="2596896" cy="502920"/>
+          </a:xfrm>
+          <a:prstGeom prst="rect">
+            <a:avLst/>
+          </a:prstGeom>
+          <a:noFill/>
+          <a:ln/>
+        </p:spPr>
+        <p:txBody>
+          <a:bodyPr wrap="square" lIns="25400" tIns="25400" rIns="25400" bIns="25400" rtlCol="0" anchor="ctr"/>
+          <a:lstStyle/>
+          <a:p>
+            <a:pPr marL="0" indent="0" algn="ctr">
+              <a:lnSpc>
+                <a:spcPct val="95000"/>
+              </a:lnSpc>
+              <a:buNone/>
+            </a:pPr>
+            <a:r>
+              <a:rPr lang="en-US" sz="1300" b="1" dirty="0">
+                <a:solidFill>
+                  <a:srgbClr val="0C447C"/>
+                </a:solidFill>
+                <a:latin typeface="Calibri" pitchFamily="34" charset="0"/>
+                <a:ea typeface="Calibri" pitchFamily="34" charset="-122"/>
+                <a:cs typeface="Calibri" pitchFamily="34" charset="-120"/>
+              </a:rPr>
+              <a:t>Upload &amp; chat</a:t>
+            </a:r>
+            <a:endParaRPr lang="en-US" sz="1300" dirty="0"/>
+          </a:p>
+          <a:p>
+            <a:pPr marL="0" indent="0" algn="ctr">
+              <a:lnSpc>
+                <a:spcPct val="95000"/>
+              </a:lnSpc>
+              <a:buNone/>
+            </a:pPr>
+            <a:r>
+              <a:rPr lang="en-US" sz="950" dirty="0">
+                <a:solidFill>
+                  <a:srgbClr val="185FA5"/>
+                </a:solidFill>
+                <a:latin typeface="Calibri" pitchFamily="34" charset="0"/>
+                <a:ea typeface="Calibri" pitchFamily="34" charset="-122"/>
+                <a:cs typeface="Calibri" pitchFamily="34" charset="-120"/>
+              </a:rPr>
+              <a:t>documents + prompts</a:t>
+            </a:r>
+            <a:endParaRPr lang="en-US" sz="1300" dirty="0"/>
+          </a:p>
+        </p:txBody>
+      </p:sp>
+      <p:sp>
+        <p:nvSpPr>
+          <p:cNvPr id="18" name="Shape 16"/>
+          <p:cNvSpPr/>
+          <p:nvPr/>
+        </p:nvSpPr>
+        <p:spPr>
+          <a:xfrm>
+            <a:off x="3886200" y="1353312"/>
+            <a:ext cx="3931920" cy="484632"/>
+          </a:xfrm>
+          <a:prstGeom prst="roundRect">
+            <a:avLst>
+              <a:gd name="adj" fmla="val 11321"/>
+            </a:avLst>
+          </a:prstGeom>
+          <a:solidFill>
+            <a:srgbClr val="EEEDFE"/>
+          </a:solidFill>
+          <a:ln w="12700">
+            <a:solidFill>
+              <a:srgbClr val="7F77DD"/>
+            </a:solidFill>
+            <a:prstDash val="solid"/>
+          </a:ln>
+          <a:effectLst>
+            <a:outerShdw blurRad="63500" dist="25400" dir="5400000" algn="bl" rotWithShape="0">
+              <a:srgbClr val="000000">
+                <a:alpha val="10000"/>
+              </a:srgbClr>
+            </a:outerShdw>
+          </a:effectLst>
+        </p:spPr>
+      </p:sp>
+      <p:sp>
+        <p:nvSpPr>
+          <p:cNvPr id="19" name="Text 17"/>
+          <p:cNvSpPr/>
+          <p:nvPr/>
+        </p:nvSpPr>
+        <p:spPr>
+          <a:xfrm>
+            <a:off x="3959352" y="1353312"/>
+            <a:ext cx="3785616" cy="484632"/>
+          </a:xfrm>
+          <a:prstGeom prst="rect">
+            <a:avLst/>
+          </a:prstGeom>
+          <a:noFill/>
+          <a:ln/>
+        </p:spPr>
+        <p:txBody>
+          <a:bodyPr wrap="square" lIns="25400" tIns="25400" rIns="25400" bIns="25400" rtlCol="0" anchor="ctr"/>
+          <a:lstStyle/>
+          <a:p>
+            <a:pPr marL="0" indent="0" algn="ctr">
+              <a:lnSpc>
+                <a:spcPct val="95000"/>
+              </a:lnSpc>
+              <a:buNone/>
+            </a:pPr>
+            <a:r>
+              <a:rPr lang="en-US" sz="1300" b="1" dirty="0">
+                <a:solidFill>
+                  <a:srgbClr val="3C3489"/>
+                </a:solidFill>
+                <a:latin typeface="Calibri" pitchFamily="34" charset="0"/>
+                <a:ea typeface="Calibri" pitchFamily="34" charset="-122"/>
+                <a:cs typeface="Calibri" pitchFamily="34" charset="-120"/>
+              </a:rPr>
+              <a:t>API &amp; auth</a:t>
+            </a:r>
+            <a:endParaRPr lang="en-US" sz="1300" dirty="0"/>
+          </a:p>
+          <a:p>
+            <a:pPr marL="0" indent="0" algn="ctr">
+              <a:lnSpc>
+                <a:spcPct val="95000"/>
+              </a:lnSpc>
+              <a:buNone/>
+            </a:pPr>
+            <a:r>
+              <a:rPr lang="en-US" sz="950" dirty="0">
+                <a:solidFill>
+                  <a:srgbClr val="534AB7"/>
+                </a:solidFill>
+                <a:latin typeface="Calibri" pitchFamily="34" charset="0"/>
+                <a:ea typeface="Calibri" pitchFamily="34" charset="-122"/>
+                <a:cs typeface="Calibri" pitchFamily="34" charset="-120"/>
+              </a:rPr>
+              <a:t>Amazon API Gateway + Cognito</a:t>
+            </a:r>
+            <a:endParaRPr lang="en-US" sz="1300" dirty="0"/>
+          </a:p>
+        </p:txBody>
+      </p:sp>
+      <p:sp>
+        <p:nvSpPr>
+          <p:cNvPr id="20" name="Shape 18"/>
+          <p:cNvSpPr/>
+          <p:nvPr/>
+        </p:nvSpPr>
+        <p:spPr>
+          <a:xfrm>
+            <a:off x="3886200" y="1938528"/>
+            <a:ext cx="3931920" cy="484632"/>
+          </a:xfrm>
+          <a:prstGeom prst="roundRect">
+            <a:avLst>
+              <a:gd name="adj" fmla="val 11321"/>
+            </a:avLst>
+          </a:prstGeom>
+          <a:solidFill>
+            <a:srgbClr val="EEEDFE"/>
+          </a:solidFill>
+          <a:ln w="12700">
+            <a:solidFill>
+              <a:srgbClr val="7F77DD"/>
+            </a:solidFill>
+            <a:prstDash val="solid"/>
+          </a:ln>
+          <a:effectLst>
+            <a:outerShdw blurRad="63500" dist="25400" dir="5400000" algn="bl" rotWithShape="0">
+              <a:srgbClr val="000000">
+                <a:alpha val="10000"/>
+              </a:srgbClr>
+            </a:outerShdw>
+          </a:effectLst>
+        </p:spPr>
+      </p:sp>
+      <p:sp>
+        <p:nvSpPr>
+          <p:cNvPr id="21" name="Text 19"/>
+          <p:cNvSpPr/>
+          <p:nvPr/>
+        </p:nvSpPr>
+        <p:spPr>
+          <a:xfrm>
+            <a:off x="3959352" y="1938528"/>
+            <a:ext cx="3785616" cy="484632"/>
+          </a:xfrm>
+          <a:prstGeom prst="rect">
+            <a:avLst/>
+          </a:prstGeom>
+          <a:noFill/>
+          <a:ln/>
+        </p:spPr>
+        <p:txBody>
+          <a:bodyPr wrap="square" lIns="25400" tIns="25400" rIns="25400" bIns="25400" rtlCol="0" anchor="ctr"/>
+          <a:lstStyle/>
+          <a:p>
+            <a:pPr marL="0" indent="0" algn="ctr">
+              <a:lnSpc>
+                <a:spcPct val="95000"/>
+              </a:lnSpc>
+              <a:buNone/>
+            </a:pPr>
+            <a:r>
+              <a:rPr lang="en-US" sz="1300" b="1" dirty="0">
+                <a:solidFill>
+                  <a:srgbClr val="3C3489"/>
+                </a:solidFill>
+                <a:latin typeface="Calibri" pitchFamily="34" charset="0"/>
+                <a:ea typeface="Calibri" pitchFamily="34" charset="-122"/>
+                <a:cs typeface="Calibri" pitchFamily="34" charset="-120"/>
+              </a:rPr>
+              <a:t>Input assembler</a:t>
+            </a:r>
+            <a:endParaRPr lang="en-US" sz="1300" dirty="0"/>
+          </a:p>
+          <a:p>
+            <a:pPr marL="0" indent="0" algn="ctr">
+              <a:lnSpc>
+                <a:spcPct val="95000"/>
+              </a:lnSpc>
+              <a:buNone/>
+            </a:pPr>
+            <a:r>
+              <a:rPr lang="en-US" sz="950" dirty="0">
+                <a:solidFill>
+                  <a:srgbClr val="534AB7"/>
+                </a:solidFill>
+                <a:latin typeface="Calibri" pitchFamily="34" charset="0"/>
+                <a:ea typeface="Calibri" pitchFamily="34" charset="-122"/>
+                <a:cs typeface="Calibri" pitchFamily="34" charset="-120"/>
+              </a:rPr>
+              <a:t>AWS Lambda builds request JSON</a:t>
+            </a:r>
+            <a:endParaRPr lang="en-US" sz="1300" dirty="0"/>
+          </a:p>
+        </p:txBody>
+      </p:sp>
+      <p:sp>
+        <p:nvSpPr>
+          <p:cNvPr id="22" name="Shape 20"/>
+          <p:cNvSpPr/>
+          <p:nvPr/>
+        </p:nvSpPr>
+        <p:spPr>
+          <a:xfrm>
+            <a:off x="3886200" y="2523744"/>
+            <a:ext cx="3931920" cy="484632"/>
+          </a:xfrm>
+          <a:prstGeom prst="roundRect">
+            <a:avLst>
+              <a:gd name="adj" fmla="val 11321"/>
+            </a:avLst>
+          </a:prstGeom>
+          <a:solidFill>
+            <a:srgbClr val="EEEDFE"/>
+          </a:solidFill>
+          <a:ln w="12700">
+            <a:solidFill>
+              <a:srgbClr val="7F77DD"/>
+            </a:solidFill>
+            <a:prstDash val="solid"/>
+          </a:ln>
+          <a:effectLst>
+            <a:outerShdw blurRad="63500" dist="25400" dir="5400000" algn="bl" rotWithShape="0">
+              <a:srgbClr val="000000">
+                <a:alpha val="10000"/>
+              </a:srgbClr>
+            </a:outerShdw>
+          </a:effectLst>
+        </p:spPr>
+      </p:sp>
+      <p:sp>
+        <p:nvSpPr>
+          <p:cNvPr id="23" name="Text 21"/>
+          <p:cNvSpPr/>
+          <p:nvPr/>
+        </p:nvSpPr>
+        <p:spPr>
+          <a:xfrm>
+            <a:off x="3959352" y="2523744"/>
+            <a:ext cx="3785616" cy="484632"/>
+          </a:xfrm>
+          <a:prstGeom prst="rect">
+            <a:avLst/>
+          </a:prstGeom>
+          <a:noFill/>
+          <a:ln/>
+        </p:spPr>
+        <p:txBody>
+          <a:bodyPr wrap="square" lIns="25400" tIns="25400" rIns="25400" bIns="25400" rtlCol="0" anchor="ctr"/>
+          <a:lstStyle/>
+          <a:p>
+            <a:pPr marL="0" indent="0" algn="ctr">
+              <a:lnSpc>
+                <a:spcPct val="95000"/>
+              </a:lnSpc>
+              <a:buNone/>
+            </a:pPr>
+            <a:r>
+              <a:rPr lang="en-US" sz="1300" b="1" dirty="0">
+                <a:solidFill>
+                  <a:srgbClr val="3C3489"/>
+                </a:solidFill>
+                <a:latin typeface="Calibri" pitchFamily="34" charset="0"/>
+                <a:ea typeface="Calibri" pitchFamily="34" charset="-122"/>
+                <a:cs typeface="Calibri" pitchFamily="34" charset="-120"/>
+              </a:rPr>
+              <a:t>Bedrock Agent</a:t>
+            </a:r>
+            <a:endParaRPr lang="en-US" sz="1300" dirty="0"/>
+          </a:p>
+          <a:p>
+            <a:pPr marL="0" indent="0" algn="ctr">
+              <a:lnSpc>
+                <a:spcPct val="95000"/>
+              </a:lnSpc>
+              <a:buNone/>
+            </a:pPr>
+            <a:r>
+              <a:rPr lang="en-US" sz="950" dirty="0">
+                <a:solidFill>
+                  <a:srgbClr val="534AB7"/>
+                </a:solidFill>
+                <a:latin typeface="Calibri" pitchFamily="34" charset="0"/>
+                <a:ea typeface="Calibri" pitchFamily="34" charset="-122"/>
+                <a:cs typeface="Calibri" pitchFamily="34" charset="-120"/>
+              </a:rPr>
+              <a:t>orchestration + prompt assembly</a:t>
+            </a:r>
+            <a:endParaRPr lang="en-US" sz="1300" dirty="0"/>
+          </a:p>
+        </p:txBody>
+      </p:sp>
+      <p:sp>
+        <p:nvSpPr>
+          <p:cNvPr id="24" name="Shape 22"/>
+          <p:cNvSpPr/>
+          <p:nvPr/>
+        </p:nvSpPr>
+        <p:spPr>
+          <a:xfrm>
+            <a:off x="3886200" y="3108960"/>
+            <a:ext cx="3931920" cy="484632"/>
+          </a:xfrm>
+          <a:prstGeom prst="roundRect">
+            <a:avLst>
+              <a:gd name="adj" fmla="val 11321"/>
+            </a:avLst>
+          </a:prstGeom>
+          <a:solidFill>
+            <a:srgbClr val="EEEDFE"/>
+          </a:solidFill>
+          <a:ln w="12700">
+            <a:solidFill>
+              <a:srgbClr val="7F77DD"/>
+            </a:solidFill>
+            <a:prstDash val="solid"/>
+          </a:ln>
+          <a:effectLst>
+            <a:outerShdw blurRad="63500" dist="25400" dir="5400000" algn="bl" rotWithShape="0">
+              <a:srgbClr val="000000">
+                <a:alpha val="10000"/>
+              </a:srgbClr>
+            </a:outerShdw>
+          </a:effectLst>
+        </p:spPr>
+      </p:sp>
+      <p:sp>
+        <p:nvSpPr>
+          <p:cNvPr id="25" name="Text 23"/>
+          <p:cNvSpPr/>
+          <p:nvPr/>
+        </p:nvSpPr>
+        <p:spPr>
+          <a:xfrm>
+            <a:off x="3959352" y="3108960"/>
+            <a:ext cx="3785616" cy="484632"/>
+          </a:xfrm>
+          <a:prstGeom prst="rect">
+            <a:avLst/>
+          </a:prstGeom>
+          <a:noFill/>
+          <a:ln/>
+        </p:spPr>
+        <p:txBody>
+          <a:bodyPr wrap="square" lIns="25400" tIns="25400" rIns="25400" bIns="25400" rtlCol="0" anchor="ctr"/>
+          <a:lstStyle/>
+          <a:p>
+            <a:pPr marL="0" indent="0" algn="ctr">
+              <a:lnSpc>
+                <a:spcPct val="95000"/>
+              </a:lnSpc>
+              <a:buNone/>
+            </a:pPr>
+            <a:r>
+              <a:rPr lang="en-US" sz="1300" b="1" dirty="0">
+                <a:solidFill>
+                  <a:srgbClr val="3C3489"/>
+                </a:solidFill>
+                <a:latin typeface="Calibri" pitchFamily="34" charset="0"/>
+                <a:ea typeface="Calibri" pitchFamily="34" charset="-122"/>
+                <a:cs typeface="Calibri" pitchFamily="34" charset="-120"/>
+              </a:rPr>
+              <a:t>Retrieval</a:t>
+            </a:r>
+            <a:endParaRPr lang="en-US" sz="1300" dirty="0"/>
+          </a:p>
+          <a:p>
+            <a:pPr marL="0" indent="0" algn="ctr">
+              <a:lnSpc>
+                <a:spcPct val="95000"/>
+              </a:lnSpc>
+              <a:buNone/>
+            </a:pPr>
+            <a:r>
+              <a:rPr lang="en-US" sz="950" dirty="0">
+                <a:solidFill>
+                  <a:srgbClr val="534AB7"/>
+                </a:solidFill>
+                <a:latin typeface="Calibri" pitchFamily="34" charset="0"/>
+                <a:ea typeface="Calibri" pitchFamily="34" charset="-122"/>
+                <a:cs typeface="Calibri" pitchFamily="34" charset="-120"/>
+              </a:rPr>
+              <a:t>OpenSearch Serverless (vector + semantic)</a:t>
+            </a:r>
+            <a:endParaRPr lang="en-US" sz="1300" dirty="0"/>
+          </a:p>
+        </p:txBody>
+      </p:sp>
+      <p:sp>
+        <p:nvSpPr>
+          <p:cNvPr id="26" name="Shape 24"/>
+          <p:cNvSpPr/>
+          <p:nvPr/>
+        </p:nvSpPr>
+        <p:spPr>
+          <a:xfrm>
+            <a:off x="3886200" y="3694176"/>
+            <a:ext cx="3931920" cy="484632"/>
+          </a:xfrm>
+          <a:prstGeom prst="roundRect">
+            <a:avLst>
+              <a:gd name="adj" fmla="val 11321"/>
+            </a:avLst>
+          </a:prstGeom>
+          <a:solidFill>
+            <a:srgbClr val="EEEDFE"/>
+          </a:solidFill>
+          <a:ln w="12700">
+            <a:solidFill>
+              <a:srgbClr val="7F77DD"/>
+            </a:solidFill>
+            <a:prstDash val="solid"/>
+          </a:ln>
+          <a:effectLst>
+            <a:outerShdw blurRad="63500" dist="25400" dir="5400000" algn="bl" rotWithShape="0">
+              <a:srgbClr val="000000">
+                <a:alpha val="10000"/>
+              </a:srgbClr>
+            </a:outerShdw>
+          </a:effectLst>
+        </p:spPr>
+      </p:sp>
+      <p:sp>
+        <p:nvSpPr>
+          <p:cNvPr id="27" name="Text 25"/>
+          <p:cNvSpPr/>
+          <p:nvPr/>
+        </p:nvSpPr>
+        <p:spPr>
+          <a:xfrm>
+            <a:off x="3959352" y="3694176"/>
+            <a:ext cx="3785616" cy="484632"/>
+          </a:xfrm>
+          <a:prstGeom prst="rect">
+            <a:avLst/>
+          </a:prstGeom>
+          <a:noFill/>
+          <a:ln/>
+        </p:spPr>
+        <p:txBody>
+          <a:bodyPr wrap="square" lIns="25400" tIns="25400" rIns="25400" bIns="25400" rtlCol="0" anchor="ctr"/>
+          <a:lstStyle/>
+          <a:p>
+            <a:pPr marL="0" indent="0" algn="ctr">
+              <a:lnSpc>
+                <a:spcPct val="95000"/>
+              </a:lnSpc>
+              <a:buNone/>
+            </a:pPr>
+            <a:r>
+              <a:rPr lang="en-US" sz="1300" b="1" dirty="0">
+                <a:solidFill>
+                  <a:srgbClr val="3C3489"/>
+                </a:solidFill>
+                <a:latin typeface="Calibri" pitchFamily="34" charset="0"/>
+                <a:ea typeface="Calibri" pitchFamily="34" charset="-122"/>
+                <a:cs typeface="Calibri" pitchFamily="34" charset="-120"/>
+              </a:rPr>
+              <a:t>LLM generation</a:t>
+            </a:r>
+            <a:endParaRPr lang="en-US" sz="1300" dirty="0"/>
+          </a:p>
+          <a:p>
+            <a:pPr marL="0" indent="0" algn="ctr">
+              <a:lnSpc>
+                <a:spcPct val="95000"/>
+              </a:lnSpc>
+              <a:buNone/>
+            </a:pPr>
+            <a:r>
+              <a:rPr lang="en-US" sz="950" dirty="0">
+                <a:solidFill>
+                  <a:srgbClr val="534AB7"/>
+                </a:solidFill>
+                <a:latin typeface="Calibri" pitchFamily="34" charset="0"/>
+                <a:ea typeface="Calibri" pitchFamily="34" charset="-122"/>
+                <a:cs typeface="Calibri" pitchFamily="34" charset="-120"/>
+              </a:rPr>
+              <a:t>Amazon Bedrock + Guardrails</a:t>
+            </a:r>
+            <a:endParaRPr lang="en-US" sz="1300" dirty="0"/>
+          </a:p>
+        </p:txBody>
+      </p:sp>
+      <p:sp>
+        <p:nvSpPr>
+          <p:cNvPr id="28" name="Shape 26"/>
+          <p:cNvSpPr/>
+          <p:nvPr/>
+        </p:nvSpPr>
+        <p:spPr>
+          <a:xfrm>
+            <a:off x="8366760" y="1353312"/>
+            <a:ext cx="3200400" cy="502920"/>
+          </a:xfrm>
+          <a:prstGeom prst="roundRect">
+            <a:avLst>
+              <a:gd name="adj" fmla="val 10909"/>
+            </a:avLst>
+          </a:prstGeom>
+          <a:solidFill>
+            <a:srgbClr val="E1F5EE"/>
+          </a:solidFill>
+          <a:ln w="12700">
+            <a:solidFill>
+              <a:srgbClr val="1D9E75"/>
+            </a:solidFill>
+            <a:prstDash val="solid"/>
+          </a:ln>
+          <a:effectLst>
+            <a:outerShdw blurRad="63500" dist="25400" dir="5400000" algn="bl" rotWithShape="0">
+              <a:srgbClr val="000000">
+                <a:alpha val="10000"/>
+              </a:srgbClr>
+            </a:outerShdw>
+          </a:effectLst>
+        </p:spPr>
+      </p:sp>
+      <p:sp>
+        <p:nvSpPr>
+          <p:cNvPr id="29" name="Text 27"/>
+          <p:cNvSpPr/>
+          <p:nvPr/>
+        </p:nvSpPr>
+        <p:spPr>
+          <a:xfrm>
+            <a:off x="8439912" y="1353312"/>
+            <a:ext cx="3054096" cy="502920"/>
+          </a:xfrm>
+          <a:prstGeom prst="rect">
+            <a:avLst/>
+          </a:prstGeom>
+          <a:noFill/>
+          <a:ln/>
+        </p:spPr>
+        <p:txBody>
+          <a:bodyPr wrap="square" lIns="25400" tIns="25400" rIns="25400" bIns="25400" rtlCol="0" anchor="ctr"/>
+          <a:lstStyle/>
+          <a:p>
+            <a:pPr marL="0" indent="0" algn="ctr">
+              <a:lnSpc>
+                <a:spcPct val="95000"/>
+              </a:lnSpc>
+              <a:buNone/>
+            </a:pPr>
+            <a:r>
+              <a:rPr lang="en-US" sz="1300" b="1" dirty="0">
+                <a:solidFill>
+                  <a:srgbClr val="085041"/>
+                </a:solidFill>
+                <a:latin typeface="Calibri" pitchFamily="34" charset="0"/>
+                <a:ea typeface="Calibri" pitchFamily="34" charset="-122"/>
+                <a:cs typeface="Calibri" pitchFamily="34" charset="-120"/>
+              </a:rPr>
+              <a:t>Draft artefacts</a:t>
+            </a:r>
+            <a:endParaRPr lang="en-US" sz="1300" dirty="0"/>
+          </a:p>
+          <a:p>
+            <a:pPr marL="0" indent="0" algn="ctr">
+              <a:lnSpc>
+                <a:spcPct val="95000"/>
+              </a:lnSpc>
+              <a:buNone/>
+            </a:pPr>
+            <a:r>
+              <a:rPr lang="en-US" sz="950" dirty="0">
+                <a:solidFill>
+                  <a:srgbClr val="0F6E56"/>
+                </a:solidFill>
+                <a:latin typeface="Calibri" pitchFamily="34" charset="0"/>
+                <a:ea typeface="Calibri" pitchFamily="34" charset="-122"/>
+                <a:cs typeface="Calibri" pitchFamily="34" charset="-120"/>
+              </a:rPr>
+              <a:t>scenario, task, email, roleplay</a:t>
+            </a:r>
+            <a:endParaRPr lang="en-US" sz="1300" dirty="0"/>
+          </a:p>
+        </p:txBody>
+      </p:sp>
+      <p:sp>
+        <p:nvSpPr>
+          <p:cNvPr id="30" name="Shape 28"/>
+          <p:cNvSpPr/>
+          <p:nvPr/>
+        </p:nvSpPr>
+        <p:spPr>
+          <a:xfrm>
+            <a:off x="8366760" y="1984248"/>
+            <a:ext cx="3200400" cy="502920"/>
+          </a:xfrm>
+          <a:prstGeom prst="roundRect">
+            <a:avLst>
+              <a:gd name="adj" fmla="val 10909"/>
+            </a:avLst>
+          </a:prstGeom>
+          <a:solidFill>
+            <a:srgbClr val="E1F5EE"/>
+          </a:solidFill>
+          <a:ln w="12700">
+            <a:solidFill>
+              <a:srgbClr val="1D9E75"/>
+            </a:solidFill>
+            <a:prstDash val="solid"/>
+          </a:ln>
+          <a:effectLst>
+            <a:outerShdw blurRad="63500" dist="25400" dir="5400000" algn="bl" rotWithShape="0">
+              <a:srgbClr val="000000">
+                <a:alpha val="10000"/>
+              </a:srgbClr>
+            </a:outerShdw>
+          </a:effectLst>
+        </p:spPr>
+      </p:sp>
+      <p:sp>
+        <p:nvSpPr>
+          <p:cNvPr id="31" name="Text 29"/>
+          <p:cNvSpPr/>
+          <p:nvPr/>
+        </p:nvSpPr>
+        <p:spPr>
+          <a:xfrm>
+            <a:off x="8439912" y="1984248"/>
+            <a:ext cx="3054096" cy="502920"/>
+          </a:xfrm>
+          <a:prstGeom prst="rect">
+            <a:avLst/>
+          </a:prstGeom>
+          <a:noFill/>
+          <a:ln/>
+        </p:spPr>
+        <p:txBody>
+          <a:bodyPr wrap="square" lIns="25400" tIns="25400" rIns="25400" bIns="25400" rtlCol="0" anchor="ctr"/>
+          <a:lstStyle/>
+          <a:p>
+            <a:pPr marL="0" indent="0" algn="ctr">
+              <a:lnSpc>
+                <a:spcPct val="95000"/>
+              </a:lnSpc>
+              <a:buNone/>
+            </a:pPr>
+            <a:r>
+              <a:rPr lang="en-US" sz="1300" b="1" dirty="0">
+                <a:solidFill>
+                  <a:srgbClr val="085041"/>
+                </a:solidFill>
+                <a:latin typeface="Calibri" pitchFamily="34" charset="0"/>
+                <a:ea typeface="Calibri" pitchFamily="34" charset="-122"/>
+                <a:cs typeface="Calibri" pitchFamily="34" charset="-120"/>
+              </a:rPr>
+              <a:t>Citations &amp; sources</a:t>
+            </a:r>
+            <a:endParaRPr lang="en-US" sz="1300" dirty="0"/>
+          </a:p>
+          <a:p>
+            <a:pPr marL="0" indent="0" algn="ctr">
+              <a:lnSpc>
+                <a:spcPct val="95000"/>
+              </a:lnSpc>
+              <a:buNone/>
+            </a:pPr>
+            <a:r>
+              <a:rPr lang="en-US" sz="950" dirty="0">
+                <a:solidFill>
+                  <a:srgbClr val="0F6E56"/>
+                </a:solidFill>
+                <a:latin typeface="Calibri" pitchFamily="34" charset="0"/>
+                <a:ea typeface="Calibri" pitchFamily="34" charset="-122"/>
+                <a:cs typeface="Calibri" pitchFamily="34" charset="-120"/>
+              </a:rPr>
+              <a:t>grounded, traceable</a:t>
+            </a:r>
+            <a:endParaRPr lang="en-US" sz="1300" dirty="0"/>
+          </a:p>
+        </p:txBody>
+      </p:sp>
+      <p:sp>
+        <p:nvSpPr>
+          <p:cNvPr id="32" name="Shape 30"/>
+          <p:cNvSpPr/>
+          <p:nvPr/>
+        </p:nvSpPr>
+        <p:spPr>
+          <a:xfrm>
+            <a:off x="8366760" y="2615184"/>
+            <a:ext cx="3200400" cy="502920"/>
+          </a:xfrm>
+          <a:prstGeom prst="roundRect">
+            <a:avLst>
+              <a:gd name="adj" fmla="val 10909"/>
+            </a:avLst>
+          </a:prstGeom>
+          <a:solidFill>
+            <a:srgbClr val="E1F5EE"/>
+          </a:solidFill>
+          <a:ln w="12700">
+            <a:solidFill>
+              <a:srgbClr val="1D9E75"/>
+            </a:solidFill>
+            <a:prstDash val="solid"/>
+          </a:ln>
+          <a:effectLst>
+            <a:outerShdw blurRad="63500" dist="25400" dir="5400000" algn="bl" rotWithShape="0">
+              <a:srgbClr val="000000">
+                <a:alpha val="10000"/>
+              </a:srgbClr>
+            </a:outerShdw>
+          </a:effectLst>
+        </p:spPr>
+      </p:sp>
+      <p:sp>
+        <p:nvSpPr>
+          <p:cNvPr id="33" name="Text 31"/>
+          <p:cNvSpPr/>
+          <p:nvPr/>
+        </p:nvSpPr>
+        <p:spPr>
+          <a:xfrm>
+            <a:off x="8439912" y="2615184"/>
+            <a:ext cx="3054096" cy="502920"/>
+          </a:xfrm>
+          <a:prstGeom prst="rect">
+            <a:avLst/>
+          </a:prstGeom>
+          <a:noFill/>
+          <a:ln/>
+        </p:spPr>
+        <p:txBody>
+          <a:bodyPr wrap="square" lIns="25400" tIns="25400" rIns="25400" bIns="25400" rtlCol="0" anchor="ctr"/>
+          <a:lstStyle/>
+          <a:p>
+            <a:pPr marL="0" indent="0" algn="ctr">
+              <a:lnSpc>
+                <a:spcPct val="95000"/>
+              </a:lnSpc>
+              <a:buNone/>
+            </a:pPr>
+            <a:r>
+              <a:rPr lang="en-US" sz="1300" b="1" dirty="0">
+                <a:solidFill>
+                  <a:srgbClr val="085041"/>
+                </a:solidFill>
+                <a:latin typeface="Calibri" pitchFamily="34" charset="0"/>
+                <a:ea typeface="Calibri" pitchFamily="34" charset="-122"/>
+                <a:cs typeface="Calibri" pitchFamily="34" charset="-120"/>
+              </a:rPr>
+              <a:t>Educator dashboard</a:t>
+            </a:r>
+            <a:endParaRPr lang="en-US" sz="1300" dirty="0"/>
+          </a:p>
+          <a:p>
+            <a:pPr marL="0" indent="0" algn="ctr">
+              <a:lnSpc>
+                <a:spcPct val="95000"/>
+              </a:lnSpc>
+              <a:buNone/>
+            </a:pPr>
+            <a:r>
+              <a:rPr lang="en-US" sz="950" dirty="0">
+                <a:solidFill>
+                  <a:srgbClr val="0F6E56"/>
+                </a:solidFill>
+                <a:latin typeface="Calibri" pitchFamily="34" charset="0"/>
+                <a:ea typeface="Calibri" pitchFamily="34" charset="-122"/>
+                <a:cs typeface="Calibri" pitchFamily="34" charset="-120"/>
+              </a:rPr>
+              <a:t>review &amp; validate</a:t>
+            </a:r>
+            <a:endParaRPr lang="en-US" sz="1300" dirty="0"/>
+          </a:p>
+        </p:txBody>
+      </p:sp>
+      <p:sp>
+        <p:nvSpPr>
+          <p:cNvPr id="34" name="Shape 32"/>
+          <p:cNvSpPr/>
+          <p:nvPr/>
+        </p:nvSpPr>
+        <p:spPr>
+          <a:xfrm>
+            <a:off x="8366760" y="3246120"/>
+            <a:ext cx="3200400" cy="502920"/>
+          </a:xfrm>
+          <a:prstGeom prst="roundRect">
+            <a:avLst>
+              <a:gd name="adj" fmla="val 10909"/>
+            </a:avLst>
+          </a:prstGeom>
+          <a:solidFill>
+            <a:srgbClr val="E1F5EE"/>
+          </a:solidFill>
+          <a:ln w="12700">
+            <a:solidFill>
+              <a:srgbClr val="1D9E75"/>
+            </a:solidFill>
+            <a:prstDash val="solid"/>
+          </a:ln>
+          <a:effectLst>
+            <a:outerShdw blurRad="63500" dist="25400" dir="5400000" algn="bl" rotWithShape="0">
+              <a:srgbClr val="000000">
+                <a:alpha val="10000"/>
+              </a:srgbClr>
+            </a:outerShdw>
+          </a:effectLst>
+        </p:spPr>
+      </p:sp>
+      <p:sp>
+        <p:nvSpPr>
+          <p:cNvPr id="35" name="Text 33"/>
+          <p:cNvSpPr/>
+          <p:nvPr/>
+        </p:nvSpPr>
+        <p:spPr>
+          <a:xfrm>
+            <a:off x="8439912" y="3246120"/>
+            <a:ext cx="3054096" cy="502920"/>
+          </a:xfrm>
+          <a:prstGeom prst="rect">
+            <a:avLst/>
+          </a:prstGeom>
+          <a:noFill/>
+          <a:ln/>
+        </p:spPr>
+        <p:txBody>
+          <a:bodyPr wrap="square" lIns="25400" tIns="25400" rIns="25400" bIns="25400" rtlCol="0" anchor="ctr"/>
+          <a:lstStyle/>
+          <a:p>
+            <a:pPr marL="0" indent="0" algn="ctr">
+              <a:lnSpc>
+                <a:spcPct val="95000"/>
+              </a:lnSpc>
+              <a:buNone/>
+            </a:pPr>
+            <a:r>
+              <a:rPr lang="en-US" sz="1300" b="1" dirty="0">
+                <a:solidFill>
+                  <a:srgbClr val="085041"/>
+                </a:solidFill>
+                <a:latin typeface="Calibri" pitchFamily="34" charset="0"/>
+                <a:ea typeface="Calibri" pitchFamily="34" charset="-122"/>
+                <a:cs typeface="Calibri" pitchFamily="34" charset="-120"/>
+              </a:rPr>
+              <a:t>Follow-up chat</a:t>
+            </a:r>
+            <a:endParaRPr lang="en-US" sz="1300" dirty="0"/>
+          </a:p>
+          <a:p>
+            <a:pPr marL="0" indent="0" algn="ctr">
+              <a:lnSpc>
+                <a:spcPct val="95000"/>
+              </a:lnSpc>
+              <a:buNone/>
+            </a:pPr>
+            <a:r>
+              <a:rPr lang="en-US" sz="950" dirty="0">
+                <a:solidFill>
+                  <a:srgbClr val="0F6E56"/>
+                </a:solidFill>
+                <a:latin typeface="Calibri" pitchFamily="34" charset="0"/>
+                <a:ea typeface="Calibri" pitchFamily="34" charset="-122"/>
+                <a:cs typeface="Calibri" pitchFamily="34" charset="-120"/>
+              </a:rPr>
+              <a:t>refine outputs</a:t>
+            </a:r>
+            <a:endParaRPr lang="en-US" sz="1300" dirty="0"/>
+          </a:p>
+        </p:txBody>
+      </p:sp>
+      <p:sp>
+        <p:nvSpPr>
+          <p:cNvPr id="36" name="Shape 34"/>
+          <p:cNvSpPr/>
+          <p:nvPr/>
+        </p:nvSpPr>
+        <p:spPr>
+          <a:xfrm>
+            <a:off x="3474720" y="1920240"/>
+            <a:ext cx="274320" cy="0"/>
+          </a:xfrm>
+          <a:prstGeom prst="line">
+            <a:avLst/>
+          </a:prstGeom>
+          <a:noFill/>
+          <a:ln w="22225">
+            <a:solidFill>
+              <a:srgbClr val="534AB7"/>
+            </a:solidFill>
+            <a:prstDash val="solid"/>
+            <a:tailEnd type="triangle"/>
+          </a:ln>
+        </p:spPr>
+      </p:sp>
+      <p:sp>
+        <p:nvSpPr>
+          <p:cNvPr id="37" name="Shape 35"/>
+          <p:cNvSpPr/>
+          <p:nvPr/>
+        </p:nvSpPr>
+        <p:spPr>
+          <a:xfrm>
+            <a:off x="7955280" y="1920240"/>
+            <a:ext cx="274320" cy="0"/>
+          </a:xfrm>
+          <a:prstGeom prst="line">
+            <a:avLst/>
+          </a:prstGeom>
+          <a:noFill/>
+          <a:ln w="22225">
+            <a:solidFill>
+              <a:srgbClr val="534AB7"/>
+            </a:solidFill>
+            <a:prstDash val="solid"/>
+            <a:tailEnd type="triangle"/>
+          </a:ln>
+        </p:spPr>
+      </p:sp>
+      <p:sp>
+        <p:nvSpPr>
+          <p:cNvPr id="38" name="Shape 36"/>
+          <p:cNvSpPr/>
+          <p:nvPr/>
+        </p:nvSpPr>
+        <p:spPr>
+          <a:xfrm>
+            <a:off x="457200" y="4498848"/>
+            <a:ext cx="11247120" cy="941832"/>
+          </a:xfrm>
+          <a:prstGeom prst="roundRect">
+            <a:avLst>
+              <a:gd name="adj" fmla="val 7767"/>
+            </a:avLst>
+          </a:prstGeom>
+          <a:solidFill>
+            <a:srgbClr val="F7F6F1"/>
+          </a:solidFill>
+          <a:ln w="12700">
+            <a:solidFill>
+              <a:srgbClr val="C9C7BE"/>
+            </a:solidFill>
+            <a:prstDash val="dash"/>
+          </a:ln>
+        </p:spPr>
+      </p:sp>
+      <p:sp>
+        <p:nvSpPr>
+          <p:cNvPr id="39" name="Text 37"/>
+          <p:cNvSpPr/>
+          <p:nvPr/>
+        </p:nvSpPr>
+        <p:spPr>
+          <a:xfrm>
+            <a:off x="621792" y="4553712"/>
+            <a:ext cx="10917936" cy="219456"/>
+          </a:xfrm>
+          <a:prstGeom prst="rect">
+            <a:avLst/>
+          </a:prstGeom>
+          <a:noFill/>
+          <a:ln/>
+        </p:spPr>
+        <p:txBody>
+          <a:bodyPr wrap="square" lIns="0" tIns="0" rIns="0" bIns="0" rtlCol="0" anchor="ctr"/>
+          <a:lstStyle/>
+          <a:p>
+            <a:pPr marL="0" indent="0" algn="l">
+              <a:buNone/>
+            </a:pPr>
+            <a:r>
+              <a:rPr lang="en-US" sz="1300" b="1" dirty="0">
+                <a:solidFill>
+                  <a:srgbClr val="2C2C2A"/>
+                </a:solidFill>
+                <a:latin typeface="Calibri" pitchFamily="34" charset="0"/>
+                <a:ea typeface="Calibri" pitchFamily="34" charset="-122"/>
+                <a:cs typeface="Calibri" pitchFamily="34" charset="-120"/>
+              </a:rPr>
+              <a:t>Knowledge ingestion pipeline  ·  runs in the background to build the retrieval store</a:t>
+            </a:r>
+            <a:endParaRPr lang="en-US" sz="1300" dirty="0"/>
+          </a:p>
+        </p:txBody>
+      </p:sp>
+      <p:sp>
+        <p:nvSpPr>
+          <p:cNvPr id="40" name="Shape 38"/>
+          <p:cNvSpPr/>
+          <p:nvPr/>
+        </p:nvSpPr>
+        <p:spPr>
+          <a:xfrm>
+            <a:off x="804672" y="4864608"/>
+            <a:ext cx="1965960" cy="457200"/>
+          </a:xfrm>
+          <a:prstGeom prst="roundRect">
+            <a:avLst>
+              <a:gd name="adj" fmla="val 12000"/>
+            </a:avLst>
+          </a:prstGeom>
+          <a:solidFill>
+            <a:srgbClr val="F1EFE8"/>
+          </a:solidFill>
+          <a:ln w="12700">
+            <a:solidFill>
+              <a:srgbClr val="888780"/>
+            </a:solidFill>
+            <a:prstDash val="solid"/>
+          </a:ln>
+          <a:effectLst>
+            <a:outerShdw blurRad="63500" dist="25400" dir="5400000" algn="bl" rotWithShape="0">
+              <a:srgbClr val="000000">
+                <a:alpha val="10000"/>
+              </a:srgbClr>
+            </a:outerShdw>
+          </a:effectLst>
+        </p:spPr>
+      </p:sp>
+      <p:sp>
+        <p:nvSpPr>
+          <p:cNvPr id="41" name="Text 39"/>
+          <p:cNvSpPr/>
+          <p:nvPr/>
+        </p:nvSpPr>
+        <p:spPr>
+          <a:xfrm>
+            <a:off x="877824" y="4864608"/>
+            <a:ext cx="1819656" cy="457200"/>
+          </a:xfrm>
+          <a:prstGeom prst="rect">
+            <a:avLst/>
+          </a:prstGeom>
+          <a:noFill/>
+          <a:ln/>
+        </p:spPr>
+        <p:txBody>
+          <a:bodyPr wrap="square" lIns="25400" tIns="25400" rIns="25400" bIns="25400" rtlCol="0" anchor="ctr"/>
+          <a:lstStyle/>
+          <a:p>
+            <a:pPr marL="0" indent="0" algn="ctr">
+              <a:lnSpc>
+                <a:spcPct val="95000"/>
+              </a:lnSpc>
+              <a:buNone/>
+            </a:pPr>
+            <a:r>
+              <a:rPr lang="en-US" sz="1100" b="1" dirty="0">
+                <a:solidFill>
+                  <a:srgbClr val="2C2C2A"/>
+                </a:solidFill>
+                <a:latin typeface="Calibri" pitchFamily="34" charset="0"/>
+                <a:ea typeface="Calibri" pitchFamily="34" charset="-122"/>
+                <a:cs typeface="Calibri" pitchFamily="34" charset="-120"/>
+              </a:rPr>
+              <a:t>Source docs</a:t>
+            </a:r>
+            <a:endParaRPr lang="en-US" sz="1100" dirty="0"/>
+          </a:p>
+          <a:p>
+            <a:pPr marL="0" indent="0" algn="ctr">
+              <a:lnSpc>
+                <a:spcPct val="95000"/>
+              </a:lnSpc>
+              <a:buNone/>
+            </a:pPr>
+            <a:r>
+              <a:rPr lang="en-US" sz="900" dirty="0">
+                <a:solidFill>
+                  <a:srgbClr val="444441"/>
+                </a:solidFill>
+                <a:latin typeface="Calibri" pitchFamily="34" charset="0"/>
+                <a:ea typeface="Calibri" pitchFamily="34" charset="-122"/>
+                <a:cs typeface="Calibri" pitchFamily="34" charset="-120"/>
+              </a:rPr>
+              <a:t>Amazon S3</a:t>
+            </a:r>
+            <a:endParaRPr lang="en-US" sz="1100" dirty="0"/>
+          </a:p>
+        </p:txBody>
+      </p:sp>
+      <p:sp>
+        <p:nvSpPr>
+          <p:cNvPr id="42" name="Shape 40"/>
+          <p:cNvSpPr/>
+          <p:nvPr/>
+        </p:nvSpPr>
+        <p:spPr>
+          <a:xfrm>
+            <a:off x="2953512" y="4864608"/>
+            <a:ext cx="1965960" cy="457200"/>
+          </a:xfrm>
+          <a:prstGeom prst="roundRect">
+            <a:avLst>
+              <a:gd name="adj" fmla="val 12000"/>
+            </a:avLst>
+          </a:prstGeom>
+          <a:solidFill>
+            <a:srgbClr val="F1EFE8"/>
+          </a:solidFill>
+          <a:ln w="12700">
+            <a:solidFill>
+              <a:srgbClr val="888780"/>
+            </a:solidFill>
+            <a:prstDash val="solid"/>
+          </a:ln>
+          <a:effectLst>
+            <a:outerShdw blurRad="63500" dist="25400" dir="5400000" algn="bl" rotWithShape="0">
+              <a:srgbClr val="000000">
+                <a:alpha val="10000"/>
+              </a:srgbClr>
+            </a:outerShdw>
+          </a:effectLst>
+        </p:spPr>
+      </p:sp>
+      <p:sp>
+        <p:nvSpPr>
+          <p:cNvPr id="43" name="Text 41"/>
+          <p:cNvSpPr/>
+          <p:nvPr/>
+        </p:nvSpPr>
+        <p:spPr>
+          <a:xfrm>
+            <a:off x="3026664" y="4864608"/>
+            <a:ext cx="1819656" cy="457200"/>
+          </a:xfrm>
+          <a:prstGeom prst="rect">
+            <a:avLst/>
+          </a:prstGeom>
+          <a:noFill/>
+          <a:ln/>
+        </p:spPr>
+        <p:txBody>
+          <a:bodyPr wrap="square" lIns="25400" tIns="25400" rIns="25400" bIns="25400" rtlCol="0" anchor="ctr"/>
+          <a:lstStyle/>
+          <a:p>
+            <a:pPr marL="0" indent="0" algn="ctr">
+              <a:lnSpc>
+                <a:spcPct val="95000"/>
+              </a:lnSpc>
+              <a:buNone/>
+            </a:pPr>
+            <a:r>
+              <a:rPr lang="en-US" sz="1100" b="1" dirty="0">
+                <a:solidFill>
+                  <a:srgbClr val="2C2C2A"/>
+                </a:solidFill>
+                <a:latin typeface="Calibri" pitchFamily="34" charset="0"/>
+                <a:ea typeface="Calibri" pitchFamily="34" charset="-122"/>
+                <a:cs typeface="Calibri" pitchFamily="34" charset="-120"/>
+              </a:rPr>
+              <a:t>Extract</a:t>
+            </a:r>
+            <a:endParaRPr lang="en-US" sz="1100" dirty="0"/>
+          </a:p>
+          <a:p>
+            <a:pPr marL="0" indent="0" algn="ctr">
+              <a:lnSpc>
+                <a:spcPct val="95000"/>
+              </a:lnSpc>
+              <a:buNone/>
+            </a:pPr>
+            <a:r>
+              <a:rPr lang="en-US" sz="900" dirty="0">
+                <a:solidFill>
+                  <a:srgbClr val="444441"/>
+                </a:solidFill>
+                <a:latin typeface="Calibri" pitchFamily="34" charset="0"/>
+                <a:ea typeface="Calibri" pitchFamily="34" charset="-122"/>
+                <a:cs typeface="Calibri" pitchFamily="34" charset="-120"/>
+              </a:rPr>
+              <a:t>Textract / BDA</a:t>
+            </a:r>
+            <a:endParaRPr lang="en-US" sz="1100" dirty="0"/>
+          </a:p>
+        </p:txBody>
+      </p:sp>
+      <p:sp>
+        <p:nvSpPr>
+          <p:cNvPr id="44" name="Shape 42"/>
+          <p:cNvSpPr/>
+          <p:nvPr/>
+        </p:nvSpPr>
+        <p:spPr>
+          <a:xfrm>
+            <a:off x="5102352" y="4864608"/>
+            <a:ext cx="1965960" cy="457200"/>
+          </a:xfrm>
+          <a:prstGeom prst="roundRect">
+            <a:avLst>
+              <a:gd name="adj" fmla="val 12000"/>
+            </a:avLst>
+          </a:prstGeom>
+          <a:solidFill>
+            <a:srgbClr val="F1EFE8"/>
+          </a:solidFill>
+          <a:ln w="12700">
+            <a:solidFill>
+              <a:srgbClr val="888780"/>
+            </a:solidFill>
+            <a:prstDash val="solid"/>
+          </a:ln>
+          <a:effectLst>
+            <a:outerShdw blurRad="63500" dist="25400" dir="5400000" algn="bl" rotWithShape="0">
+              <a:srgbClr val="000000">
+                <a:alpha val="10000"/>
+              </a:srgbClr>
+            </a:outerShdw>
+          </a:effectLst>
+        </p:spPr>
+      </p:sp>
+      <p:sp>
+        <p:nvSpPr>
+          <p:cNvPr id="45" name="Text 43"/>
+          <p:cNvSpPr/>
+          <p:nvPr/>
+        </p:nvSpPr>
+        <p:spPr>
+          <a:xfrm>
+            <a:off x="5175504" y="4864608"/>
+            <a:ext cx="1819656" cy="457200"/>
+          </a:xfrm>
+          <a:prstGeom prst="rect">
+            <a:avLst/>
+          </a:prstGeom>
+          <a:noFill/>
+          <a:ln/>
+        </p:spPr>
+        <p:txBody>
+          <a:bodyPr wrap="square" lIns="25400" tIns="25400" rIns="25400" bIns="25400" rtlCol="0" anchor="ctr"/>
+          <a:lstStyle/>
+          <a:p>
+            <a:pPr marL="0" indent="0" algn="ctr">
+              <a:lnSpc>
+                <a:spcPct val="95000"/>
+              </a:lnSpc>
+              <a:buNone/>
+            </a:pPr>
+            <a:r>
+              <a:rPr lang="en-US" sz="1100" b="1" dirty="0">
+                <a:solidFill>
+                  <a:srgbClr val="2C2C2A"/>
+                </a:solidFill>
+                <a:latin typeface="Calibri" pitchFamily="34" charset="0"/>
+                <a:ea typeface="Calibri" pitchFamily="34" charset="-122"/>
+                <a:cs typeface="Calibri" pitchFamily="34" charset="-120"/>
+              </a:rPr>
+              <a:t>Chunk</a:t>
+            </a:r>
+            <a:endParaRPr lang="en-US" sz="1100" dirty="0"/>
+          </a:p>
+          <a:p>
+            <a:pPr marL="0" indent="0" algn="ctr">
+              <a:lnSpc>
+                <a:spcPct val="95000"/>
+              </a:lnSpc>
+              <a:buNone/>
+            </a:pPr>
+            <a:r>
+              <a:rPr lang="en-US" sz="900" dirty="0">
+                <a:solidFill>
+                  <a:srgbClr val="444441"/>
+                </a:solidFill>
+                <a:latin typeface="Calibri" pitchFamily="34" charset="0"/>
+                <a:ea typeface="Calibri" pitchFamily="34" charset="-122"/>
+                <a:cs typeface="Calibri" pitchFamily="34" charset="-120"/>
+              </a:rPr>
+              <a:t>AWS Lambda</a:t>
+            </a:r>
+            <a:endParaRPr lang="en-US" sz="1100" dirty="0"/>
+          </a:p>
+        </p:txBody>
+      </p:sp>
+      <p:sp>
+        <p:nvSpPr>
+          <p:cNvPr id="46" name="Shape 44"/>
+          <p:cNvSpPr/>
+          <p:nvPr/>
+        </p:nvSpPr>
+        <p:spPr>
+          <a:xfrm>
+            <a:off x="7251192" y="4864608"/>
+            <a:ext cx="1965960" cy="457200"/>
+          </a:xfrm>
+          <a:prstGeom prst="roundRect">
+            <a:avLst>
+              <a:gd name="adj" fmla="val 12000"/>
+            </a:avLst>
+          </a:prstGeom>
+          <a:solidFill>
+            <a:srgbClr val="F1EFE8"/>
+          </a:solidFill>
+          <a:ln w="12700">
+            <a:solidFill>
+              <a:srgbClr val="888780"/>
+            </a:solidFill>
+            <a:prstDash val="solid"/>
+          </a:ln>
+          <a:effectLst>
+            <a:outerShdw blurRad="63500" dist="25400" dir="5400000" algn="bl" rotWithShape="0">
+              <a:srgbClr val="000000">
+                <a:alpha val="10000"/>
+              </a:srgbClr>
+            </a:outerShdw>
+          </a:effectLst>
+        </p:spPr>
+      </p:sp>
+      <p:sp>
+        <p:nvSpPr>
+          <p:cNvPr id="47" name="Text 45"/>
+          <p:cNvSpPr/>
+          <p:nvPr/>
+        </p:nvSpPr>
+        <p:spPr>
+          <a:xfrm>
+            <a:off x="7324344" y="4864608"/>
+            <a:ext cx="1819656" cy="457200"/>
+          </a:xfrm>
+          <a:prstGeom prst="rect">
+            <a:avLst/>
+          </a:prstGeom>
+          <a:noFill/>
+          <a:ln/>
+        </p:spPr>
+        <p:txBody>
+          <a:bodyPr wrap="square" lIns="25400" tIns="25400" rIns="25400" bIns="25400" rtlCol="0" anchor="ctr"/>
+          <a:lstStyle/>
+          <a:p>
+            <a:pPr marL="0" indent="0" algn="ctr">
+              <a:lnSpc>
+                <a:spcPct val="95000"/>
+              </a:lnSpc>
+              <a:buNone/>
+            </a:pPr>
+            <a:r>
+              <a:rPr lang="en-US" sz="1100" b="1" dirty="0">
+                <a:solidFill>
+                  <a:srgbClr val="2C2C2A"/>
+                </a:solidFill>
+                <a:latin typeface="Calibri" pitchFamily="34" charset="0"/>
+                <a:ea typeface="Calibri" pitchFamily="34" charset="-122"/>
+                <a:cs typeface="Calibri" pitchFamily="34" charset="-120"/>
+              </a:rPr>
+              <a:t>Embed</a:t>
+            </a:r>
+            <a:endParaRPr lang="en-US" sz="1100" dirty="0"/>
+          </a:p>
+          <a:p>
+            <a:pPr marL="0" indent="0" algn="ctr">
+              <a:lnSpc>
+                <a:spcPct val="95000"/>
+              </a:lnSpc>
+              <a:buNone/>
+            </a:pPr>
+            <a:r>
+              <a:rPr lang="en-US" sz="900" dirty="0">
+                <a:solidFill>
+                  <a:srgbClr val="444441"/>
+                </a:solidFill>
+                <a:latin typeface="Calibri" pitchFamily="34" charset="0"/>
+                <a:ea typeface="Calibri" pitchFamily="34" charset="-122"/>
+                <a:cs typeface="Calibri" pitchFamily="34" charset="-120"/>
+              </a:rPr>
+              <a:t>Titan (Bedrock)</a:t>
+            </a:r>
+            <a:endParaRPr lang="en-US" sz="1100" dirty="0"/>
+          </a:p>
+        </p:txBody>
+      </p:sp>
+      <p:sp>
+        <p:nvSpPr>
+          <p:cNvPr id="48" name="Shape 46"/>
+          <p:cNvSpPr/>
+          <p:nvPr/>
+        </p:nvSpPr>
+        <p:spPr>
+          <a:xfrm>
+            <a:off x="9400032" y="4864608"/>
+            <a:ext cx="1965960" cy="457200"/>
+          </a:xfrm>
+          <a:prstGeom prst="roundRect">
+            <a:avLst>
+              <a:gd name="adj" fmla="val 12000"/>
+            </a:avLst>
+          </a:prstGeom>
+          <a:solidFill>
+            <a:srgbClr val="F1EFE8"/>
+          </a:solidFill>
+          <a:ln w="12700">
+            <a:solidFill>
+              <a:srgbClr val="888780"/>
+            </a:solidFill>
+            <a:prstDash val="solid"/>
+          </a:ln>
+          <a:effectLst>
+            <a:outerShdw blurRad="63500" dist="25400" dir="5400000" algn="bl" rotWithShape="0">
+              <a:srgbClr val="000000">
+                <a:alpha val="10000"/>
+              </a:srgbClr>
+            </a:outerShdw>
+          </a:effectLst>
+        </p:spPr>
+      </p:sp>
+      <p:sp>
+        <p:nvSpPr>
+          <p:cNvPr id="49" name="Text 47"/>
+          <p:cNvSpPr/>
+          <p:nvPr/>
+        </p:nvSpPr>
+        <p:spPr>
+          <a:xfrm>
+            <a:off x="9473184" y="4864608"/>
+            <a:ext cx="1819656" cy="457200"/>
+          </a:xfrm>
+          <a:prstGeom prst="rect">
+            <a:avLst/>
+          </a:prstGeom>
+          <a:noFill/>
+          <a:ln/>
+        </p:spPr>
+        <p:txBody>
+          <a:bodyPr wrap="square" lIns="25400" tIns="25400" rIns="25400" bIns="25400" rtlCol="0" anchor="ctr"/>
+          <a:lstStyle/>
+          <a:p>
+            <a:pPr marL="0" indent="0" algn="ctr">
+              <a:lnSpc>
+                <a:spcPct val="95000"/>
+              </a:lnSpc>
+              <a:buNone/>
+            </a:pPr>
+            <a:r>
+              <a:rPr lang="en-US" sz="1100" b="1" dirty="0">
+                <a:solidFill>
+                  <a:srgbClr val="2C2C2A"/>
+                </a:solidFill>
+                <a:latin typeface="Calibri" pitchFamily="34" charset="0"/>
+                <a:ea typeface="Calibri" pitchFamily="34" charset="-122"/>
+                <a:cs typeface="Calibri" pitchFamily="34" charset="-120"/>
+              </a:rPr>
+              <a:t>Index</a:t>
+            </a:r>
+            <a:endParaRPr lang="en-US" sz="1100" dirty="0"/>
+          </a:p>
+          <a:p>
+            <a:pPr marL="0" indent="0" algn="ctr">
+              <a:lnSpc>
+                <a:spcPct val="95000"/>
+              </a:lnSpc>
+              <a:buNone/>
+            </a:pPr>
+            <a:r>
+              <a:rPr lang="en-US" sz="900" dirty="0">
+                <a:solidFill>
+                  <a:srgbClr val="444441"/>
+                </a:solidFill>
+                <a:latin typeface="Calibri" pitchFamily="34" charset="0"/>
+                <a:ea typeface="Calibri" pitchFamily="34" charset="-122"/>
+                <a:cs typeface="Calibri" pitchFamily="34" charset="-120"/>
+              </a:rPr>
+              <a:t>OpenSearch</a:t>
+            </a:r>
+            <a:endParaRPr lang="en-US" sz="1100" dirty="0"/>
+          </a:p>
+        </p:txBody>
+      </p:sp>
+      <p:sp>
+        <p:nvSpPr>
+          <p:cNvPr id="50" name="Shape 48"/>
+          <p:cNvSpPr/>
+          <p:nvPr/>
+        </p:nvSpPr>
+        <p:spPr>
+          <a:xfrm>
+            <a:off x="2770632" y="5093208"/>
+            <a:ext cx="182880" cy="0"/>
+          </a:xfrm>
+          <a:prstGeom prst="line">
+            <a:avLst/>
+          </a:prstGeom>
+          <a:noFill/>
+          <a:ln w="22225">
+            <a:solidFill>
+              <a:srgbClr val="888780"/>
+            </a:solidFill>
+            <a:prstDash val="solid"/>
+            <a:tailEnd type="triangle"/>
+          </a:ln>
+        </p:spPr>
+      </p:sp>
+      <p:sp>
+        <p:nvSpPr>
+          <p:cNvPr id="51" name="Shape 49"/>
+          <p:cNvSpPr/>
+          <p:nvPr/>
+        </p:nvSpPr>
+        <p:spPr>
+          <a:xfrm>
+            <a:off x="4919472" y="5093208"/>
+            <a:ext cx="182880" cy="0"/>
+          </a:xfrm>
+          <a:prstGeom prst="line">
+            <a:avLst/>
+          </a:prstGeom>
+          <a:noFill/>
+          <a:ln w="22225">
+            <a:solidFill>
+              <a:srgbClr val="888780"/>
+            </a:solidFill>
+            <a:prstDash val="solid"/>
+            <a:tailEnd type="triangle"/>
+          </a:ln>
+        </p:spPr>
+      </p:sp>
+      <p:sp>
+        <p:nvSpPr>
+          <p:cNvPr id="52" name="Shape 50"/>
+          <p:cNvSpPr/>
+          <p:nvPr/>
+        </p:nvSpPr>
+        <p:spPr>
+          <a:xfrm>
+            <a:off x="7068312" y="5093208"/>
+            <a:ext cx="182880" cy="0"/>
+          </a:xfrm>
+          <a:prstGeom prst="line">
+            <a:avLst/>
+          </a:prstGeom>
+          <a:noFill/>
+          <a:ln w="22225">
+            <a:solidFill>
+              <a:srgbClr val="888780"/>
+            </a:solidFill>
+            <a:prstDash val="solid"/>
+            <a:tailEnd type="triangle"/>
+          </a:ln>
+        </p:spPr>
+      </p:sp>
+      <p:sp>
+        <p:nvSpPr>
+          <p:cNvPr id="53" name="Shape 51"/>
+          <p:cNvSpPr/>
+          <p:nvPr/>
+        </p:nvSpPr>
+        <p:spPr>
+          <a:xfrm>
+            <a:off x="9217152" y="5093208"/>
+            <a:ext cx="182880" cy="0"/>
+          </a:xfrm>
+          <a:prstGeom prst="line">
+            <a:avLst/>
+          </a:prstGeom>
+          <a:noFill/>
+          <a:ln w="22225">
+            <a:solidFill>
+              <a:srgbClr val="888780"/>
+            </a:solidFill>
+            <a:prstDash val="solid"/>
+            <a:tailEnd type="triangle"/>
+          </a:ln>
+        </p:spPr>
+      </p:sp>
+      <p:sp>
+        <p:nvSpPr>
+          <p:cNvPr id="54" name="Shape 52"/>
+          <p:cNvSpPr/>
+          <p:nvPr/>
+        </p:nvSpPr>
+        <p:spPr>
+          <a:xfrm>
+            <a:off x="5852160" y="4498848"/>
+            <a:ext cx="0" cy="0"/>
+          </a:xfrm>
+          <a:prstGeom prst="line">
+            <a:avLst/>
+          </a:prstGeom>
+          <a:noFill/>
+          <a:ln w="22225">
+            <a:solidFill>
+              <a:srgbClr val="888780"/>
+            </a:solidFill>
+            <a:prstDash val="dash"/>
+            <a:tailEnd type="triangle"/>
+          </a:ln>
+        </p:spPr>
+      </p:sp>
+      <p:sp>
+        <p:nvSpPr>
+          <p:cNvPr id="55" name="Shape 53"/>
+          <p:cNvSpPr/>
+          <p:nvPr/>
+        </p:nvSpPr>
+        <p:spPr>
+          <a:xfrm>
+            <a:off x="457200" y="5550408"/>
+            <a:ext cx="11247120" cy="731520"/>
+          </a:xfrm>
+          <a:prstGeom prst="roundRect">
+            <a:avLst>
+              <a:gd name="adj" fmla="val 10000"/>
+            </a:avLst>
+          </a:prstGeom>
+          <a:solidFill>
+            <a:srgbClr val="F7F6F1"/>
+          </a:solidFill>
+          <a:ln w="12700">
+            <a:solidFill>
+              <a:srgbClr val="C9C7BE"/>
+            </a:solidFill>
+            <a:prstDash val="solid"/>
+          </a:ln>
+        </p:spPr>
+      </p:sp>
+      <p:sp>
+        <p:nvSpPr>
+          <p:cNvPr id="56" name="Text 54"/>
+          <p:cNvSpPr/>
+          <p:nvPr/>
+        </p:nvSpPr>
+        <p:spPr>
+          <a:xfrm>
+            <a:off x="621792" y="5605272"/>
+            <a:ext cx="10917936" cy="201168"/>
+          </a:xfrm>
+          <a:prstGeom prst="rect">
+            <a:avLst/>
+          </a:prstGeom>
+          <a:noFill/>
+          <a:ln/>
+        </p:spPr>
+        <p:txBody>
+          <a:bodyPr wrap="square" lIns="0" tIns="0" rIns="0" bIns="0" rtlCol="0" anchor="ctr"/>
+          <a:lstStyle/>
+          <a:p>
+            <a:pPr marL="0" indent="0" algn="l">
+              <a:buNone/>
+            </a:pPr>
+            <a:r>
+              <a:rPr lang="en-US" sz="1300" b="1" dirty="0">
+                <a:solidFill>
+                  <a:srgbClr val="2C2C2A"/>
+                </a:solidFill>
+                <a:latin typeface="Calibri" pitchFamily="34" charset="0"/>
+                <a:ea typeface="Calibri" pitchFamily="34" charset="-122"/>
+                <a:cs typeface="Calibri" pitchFamily="34" charset="-120"/>
+              </a:rPr>
+              <a:t>Cross-cutting services</a:t>
+            </a:r>
+            <a:endParaRPr lang="en-US" sz="1300" dirty="0"/>
+          </a:p>
+        </p:txBody>
+      </p:sp>
+      <p:sp>
+        <p:nvSpPr>
+          <p:cNvPr id="57" name="Shape 55"/>
+          <p:cNvSpPr/>
+          <p:nvPr/>
+        </p:nvSpPr>
+        <p:spPr>
+          <a:xfrm>
+            <a:off x="804672" y="5815584"/>
+            <a:ext cx="1965960" cy="384048"/>
+          </a:xfrm>
+          <a:prstGeom prst="roundRect">
+            <a:avLst>
+              <a:gd name="adj" fmla="val 14286"/>
+            </a:avLst>
+          </a:prstGeom>
+          <a:solidFill>
+            <a:srgbClr val="F1EFE8"/>
+          </a:solidFill>
+          <a:ln w="12700">
+            <a:solidFill>
+              <a:srgbClr val="888780"/>
+            </a:solidFill>
+            <a:prstDash val="solid"/>
+          </a:ln>
+          <a:effectLst>
+            <a:outerShdw blurRad="63500" dist="25400" dir="5400000" algn="bl" rotWithShape="0">
+              <a:srgbClr val="000000">
+                <a:alpha val="10000"/>
+              </a:srgbClr>
+            </a:outerShdw>
+          </a:effectLst>
+        </p:spPr>
+      </p:sp>
+      <p:sp>
+        <p:nvSpPr>
+          <p:cNvPr id="58" name="Text 56"/>
+          <p:cNvSpPr/>
+          <p:nvPr/>
+        </p:nvSpPr>
+        <p:spPr>
+          <a:xfrm>
+            <a:off x="877824" y="5815584"/>
+            <a:ext cx="1819656" cy="384048"/>
+          </a:xfrm>
+          <a:prstGeom prst="rect">
+            <a:avLst/>
+          </a:prstGeom>
+          <a:noFill/>
+          <a:ln/>
+        </p:spPr>
+        <p:txBody>
+          <a:bodyPr wrap="square" lIns="25400" tIns="25400" rIns="25400" bIns="25400" rtlCol="0" anchor="ctr"/>
+          <a:lstStyle/>
+          <a:p>
+            <a:pPr marL="0" indent="0" algn="ctr">
+              <a:lnSpc>
+                <a:spcPct val="95000"/>
+              </a:lnSpc>
+              <a:buNone/>
+            </a:pPr>
+            <a:r>
+              <a:rPr lang="en-US" sz="1050" b="1" dirty="0">
+                <a:solidFill>
+                  <a:srgbClr val="2C2C2A"/>
+                </a:solidFill>
+                <a:latin typeface="Calibri" pitchFamily="34" charset="0"/>
+                <a:ea typeface="Calibri" pitchFamily="34" charset="-122"/>
+                <a:cs typeface="Calibri" pitchFamily="34" charset="-120"/>
+              </a:rPr>
+              <a:t>Auth</a:t>
+            </a:r>
+            <a:endParaRPr lang="en-US" sz="1050" dirty="0"/>
+          </a:p>
+          <a:p>
+            <a:pPr marL="0" indent="0" algn="ctr">
+              <a:lnSpc>
+                <a:spcPct val="95000"/>
+              </a:lnSpc>
+              <a:buNone/>
+            </a:pPr>
+            <a:r>
+              <a:rPr lang="en-US" sz="900" dirty="0">
+                <a:solidFill>
+                  <a:srgbClr val="444441"/>
+                </a:solidFill>
+                <a:latin typeface="Calibri" pitchFamily="34" charset="0"/>
+                <a:ea typeface="Calibri" pitchFamily="34" charset="-122"/>
+                <a:cs typeface="Calibri" pitchFamily="34" charset="-120"/>
+              </a:rPr>
+              <a:t>Amazon Cognito</a:t>
+            </a:r>
+            <a:endParaRPr lang="en-US" sz="1050" dirty="0"/>
+          </a:p>
+        </p:txBody>
+      </p:sp>
+      <p:sp>
+        <p:nvSpPr>
+          <p:cNvPr id="59" name="Shape 57"/>
+          <p:cNvSpPr/>
+          <p:nvPr/>
+        </p:nvSpPr>
+        <p:spPr>
+          <a:xfrm>
+            <a:off x="2953512" y="5815584"/>
+            <a:ext cx="1965960" cy="384048"/>
+          </a:xfrm>
+          <a:prstGeom prst="roundRect">
+            <a:avLst>
+              <a:gd name="adj" fmla="val 14286"/>
+            </a:avLst>
+          </a:prstGeom>
+          <a:solidFill>
+            <a:srgbClr val="F1EFE8"/>
+          </a:solidFill>
+          <a:ln w="12700">
+            <a:solidFill>
+              <a:srgbClr val="888780"/>
+            </a:solidFill>
+            <a:prstDash val="solid"/>
+          </a:ln>
+          <a:effectLst>
+            <a:outerShdw blurRad="63500" dist="25400" dir="5400000" algn="bl" rotWithShape="0">
+              <a:srgbClr val="000000">
+                <a:alpha val="10000"/>
+              </a:srgbClr>
+            </a:outerShdw>
+          </a:effectLst>
+        </p:spPr>
+      </p:sp>
+      <p:sp>
+        <p:nvSpPr>
+          <p:cNvPr id="60" name="Text 58"/>
+          <p:cNvSpPr/>
+          <p:nvPr/>
+        </p:nvSpPr>
+        <p:spPr>
+          <a:xfrm>
+            <a:off x="3026664" y="5815584"/>
+            <a:ext cx="1819656" cy="384048"/>
+          </a:xfrm>
+          <a:prstGeom prst="rect">
+            <a:avLst/>
+          </a:prstGeom>
+          <a:noFill/>
+          <a:ln/>
+        </p:spPr>
+        <p:txBody>
+          <a:bodyPr wrap="square" lIns="25400" tIns="25400" rIns="25400" bIns="25400" rtlCol="0" anchor="ctr"/>
+          <a:lstStyle/>
+          <a:p>
+            <a:pPr marL="0" indent="0" algn="ctr">
+              <a:lnSpc>
+                <a:spcPct val="95000"/>
+              </a:lnSpc>
+              <a:buNone/>
+            </a:pPr>
+            <a:r>
+              <a:rPr lang="en-US" sz="1050" b="1" dirty="0">
+                <a:solidFill>
+                  <a:srgbClr val="2C2C2A"/>
+                </a:solidFill>
+                <a:latin typeface="Calibri" pitchFamily="34" charset="0"/>
+                <a:ea typeface="Calibri" pitchFamily="34" charset="-122"/>
+                <a:cs typeface="Calibri" pitchFamily="34" charset="-120"/>
+              </a:rPr>
+              <a:t>Access</a:t>
+            </a:r>
+            <a:endParaRPr lang="en-US" sz="1050" dirty="0"/>
+          </a:p>
+          <a:p>
+            <a:pPr marL="0" indent="0" algn="ctr">
+              <a:lnSpc>
+                <a:spcPct val="95000"/>
+              </a:lnSpc>
+              <a:buNone/>
+            </a:pPr>
+            <a:r>
+              <a:rPr lang="en-US" sz="900" dirty="0">
+                <a:solidFill>
+                  <a:srgbClr val="444441"/>
+                </a:solidFill>
+                <a:latin typeface="Calibri" pitchFamily="34" charset="0"/>
+                <a:ea typeface="Calibri" pitchFamily="34" charset="-122"/>
+                <a:cs typeface="Calibri" pitchFamily="34" charset="-120"/>
+              </a:rPr>
+              <a:t>AWS IAM</a:t>
+            </a:r>
+            <a:endParaRPr lang="en-US" sz="1050" dirty="0"/>
+          </a:p>
+        </p:txBody>
+      </p:sp>
+      <p:sp>
+        <p:nvSpPr>
+          <p:cNvPr id="61" name="Shape 59"/>
+          <p:cNvSpPr/>
+          <p:nvPr/>
+        </p:nvSpPr>
+        <p:spPr>
+          <a:xfrm>
+            <a:off x="5102352" y="5815584"/>
+            <a:ext cx="1965960" cy="384048"/>
+          </a:xfrm>
+          <a:prstGeom prst="roundRect">
+            <a:avLst>
+              <a:gd name="adj" fmla="val 14286"/>
+            </a:avLst>
+          </a:prstGeom>
+          <a:solidFill>
+            <a:srgbClr val="F1EFE8"/>
+          </a:solidFill>
+          <a:ln w="12700">
+            <a:solidFill>
+              <a:srgbClr val="888780"/>
+            </a:solidFill>
+            <a:prstDash val="solid"/>
+          </a:ln>
+          <a:effectLst>
+            <a:outerShdw blurRad="63500" dist="25400" dir="5400000" algn="bl" rotWithShape="0">
+              <a:srgbClr val="000000">
+                <a:alpha val="10000"/>
+              </a:srgbClr>
+            </a:outerShdw>
+          </a:effectLst>
+        </p:spPr>
+      </p:sp>
+      <p:sp>
+        <p:nvSpPr>
+          <p:cNvPr id="62" name="Text 60"/>
+          <p:cNvSpPr/>
+          <p:nvPr/>
+        </p:nvSpPr>
+        <p:spPr>
+          <a:xfrm>
+            <a:off x="5175504" y="5815584"/>
+            <a:ext cx="1819656" cy="384048"/>
+          </a:xfrm>
+          <a:prstGeom prst="rect">
+            <a:avLst/>
+          </a:prstGeom>
+          <a:noFill/>
+          <a:ln/>
+        </p:spPr>
+        <p:txBody>
+          <a:bodyPr wrap="square" lIns="25400" tIns="25400" rIns="25400" bIns="25400" rtlCol="0" anchor="ctr"/>
+          <a:lstStyle/>
+          <a:p>
+            <a:pPr marL="0" indent="0" algn="ctr">
+              <a:lnSpc>
+                <a:spcPct val="95000"/>
+              </a:lnSpc>
+              <a:buNone/>
+            </a:pPr>
+            <a:r>
+              <a:rPr lang="en-US" sz="1050" b="1" dirty="0">
+                <a:solidFill>
+                  <a:srgbClr val="2C2C2A"/>
+                </a:solidFill>
+                <a:latin typeface="Calibri" pitchFamily="34" charset="0"/>
+                <a:ea typeface="Calibri" pitchFamily="34" charset="-122"/>
+                <a:cs typeface="Calibri" pitchFamily="34" charset="-120"/>
+              </a:rPr>
+              <a:t>Encryption</a:t>
+            </a:r>
+            <a:endParaRPr lang="en-US" sz="1050" dirty="0"/>
+          </a:p>
+          <a:p>
+            <a:pPr marL="0" indent="0" algn="ctr">
+              <a:lnSpc>
+                <a:spcPct val="95000"/>
+              </a:lnSpc>
+              <a:buNone/>
+            </a:pPr>
+            <a:r>
+              <a:rPr lang="en-US" sz="900" dirty="0">
+                <a:solidFill>
+                  <a:srgbClr val="444441"/>
+                </a:solidFill>
+                <a:latin typeface="Calibri" pitchFamily="34" charset="0"/>
+                <a:ea typeface="Calibri" pitchFamily="34" charset="-122"/>
+                <a:cs typeface="Calibri" pitchFamily="34" charset="-120"/>
+              </a:rPr>
+              <a:t>AWS KMS</a:t>
+            </a:r>
+            <a:endParaRPr lang="en-US" sz="1050" dirty="0"/>
+          </a:p>
+        </p:txBody>
+      </p:sp>
+      <p:sp>
+        <p:nvSpPr>
+          <p:cNvPr id="63" name="Shape 61"/>
+          <p:cNvSpPr/>
+          <p:nvPr/>
+        </p:nvSpPr>
+        <p:spPr>
+          <a:xfrm>
+            <a:off x="7251192" y="5815584"/>
+            <a:ext cx="1965960" cy="384048"/>
+          </a:xfrm>
+          <a:prstGeom prst="roundRect">
+            <a:avLst>
+              <a:gd name="adj" fmla="val 14286"/>
+            </a:avLst>
+          </a:prstGeom>
+          <a:solidFill>
+            <a:srgbClr val="F1EFE8"/>
+          </a:solidFill>
+          <a:ln w="12700">
+            <a:solidFill>
+              <a:srgbClr val="888780"/>
+            </a:solidFill>
+            <a:prstDash val="solid"/>
+          </a:ln>
+          <a:effectLst>
+            <a:outerShdw blurRad="63500" dist="25400" dir="5400000" algn="bl" rotWithShape="0">
+              <a:srgbClr val="000000">
+                <a:alpha val="10000"/>
+              </a:srgbClr>
+            </a:outerShdw>
+          </a:effectLst>
+        </p:spPr>
+      </p:sp>
+      <p:sp>
+        <p:nvSpPr>
+          <p:cNvPr id="64" name="Text 62"/>
+          <p:cNvSpPr/>
+          <p:nvPr/>
+        </p:nvSpPr>
+        <p:spPr>
+          <a:xfrm>
+            <a:off x="7324344" y="5815584"/>
+            <a:ext cx="1819656" cy="384048"/>
+          </a:xfrm>
+          <a:prstGeom prst="rect">
+            <a:avLst/>
+          </a:prstGeom>
+          <a:noFill/>
+          <a:ln/>
+        </p:spPr>
+        <p:txBody>
+          <a:bodyPr wrap="square" lIns="25400" tIns="25400" rIns="25400" bIns="25400" rtlCol="0" anchor="ctr"/>
+          <a:lstStyle/>
+          <a:p>
+            <a:pPr marL="0" indent="0" algn="ctr">
+              <a:lnSpc>
+                <a:spcPct val="95000"/>
+              </a:lnSpc>
+              <a:buNone/>
+            </a:pPr>
+            <a:r>
+              <a:rPr lang="en-US" sz="1050" b="1" dirty="0">
+                <a:solidFill>
+                  <a:srgbClr val="2C2C2A"/>
+                </a:solidFill>
+                <a:latin typeface="Calibri" pitchFamily="34" charset="0"/>
+                <a:ea typeface="Calibri" pitchFamily="34" charset="-122"/>
+                <a:cs typeface="Calibri" pitchFamily="34" charset="-120"/>
+              </a:rPr>
+              <a:t>Monitoring</a:t>
+            </a:r>
+            <a:endParaRPr lang="en-US" sz="1050" dirty="0"/>
+          </a:p>
+          <a:p>
+            <a:pPr marL="0" indent="0" algn="ctr">
+              <a:lnSpc>
+                <a:spcPct val="95000"/>
+              </a:lnSpc>
+              <a:buNone/>
+            </a:pPr>
+            <a:r>
+              <a:rPr lang="en-US" sz="900" dirty="0">
+                <a:solidFill>
+                  <a:srgbClr val="444441"/>
+                </a:solidFill>
+                <a:latin typeface="Calibri" pitchFamily="34" charset="0"/>
+                <a:ea typeface="Calibri" pitchFamily="34" charset="-122"/>
+                <a:cs typeface="Calibri" pitchFamily="34" charset="-120"/>
+              </a:rPr>
+              <a:t>Amazon CloudWatch</a:t>
+            </a:r>
+            <a:endParaRPr lang="en-US" sz="1050" dirty="0"/>
+          </a:p>
+        </p:txBody>
+      </p:sp>
+      <p:sp>
+        <p:nvSpPr>
+          <p:cNvPr id="65" name="Shape 63"/>
+          <p:cNvSpPr/>
+          <p:nvPr/>
+        </p:nvSpPr>
+        <p:spPr>
+          <a:xfrm>
+            <a:off x="9400032" y="5815584"/>
+            <a:ext cx="1965960" cy="384048"/>
+          </a:xfrm>
+          <a:prstGeom prst="roundRect">
+            <a:avLst>
+              <a:gd name="adj" fmla="val 14286"/>
+            </a:avLst>
+          </a:prstGeom>
+          <a:solidFill>
+            <a:srgbClr val="F1EFE8"/>
+          </a:solidFill>
+          <a:ln w="12700">
+            <a:solidFill>
+              <a:srgbClr val="888780"/>
+            </a:solidFill>
+            <a:prstDash val="solid"/>
+          </a:ln>
+          <a:effectLst>
+            <a:outerShdw blurRad="63500" dist="25400" dir="5400000" algn="bl" rotWithShape="0">
+              <a:srgbClr val="000000">
+                <a:alpha val="10000"/>
+              </a:srgbClr>
+            </a:outerShdw>
+          </a:effectLst>
+        </p:spPr>
+      </p:sp>
+      <p:sp>
+        <p:nvSpPr>
+          <p:cNvPr id="66" name="Text 64"/>
+          <p:cNvSpPr/>
+          <p:nvPr/>
+        </p:nvSpPr>
+        <p:spPr>
+          <a:xfrm>
+            <a:off x="9473184" y="5815584"/>
+            <a:ext cx="1819656" cy="384048"/>
+          </a:xfrm>
+          <a:prstGeom prst="rect">
+            <a:avLst/>
+          </a:prstGeom>
+          <a:noFill/>
+          <a:ln/>
+        </p:spPr>
+        <p:txBody>
+          <a:bodyPr wrap="square" lIns="25400" tIns="25400" rIns="25400" bIns="25400" rtlCol="0" anchor="ctr"/>
+          <a:lstStyle/>
+          <a:p>
+            <a:pPr marL="0" indent="0" algn="ctr">
+              <a:lnSpc>
+                <a:spcPct val="95000"/>
+              </a:lnSpc>
+              <a:buNone/>
+            </a:pPr>
+            <a:r>
+              <a:rPr lang="en-US" sz="1050" b="1" dirty="0">
+                <a:solidFill>
+                  <a:srgbClr val="2C2C2A"/>
+                </a:solidFill>
+                <a:latin typeface="Calibri" pitchFamily="34" charset="0"/>
+                <a:ea typeface="Calibri" pitchFamily="34" charset="-122"/>
+                <a:cs typeface="Calibri" pitchFamily="34" charset="-120"/>
+              </a:rPr>
+              <a:t>Audit</a:t>
+            </a:r>
+            <a:endParaRPr lang="en-US" sz="1050" dirty="0"/>
+          </a:p>
+          <a:p>
+            <a:pPr marL="0" indent="0" algn="ctr">
+              <a:lnSpc>
+                <a:spcPct val="95000"/>
+              </a:lnSpc>
+              <a:buNone/>
+            </a:pPr>
+            <a:r>
+              <a:rPr lang="en-US" sz="900" dirty="0">
+                <a:solidFill>
+                  <a:srgbClr val="444441"/>
+                </a:solidFill>
+                <a:latin typeface="Calibri" pitchFamily="34" charset="0"/>
+                <a:ea typeface="Calibri" pitchFamily="34" charset="-122"/>
+                <a:cs typeface="Calibri" pitchFamily="34" charset="-120"/>
+              </a:rPr>
+              <a:t>AWS CloudTrail</a:t>
+            </a:r>
+            <a:endParaRPr lang="en-US" sz="1050" dirty="0"/>
+          </a:p>
+        </p:txBody>
+      </p:sp>
+      <p:sp>
+        <p:nvSpPr>
+          <p:cNvPr id="67" name="Text 65"/>
+          <p:cNvSpPr/>
+          <p:nvPr/>
+        </p:nvSpPr>
+        <p:spPr>
+          <a:xfrm>
+            <a:off x="457200" y="6355080"/>
+            <a:ext cx="11247120" cy="320040"/>
+          </a:xfrm>
+          <a:prstGeom prst="rect">
+            <a:avLst/>
+          </a:prstGeom>
+          <a:noFill/>
+          <a:ln/>
+        </p:spPr>
+        <p:txBody>
+          <a:bodyPr wrap="square" lIns="0" tIns="0" rIns="0" bIns="0" rtlCol="0" anchor="ctr"/>
+          <a:lstStyle/>
+          <a:p>
+            <a:pPr marL="0" indent="0" algn="l">
+              <a:buNone/>
+            </a:pPr>
+            <a:r>
+              <a:rPr lang="en-US" sz="850" i="1" dirty="0">
+                <a:solidFill>
+                  <a:srgbClr val="8A897F"/>
+                </a:solidFill>
+                <a:latin typeface="Calibri" pitchFamily="34" charset="0"/>
+                <a:ea typeface="Calibri" pitchFamily="34" charset="-122"/>
+                <a:cs typeface="Calibri" pitchFamily="34" charset="-120"/>
+              </a:rPr>
+              <a:t>Metadata &amp; ontology — AQF level, Bloom's level, DigComp mapping, output templates and learner state — live in AWS Glue Data Catalog + Amazon DynamoDB/Aurora, read by the input assembler so competency data is never guessed.</a:t>
+            </a:r>
+            <a:endParaRPr lang="en-US" sz="850" dirty="0"/>
+          </a:p>
+        </p:txBody>
+      </p:sp>
+    </p:spTree>
+    <p:extLst>
+      <p:ext uri="{BB962C8B-B14F-4D97-AF65-F5344CB8AC3E}">
+        <p14:creationId xmlns:p14="http://schemas.microsoft.com/office/powerpoint/2010/main" val="2962748602"/>
+      </p:ext>
+    </p:extLst>
+  </p:cSld>
+  <p:clrMapOvr>
+    <a:masterClrMapping/>
+  </p:clrMapOvr>
+  <p:timing>
+    <p:tnLst>
+      <p:par>
+        <p:cTn id="1" dur="indefinite" restart="never" nodeType="tmRoot"/>
+      </p:par>
+    </p:tnLst>
+  </p:timing>
+</p:sld>
+</file>
+
+<file path=ppt/slides/slide3.xml><?xml version="1.0" encoding="utf-8"?>
+<p:sld xmlns:a="http://schemas.openxmlformats.org/drawingml/2006/main" xmlns:r="http://schemas.openxmlformats.org/officeDocument/2006/relationships" xmlns:p="http://schemas.openxmlformats.org/presentationml/2006/main">
+  <p:cSld>
+    <p:spTree>
+      <p:nvGrpSpPr>
+        <p:cNvPr id="1" name=""/>
+        <p:cNvGrpSpPr/>
+        <p:nvPr/>
+      </p:nvGrpSpPr>
+      <p:grpSpPr>
+        <a:xfrm>
+          <a:off x="0" y="0"/>
+          <a:ext cx="0" cy="0"/>
+          <a:chOff x="0" y="0"/>
+          <a:chExt cx="0" cy="0"/>
+        </a:xfrm>
+      </p:grpSpPr>
+      <p:sp>
+        <p:nvSpPr>
           <p:cNvPr id="2" name="Shape 0"/>
           <p:cNvSpPr/>
           <p:nvPr/>
@@ -10717,7 +14275,7 @@
 </p:sld>
 </file>
 
-<file path=ppt/slides/slide3.xml><?xml version="1.0" encoding="utf-8"?>
+<file path=ppt/slides/slide4.xml><?xml version="1.0" encoding="utf-8"?>
 <p:sld xmlns:a="http://schemas.openxmlformats.org/drawingml/2006/main" xmlns:r="http://schemas.openxmlformats.org/officeDocument/2006/relationships" xmlns:p="http://schemas.openxmlformats.org/presentationml/2006/main">
   <p:cSld name="Slide 1">
     <p:bg>
